--- a/reports/review_2.pptx
+++ b/reports/review_2.pptx
@@ -1,11 +1,11 @@
 
 <file path=ppt/presentation.xml><?xml version="1.0" encoding="utf-8"?>
-<p:presentation xmlns:a="http://schemas.openxmlformats.org/drawingml/2006/main" xmlns:r="http://schemas.openxmlformats.org/officeDocument/2006/relationships" xmlns:p="http://schemas.openxmlformats.org/presentationml/2006/main" saveSubsetFonts="1">
+<p:presentation xmlns:a="http://schemas.openxmlformats.org/drawingml/2006/main" xmlns:r="http://schemas.openxmlformats.org/officeDocument/2006/relationships" xmlns:p="http://schemas.openxmlformats.org/presentationml/2006/main">
   <p:sldMasterIdLst>
-    <p:sldMasterId id="2147483731" r:id="rId1"/>
-    <p:sldMasterId id="2147483719" r:id="rId2"/>
-    <p:sldMasterId id="2147483707" r:id="rId3"/>
-    <p:sldMasterId id="2147483755" r:id="rId4"/>
+    <p:sldMasterId id="2147483648" r:id="rId1"/>
+    <p:sldMasterId id="2147483660" r:id="rId2"/>
+    <p:sldMasterId id="2147483672" r:id="rId3"/>
+    <p:sldMasterId id="2147483684" r:id="rId4"/>
   </p:sldMasterIdLst>
   <p:notesMasterIdLst>
     <p:notesMasterId r:id="rId26"/>
@@ -148,38 +148,47 @@
 <pc:chgInfo xmlns:a="http://schemas.openxmlformats.org/drawingml/2006/main" xmlns:r="http://schemas.openxmlformats.org/officeDocument/2006/relationships" xmlns:ac="http://schemas.microsoft.com/office/drawing/2013/main/command" xmlns:pc="http://schemas.microsoft.com/office/powerpoint/2013/main/command">
   <pc:docChgLst>
     <pc:chgData name="M Thanvitha" userId="e60adfe4818120f4" providerId="LiveId" clId="{48049ECB-6A9B-4AE2-B4C7-26F2AA572E07}"/>
-    <pc:docChg chg="undo custSel modSld">
-      <pc:chgData name="M Thanvitha" userId="e60adfe4818120f4" providerId="LiveId" clId="{48049ECB-6A9B-4AE2-B4C7-26F2AA572E07}" dt="2026-09-24T05:36:10.463" v="2" actId="1076"/>
+    <pc:docChg chg="custSel modSld">
+      <pc:chgData name="M Thanvitha" userId="e60adfe4818120f4" providerId="LiveId" clId="{48049ECB-6A9B-4AE2-B4C7-26F2AA572E07}" dt="2026-10-29T03:01:04.376" v="17" actId="1076"/>
       <pc:docMkLst>
         <pc:docMk/>
       </pc:docMkLst>
-      <pc:sldChg chg="modSp mod">
-        <pc:chgData name="M Thanvitha" userId="e60adfe4818120f4" providerId="LiveId" clId="{48049ECB-6A9B-4AE2-B4C7-26F2AA572E07}" dt="2026-09-24T04:18:39.241" v="1" actId="255"/>
+      <pc:sldChg chg="addSp delSp modSp mod">
+        <pc:chgData name="M Thanvitha" userId="e60adfe4818120f4" providerId="LiveId" clId="{48049ECB-6A9B-4AE2-B4C7-26F2AA572E07}" dt="2026-10-29T03:01:04.376" v="17" actId="1076"/>
         <pc:sldMkLst>
           <pc:docMk/>
-          <pc:sldMk cId="2054725488" sldId="322"/>
+          <pc:sldMk cId="0" sldId="408"/>
         </pc:sldMkLst>
-        <pc:spChg chg="mod">
-          <ac:chgData name="M Thanvitha" userId="e60adfe4818120f4" providerId="LiveId" clId="{48049ECB-6A9B-4AE2-B4C7-26F2AA572E07}" dt="2026-09-24T04:18:39.241" v="1" actId="255"/>
-          <ac:spMkLst>
-            <pc:docMk/>
-            <pc:sldMk cId="2054725488" sldId="322"/>
-            <ac:spMk id="3" creationId="{1ED8AE9C-865A-0844-B727-5DC6BA230AA4}"/>
-          </ac:spMkLst>
-        </pc:spChg>
-      </pc:sldChg>
-      <pc:sldChg chg="modSp mod">
-        <pc:chgData name="M Thanvitha" userId="e60adfe4818120f4" providerId="LiveId" clId="{48049ECB-6A9B-4AE2-B4C7-26F2AA572E07}" dt="2026-09-24T05:36:10.463" v="2" actId="1076"/>
-        <pc:sldMkLst>
-          <pc:docMk/>
-          <pc:sldMk cId="4114544890" sldId="401"/>
-        </pc:sldMkLst>
-        <pc:picChg chg="mod">
-          <ac:chgData name="M Thanvitha" userId="e60adfe4818120f4" providerId="LiveId" clId="{48049ECB-6A9B-4AE2-B4C7-26F2AA572E07}" dt="2026-09-24T05:36:10.463" v="2" actId="1076"/>
+        <pc:picChg chg="del">
+          <ac:chgData name="M Thanvitha" userId="e60adfe4818120f4" providerId="LiveId" clId="{48049ECB-6A9B-4AE2-B4C7-26F2AA572E07}" dt="2026-10-29T02:59:49.031" v="1" actId="478"/>
           <ac:picMkLst>
             <pc:docMk/>
-            <pc:sldMk cId="4114544890" sldId="401"/>
-            <ac:picMk id="6" creationId="{28DCDE9A-30AD-04CF-5255-C184A032695D}"/>
+            <pc:sldMk cId="0" sldId="408"/>
+            <ac:picMk id="3" creationId="{00000000-0000-0000-0000-000000000000}"/>
+          </ac:picMkLst>
+        </pc:picChg>
+        <pc:picChg chg="add mod">
+          <ac:chgData name="M Thanvitha" userId="e60adfe4818120f4" providerId="LiveId" clId="{48049ECB-6A9B-4AE2-B4C7-26F2AA572E07}" dt="2026-10-29T03:01:04.376" v="17" actId="1076"/>
+          <ac:picMkLst>
+            <pc:docMk/>
+            <pc:sldMk cId="0" sldId="408"/>
+            <ac:picMk id="6" creationId="{FE7B2CE9-8528-A6D1-EB56-6DA76FB428C4}"/>
+          </ac:picMkLst>
+        </pc:picChg>
+        <pc:picChg chg="del">
+          <ac:chgData name="M Thanvitha" userId="e60adfe4818120f4" providerId="LiveId" clId="{48049ECB-6A9B-4AE2-B4C7-26F2AA572E07}" dt="2026-10-29T02:59:44.886" v="0" actId="478"/>
+          <ac:picMkLst>
+            <pc:docMk/>
+            <pc:sldMk cId="0" sldId="408"/>
+            <ac:picMk id="7" creationId="{00000000-0000-0000-0000-000000000000}"/>
+          </ac:picMkLst>
+        </pc:picChg>
+        <pc:picChg chg="add mod">
+          <ac:chgData name="M Thanvitha" userId="e60adfe4818120f4" providerId="LiveId" clId="{48049ECB-6A9B-4AE2-B4C7-26F2AA572E07}" dt="2026-10-29T03:00:48.679" v="10" actId="1076"/>
+          <ac:picMkLst>
+            <pc:docMk/>
+            <pc:sldMk cId="0" sldId="408"/>
+            <ac:picMk id="9" creationId="{2FA0155A-92BF-5250-C0E9-B9B505954AA1}"/>
           </ac:picMkLst>
         </pc:picChg>
       </pc:sldChg>
@@ -212,13 +221,7 @@
       </p:grpSpPr>
       <p:sp>
         <p:nvSpPr>
-          <p:cNvPr id="2" name="Header Placeholder 1">
-            <a:extLst>
-              <a:ext uri="{FF2B5EF4-FFF2-40B4-BE49-F238E27FC236}">
-                <a16:creationId xmlns:a16="http://schemas.microsoft.com/office/drawing/2014/main" id="{17CF1BD0-4285-1DBF-1F85-12A9C003EC48}"/>
-              </a:ext>
-            </a:extLst>
-          </p:cNvPr>
+          <p:cNvPr id="2" name="Header Placeholder 1"/>
           <p:cNvSpPr>
             <a:spLocks noGrp="1"/>
           </p:cNvSpPr>
@@ -249,13 +252,7 @@
       </p:sp>
       <p:sp>
         <p:nvSpPr>
-          <p:cNvPr id="3" name="Date Placeholder 2">
-            <a:extLst>
-              <a:ext uri="{FF2B5EF4-FFF2-40B4-BE49-F238E27FC236}">
-                <a16:creationId xmlns:a16="http://schemas.microsoft.com/office/drawing/2014/main" id="{4449A90F-9E6F-2BBD-E4C1-F231DFECBEAB}"/>
-              </a:ext>
-            </a:extLst>
-          </p:cNvPr>
+          <p:cNvPr id="3" name="Date Placeholder 2"/>
           <p:cNvSpPr>
             <a:spLocks noGrp="1"/>
           </p:cNvSpPr>
@@ -282,7 +279,7 @@
           <a:p>
             <a:fld id="{C551894C-48C1-41F1-A201-34DB6CBBBBE6}" type="datetimeFigureOut">
               <a:rPr lang="en-IN" smtClean="0"/>
-              <a:t>24-09-2026</a:t>
+              <a:t>29-10-2026</a:t>
             </a:fld>
             <a:endParaRPr lang="en-IN"/>
           </a:p>
@@ -290,13 +287,7 @@
       </p:sp>
       <p:sp>
         <p:nvSpPr>
-          <p:cNvPr id="4" name="Footer Placeholder 3">
-            <a:extLst>
-              <a:ext uri="{FF2B5EF4-FFF2-40B4-BE49-F238E27FC236}">
-                <a16:creationId xmlns:a16="http://schemas.microsoft.com/office/drawing/2014/main" id="{8412C0E8-5C08-8DCD-99CD-96B540853BFF}"/>
-              </a:ext>
-            </a:extLst>
-          </p:cNvPr>
+          <p:cNvPr id="4" name="Footer Placeholder 3"/>
           <p:cNvSpPr>
             <a:spLocks noGrp="1"/>
           </p:cNvSpPr>
@@ -327,13 +318,7 @@
       </p:sp>
       <p:sp>
         <p:nvSpPr>
-          <p:cNvPr id="5" name="Slide Number Placeholder 4">
-            <a:extLst>
-              <a:ext uri="{FF2B5EF4-FFF2-40B4-BE49-F238E27FC236}">
-                <a16:creationId xmlns:a16="http://schemas.microsoft.com/office/drawing/2014/main" id="{D96225E5-1D19-4F74-0CA3-0BC39FA2D18F}"/>
-              </a:ext>
-            </a:extLst>
-          </p:cNvPr>
+          <p:cNvPr id="5" name="Slide Number Placeholder 4"/>
           <p:cNvSpPr>
             <a:spLocks noGrp="1"/>
           </p:cNvSpPr>
@@ -369,7 +354,7 @@
     </p:spTree>
     <p:extLst>
       <p:ext uri="{BB962C8B-B14F-4D97-AF65-F5344CB8AC3E}">
-        <p14:creationId xmlns:p14="http://schemas.microsoft.com/office/powerpoint/2010/main" val="414684604"/>
+        <p14:creationId xmlns:p14="http://schemas.microsoft.com/office/powerpoint/2010/main" val="1"/>
       </p:ext>
     </p:extLst>
   </p:cSld>
@@ -460,7 +445,7 @@
           <a:p>
             <a:fld id="{FE0D586D-DA7F-403D-AF89-CB8CBB1EF597}" type="datetimeFigureOut">
               <a:rPr lang="en-IN" smtClean="0"/>
-              <a:t>24-09-2026</a:t>
+              <a:t>29-10-2026</a:t>
             </a:fld>
             <a:endParaRPr lang="en-IN"/>
           </a:p>
@@ -626,11 +611,6 @@
         </p:txBody>
       </p:sp>
     </p:spTree>
-    <p:extLst>
-      <p:ext uri="{BB962C8B-B14F-4D97-AF65-F5344CB8AC3E}">
-        <p14:creationId xmlns:p14="http://schemas.microsoft.com/office/powerpoint/2010/main" val="3504526264"/>
-      </p:ext>
-    </p:extLst>
   </p:cSld>
   <p:clrMap bg1="lt1" tx1="dk1" bg2="lt2" tx2="dk2" accent1="accent1" accent2="accent2" accent3="accent3" accent4="accent4" accent5="accent5" accent6="accent6" hlink="hlink" folHlink="folHlink"/>
   <p:hf sldNum="0" dt="0"/>
@@ -816,11 +796,6 @@
         </p:txBody>
       </p:sp>
     </p:spTree>
-    <p:extLst>
-      <p:ext uri="{BB962C8B-B14F-4D97-AF65-F5344CB8AC3E}">
-        <p14:creationId xmlns:p14="http://schemas.microsoft.com/office/powerpoint/2010/main" val="3788910631"/>
-      </p:ext>
-    </p:extLst>
   </p:cSld>
   <p:clrMapOvr>
     <a:masterClrMapping/>
@@ -922,11 +897,6 @@
         </p:txBody>
       </p:sp>
     </p:spTree>
-    <p:extLst>
-      <p:ext uri="{BB962C8B-B14F-4D97-AF65-F5344CB8AC3E}">
-        <p14:creationId xmlns:p14="http://schemas.microsoft.com/office/powerpoint/2010/main" val="1273940024"/>
-      </p:ext>
-    </p:extLst>
   </p:cSld>
   <p:clrMapOvr>
     <a:masterClrMapping/>
@@ -953,13 +923,7 @@
       </p:grpSpPr>
       <p:sp>
         <p:nvSpPr>
-          <p:cNvPr id="2" name="Title 1">
-            <a:extLst>
-              <a:ext uri="{FF2B5EF4-FFF2-40B4-BE49-F238E27FC236}">
-                <a16:creationId xmlns:a16="http://schemas.microsoft.com/office/drawing/2014/main" id="{4ADF2AE0-10FC-426C-0BDB-E5EDF2F917D5}"/>
-              </a:ext>
-            </a:extLst>
-          </p:cNvPr>
+          <p:cNvPr id="2" name="Title 1"/>
           <p:cNvSpPr>
             <a:spLocks noGrp="1"/>
           </p:cNvSpPr>
@@ -991,13 +955,7 @@
       </p:sp>
       <p:sp>
         <p:nvSpPr>
-          <p:cNvPr id="3" name="Subtitle 2">
-            <a:extLst>
-              <a:ext uri="{FF2B5EF4-FFF2-40B4-BE49-F238E27FC236}">
-                <a16:creationId xmlns:a16="http://schemas.microsoft.com/office/drawing/2014/main" id="{9383E875-E3B7-3652-9C2D-322C85117800}"/>
-              </a:ext>
-            </a:extLst>
-          </p:cNvPr>
+          <p:cNvPr id="3" name="Subtitle 2"/>
           <p:cNvSpPr>
             <a:spLocks noGrp="1"/>
           </p:cNvSpPr>
@@ -1062,13 +1020,7 @@
       </p:sp>
       <p:sp>
         <p:nvSpPr>
-          <p:cNvPr id="4" name="Date Placeholder 3">
-            <a:extLst>
-              <a:ext uri="{FF2B5EF4-FFF2-40B4-BE49-F238E27FC236}">
-                <a16:creationId xmlns:a16="http://schemas.microsoft.com/office/drawing/2014/main" id="{611841AC-ABFE-7C19-D82D-6C99A5B39B02}"/>
-              </a:ext>
-            </a:extLst>
-          </p:cNvPr>
+          <p:cNvPr id="4" name="Date Placeholder 3"/>
           <p:cNvSpPr>
             <a:spLocks noGrp="1"/>
           </p:cNvSpPr>
@@ -1083,7 +1035,7 @@
           <a:p>
             <a:fld id="{9DBD89FD-1150-4979-9614-9DD9EB69C9AA}" type="datetimeFigureOut">
               <a:rPr lang="en-IN" smtClean="0"/>
-              <a:t>24-09-2026</a:t>
+              <a:t>29-10-2026</a:t>
             </a:fld>
             <a:endParaRPr lang="en-IN"/>
           </a:p>
@@ -1091,13 +1043,7 @@
       </p:sp>
       <p:sp>
         <p:nvSpPr>
-          <p:cNvPr id="5" name="Footer Placeholder 4">
-            <a:extLst>
-              <a:ext uri="{FF2B5EF4-FFF2-40B4-BE49-F238E27FC236}">
-                <a16:creationId xmlns:a16="http://schemas.microsoft.com/office/drawing/2014/main" id="{39680885-ABC1-FB6C-B5FB-24D6B3FBAC20}"/>
-              </a:ext>
-            </a:extLst>
-          </p:cNvPr>
+          <p:cNvPr id="5" name="Footer Placeholder 4"/>
           <p:cNvSpPr>
             <a:spLocks noGrp="1"/>
           </p:cNvSpPr>
@@ -1116,13 +1062,7 @@
       </p:sp>
       <p:sp>
         <p:nvSpPr>
-          <p:cNvPr id="6" name="Slide Number Placeholder 5">
-            <a:extLst>
-              <a:ext uri="{FF2B5EF4-FFF2-40B4-BE49-F238E27FC236}">
-                <a16:creationId xmlns:a16="http://schemas.microsoft.com/office/drawing/2014/main" id="{4547DC9D-19CD-B202-2B83-E0899E445243}"/>
-              </a:ext>
-            </a:extLst>
-          </p:cNvPr>
+          <p:cNvPr id="6" name="Slide Number Placeholder 5"/>
           <p:cNvSpPr>
             <a:spLocks noGrp="1"/>
           </p:cNvSpPr>
@@ -1144,11 +1084,6 @@
         </p:txBody>
       </p:sp>
     </p:spTree>
-    <p:extLst>
-      <p:ext uri="{BB962C8B-B14F-4D97-AF65-F5344CB8AC3E}">
-        <p14:creationId xmlns:p14="http://schemas.microsoft.com/office/powerpoint/2010/main" val="3859775044"/>
-      </p:ext>
-    </p:extLst>
   </p:cSld>
   <p:clrMapOvr>
     <a:masterClrMapping/>
@@ -1175,13 +1110,7 @@
       </p:grpSpPr>
       <p:sp>
         <p:nvSpPr>
-          <p:cNvPr id="2" name="Title 1">
-            <a:extLst>
-              <a:ext uri="{FF2B5EF4-FFF2-40B4-BE49-F238E27FC236}">
-                <a16:creationId xmlns:a16="http://schemas.microsoft.com/office/drawing/2014/main" id="{10F77463-B71E-88C9-E822-48E99A7FF84D}"/>
-              </a:ext>
-            </a:extLst>
-          </p:cNvPr>
+          <p:cNvPr id="2" name="Title 1"/>
           <p:cNvSpPr>
             <a:spLocks noGrp="1"/>
           </p:cNvSpPr>
@@ -1204,13 +1133,7 @@
       </p:sp>
       <p:sp>
         <p:nvSpPr>
-          <p:cNvPr id="3" name="Vertical Text Placeholder 2">
-            <a:extLst>
-              <a:ext uri="{FF2B5EF4-FFF2-40B4-BE49-F238E27FC236}">
-                <a16:creationId xmlns:a16="http://schemas.microsoft.com/office/drawing/2014/main" id="{B45BF2A4-9DBF-E1DE-3C4D-D911961340DB}"/>
-              </a:ext>
-            </a:extLst>
-          </p:cNvPr>
+          <p:cNvPr id="3" name="Vertical Text Placeholder 2"/>
           <p:cNvSpPr>
             <a:spLocks noGrp="1"/>
           </p:cNvSpPr>
@@ -1262,13 +1185,7 @@
       </p:sp>
       <p:sp>
         <p:nvSpPr>
-          <p:cNvPr id="4" name="Date Placeholder 3">
-            <a:extLst>
-              <a:ext uri="{FF2B5EF4-FFF2-40B4-BE49-F238E27FC236}">
-                <a16:creationId xmlns:a16="http://schemas.microsoft.com/office/drawing/2014/main" id="{9888E53D-18F7-DDAB-669F-F896929AD619}"/>
-              </a:ext>
-            </a:extLst>
-          </p:cNvPr>
+          <p:cNvPr id="4" name="Date Placeholder 3"/>
           <p:cNvSpPr>
             <a:spLocks noGrp="1"/>
           </p:cNvSpPr>
@@ -1283,7 +1200,7 @@
           <a:p>
             <a:fld id="{9DBD89FD-1150-4979-9614-9DD9EB69C9AA}" type="datetimeFigureOut">
               <a:rPr lang="en-IN" smtClean="0"/>
-              <a:t>24-09-2026</a:t>
+              <a:t>29-10-2026</a:t>
             </a:fld>
             <a:endParaRPr lang="en-IN"/>
           </a:p>
@@ -1291,13 +1208,7 @@
       </p:sp>
       <p:sp>
         <p:nvSpPr>
-          <p:cNvPr id="5" name="Footer Placeholder 4">
-            <a:extLst>
-              <a:ext uri="{FF2B5EF4-FFF2-40B4-BE49-F238E27FC236}">
-                <a16:creationId xmlns:a16="http://schemas.microsoft.com/office/drawing/2014/main" id="{1DBF3B6A-6945-DCAD-58BB-EB48FD3CC499}"/>
-              </a:ext>
-            </a:extLst>
-          </p:cNvPr>
+          <p:cNvPr id="5" name="Footer Placeholder 4"/>
           <p:cNvSpPr>
             <a:spLocks noGrp="1"/>
           </p:cNvSpPr>
@@ -1316,13 +1227,7 @@
       </p:sp>
       <p:sp>
         <p:nvSpPr>
-          <p:cNvPr id="6" name="Slide Number Placeholder 5">
-            <a:extLst>
-              <a:ext uri="{FF2B5EF4-FFF2-40B4-BE49-F238E27FC236}">
-                <a16:creationId xmlns:a16="http://schemas.microsoft.com/office/drawing/2014/main" id="{FBFD397C-22ED-7A15-B740-DB385AA4D5BF}"/>
-              </a:ext>
-            </a:extLst>
-          </p:cNvPr>
+          <p:cNvPr id="6" name="Slide Number Placeholder 5"/>
           <p:cNvSpPr>
             <a:spLocks noGrp="1"/>
           </p:cNvSpPr>
@@ -1344,11 +1249,6 @@
         </p:txBody>
       </p:sp>
     </p:spTree>
-    <p:extLst>
-      <p:ext uri="{BB962C8B-B14F-4D97-AF65-F5344CB8AC3E}">
-        <p14:creationId xmlns:p14="http://schemas.microsoft.com/office/powerpoint/2010/main" val="120455280"/>
-      </p:ext>
-    </p:extLst>
   </p:cSld>
   <p:clrMapOvr>
     <a:masterClrMapping/>
@@ -1375,13 +1275,7 @@
       </p:grpSpPr>
       <p:sp>
         <p:nvSpPr>
-          <p:cNvPr id="2" name="Vertical Title 1">
-            <a:extLst>
-              <a:ext uri="{FF2B5EF4-FFF2-40B4-BE49-F238E27FC236}">
-                <a16:creationId xmlns:a16="http://schemas.microsoft.com/office/drawing/2014/main" id="{ED7C07D4-C03D-D87C-98C8-BBBB406AB299}"/>
-              </a:ext>
-            </a:extLst>
-          </p:cNvPr>
+          <p:cNvPr id="2" name="Vertical Title 1"/>
           <p:cNvSpPr>
             <a:spLocks noGrp="1"/>
           </p:cNvSpPr>
@@ -1409,13 +1303,7 @@
       </p:sp>
       <p:sp>
         <p:nvSpPr>
-          <p:cNvPr id="3" name="Vertical Text Placeholder 2">
-            <a:extLst>
-              <a:ext uri="{FF2B5EF4-FFF2-40B4-BE49-F238E27FC236}">
-                <a16:creationId xmlns:a16="http://schemas.microsoft.com/office/drawing/2014/main" id="{9035743A-07E6-96C7-BBAF-0203D5AC7F47}"/>
-              </a:ext>
-            </a:extLst>
-          </p:cNvPr>
+          <p:cNvPr id="3" name="Vertical Text Placeholder 2"/>
           <p:cNvSpPr>
             <a:spLocks noGrp="1"/>
           </p:cNvSpPr>
@@ -1472,13 +1360,7 @@
       </p:sp>
       <p:sp>
         <p:nvSpPr>
-          <p:cNvPr id="4" name="Date Placeholder 3">
-            <a:extLst>
-              <a:ext uri="{FF2B5EF4-FFF2-40B4-BE49-F238E27FC236}">
-                <a16:creationId xmlns:a16="http://schemas.microsoft.com/office/drawing/2014/main" id="{8F18118A-8632-A741-AE6E-B6027C2692DC}"/>
-              </a:ext>
-            </a:extLst>
-          </p:cNvPr>
+          <p:cNvPr id="4" name="Date Placeholder 3"/>
           <p:cNvSpPr>
             <a:spLocks noGrp="1"/>
           </p:cNvSpPr>
@@ -1493,7 +1375,7 @@
           <a:p>
             <a:fld id="{9DBD89FD-1150-4979-9614-9DD9EB69C9AA}" type="datetimeFigureOut">
               <a:rPr lang="en-IN" smtClean="0"/>
-              <a:t>24-09-2026</a:t>
+              <a:t>29-10-2026</a:t>
             </a:fld>
             <a:endParaRPr lang="en-IN"/>
           </a:p>
@@ -1501,13 +1383,7 @@
       </p:sp>
       <p:sp>
         <p:nvSpPr>
-          <p:cNvPr id="5" name="Footer Placeholder 4">
-            <a:extLst>
-              <a:ext uri="{FF2B5EF4-FFF2-40B4-BE49-F238E27FC236}">
-                <a16:creationId xmlns:a16="http://schemas.microsoft.com/office/drawing/2014/main" id="{CF57F320-8747-00ED-F9CE-DA3BE58E4AD6}"/>
-              </a:ext>
-            </a:extLst>
-          </p:cNvPr>
+          <p:cNvPr id="5" name="Footer Placeholder 4"/>
           <p:cNvSpPr>
             <a:spLocks noGrp="1"/>
           </p:cNvSpPr>
@@ -1526,13 +1402,7 @@
       </p:sp>
       <p:sp>
         <p:nvSpPr>
-          <p:cNvPr id="6" name="Slide Number Placeholder 5">
-            <a:extLst>
-              <a:ext uri="{FF2B5EF4-FFF2-40B4-BE49-F238E27FC236}">
-                <a16:creationId xmlns:a16="http://schemas.microsoft.com/office/drawing/2014/main" id="{B720E883-C54B-2C9A-10AC-7A9F284EDD05}"/>
-              </a:ext>
-            </a:extLst>
-          </p:cNvPr>
+          <p:cNvPr id="6" name="Slide Number Placeholder 5"/>
           <p:cNvSpPr>
             <a:spLocks noGrp="1"/>
           </p:cNvSpPr>
@@ -1554,11 +1424,6 @@
         </p:txBody>
       </p:sp>
     </p:spTree>
-    <p:extLst>
-      <p:ext uri="{BB962C8B-B14F-4D97-AF65-F5344CB8AC3E}">
-        <p14:creationId xmlns:p14="http://schemas.microsoft.com/office/powerpoint/2010/main" val="2471709869"/>
-      </p:ext>
-    </p:extLst>
   </p:cSld>
   <p:clrMapOvr>
     <a:masterClrMapping/>
@@ -1585,13 +1450,7 @@
       </p:grpSpPr>
       <p:sp>
         <p:nvSpPr>
-          <p:cNvPr id="2" name="Title 1">
-            <a:extLst>
-              <a:ext uri="{FF2B5EF4-FFF2-40B4-BE49-F238E27FC236}">
-                <a16:creationId xmlns:a16="http://schemas.microsoft.com/office/drawing/2014/main" id="{AA7E01C8-D491-2175-9058-3F6DFCE2C7D7}"/>
-              </a:ext>
-            </a:extLst>
-          </p:cNvPr>
+          <p:cNvPr id="2" name="Title 1"/>
           <p:cNvSpPr>
             <a:spLocks noGrp="1"/>
           </p:cNvSpPr>
@@ -1623,13 +1482,7 @@
       </p:sp>
       <p:sp>
         <p:nvSpPr>
-          <p:cNvPr id="3" name="Subtitle 2">
-            <a:extLst>
-              <a:ext uri="{FF2B5EF4-FFF2-40B4-BE49-F238E27FC236}">
-                <a16:creationId xmlns:a16="http://schemas.microsoft.com/office/drawing/2014/main" id="{405AE508-A02A-99C7-5613-B94B7337C64B}"/>
-              </a:ext>
-            </a:extLst>
-          </p:cNvPr>
+          <p:cNvPr id="3" name="Subtitle 2"/>
           <p:cNvSpPr>
             <a:spLocks noGrp="1"/>
           </p:cNvSpPr>
@@ -1694,13 +1547,7 @@
       </p:sp>
       <p:sp>
         <p:nvSpPr>
-          <p:cNvPr id="4" name="Date Placeholder 3">
-            <a:extLst>
-              <a:ext uri="{FF2B5EF4-FFF2-40B4-BE49-F238E27FC236}">
-                <a16:creationId xmlns:a16="http://schemas.microsoft.com/office/drawing/2014/main" id="{2C93E0A0-323B-05CB-B626-F1AE478EB195}"/>
-              </a:ext>
-            </a:extLst>
-          </p:cNvPr>
+          <p:cNvPr id="4" name="Date Placeholder 3"/>
           <p:cNvSpPr>
             <a:spLocks noGrp="1"/>
           </p:cNvSpPr>
@@ -1715,7 +1562,7 @@
           <a:p>
             <a:fld id="{76E1380B-202A-4ADB-8029-48BBD470229E}" type="datetimeFigureOut">
               <a:rPr lang="en-IN" smtClean="0"/>
-              <a:t>24-09-2026</a:t>
+              <a:t>29-10-2026</a:t>
             </a:fld>
             <a:endParaRPr lang="en-IN"/>
           </a:p>
@@ -1723,13 +1570,7 @@
       </p:sp>
       <p:sp>
         <p:nvSpPr>
-          <p:cNvPr id="5" name="Footer Placeholder 4">
-            <a:extLst>
-              <a:ext uri="{FF2B5EF4-FFF2-40B4-BE49-F238E27FC236}">
-                <a16:creationId xmlns:a16="http://schemas.microsoft.com/office/drawing/2014/main" id="{54575BC5-CD0D-9CBC-38C6-7C29015F6935}"/>
-              </a:ext>
-            </a:extLst>
-          </p:cNvPr>
+          <p:cNvPr id="5" name="Footer Placeholder 4"/>
           <p:cNvSpPr>
             <a:spLocks noGrp="1"/>
           </p:cNvSpPr>
@@ -1748,13 +1589,7 @@
       </p:sp>
       <p:sp>
         <p:nvSpPr>
-          <p:cNvPr id="6" name="Slide Number Placeholder 5">
-            <a:extLst>
-              <a:ext uri="{FF2B5EF4-FFF2-40B4-BE49-F238E27FC236}">
-                <a16:creationId xmlns:a16="http://schemas.microsoft.com/office/drawing/2014/main" id="{46305E0C-F08F-962E-207F-417C2E7A9268}"/>
-              </a:ext>
-            </a:extLst>
-          </p:cNvPr>
+          <p:cNvPr id="6" name="Slide Number Placeholder 5"/>
           <p:cNvSpPr>
             <a:spLocks noGrp="1"/>
           </p:cNvSpPr>
@@ -1776,11 +1611,6 @@
         </p:txBody>
       </p:sp>
     </p:spTree>
-    <p:extLst>
-      <p:ext uri="{BB962C8B-B14F-4D97-AF65-F5344CB8AC3E}">
-        <p14:creationId xmlns:p14="http://schemas.microsoft.com/office/powerpoint/2010/main" val="1870307936"/>
-      </p:ext>
-    </p:extLst>
   </p:cSld>
   <p:clrMapOvr>
     <a:masterClrMapping/>
@@ -1807,13 +1637,7 @@
       </p:grpSpPr>
       <p:sp>
         <p:nvSpPr>
-          <p:cNvPr id="2" name="Title 1">
-            <a:extLst>
-              <a:ext uri="{FF2B5EF4-FFF2-40B4-BE49-F238E27FC236}">
-                <a16:creationId xmlns:a16="http://schemas.microsoft.com/office/drawing/2014/main" id="{317CE304-E6AE-3922-9A41-9270FF6ED0EF}"/>
-              </a:ext>
-            </a:extLst>
-          </p:cNvPr>
+          <p:cNvPr id="2" name="Title 1"/>
           <p:cNvSpPr>
             <a:spLocks noGrp="1"/>
           </p:cNvSpPr>
@@ -1836,13 +1660,7 @@
       </p:sp>
       <p:sp>
         <p:nvSpPr>
-          <p:cNvPr id="3" name="Content Placeholder 2">
-            <a:extLst>
-              <a:ext uri="{FF2B5EF4-FFF2-40B4-BE49-F238E27FC236}">
-                <a16:creationId xmlns:a16="http://schemas.microsoft.com/office/drawing/2014/main" id="{EEEA0478-EFA8-16F8-0007-3E698DBA0CBB}"/>
-              </a:ext>
-            </a:extLst>
-          </p:cNvPr>
+          <p:cNvPr id="3" name="Content Placeholder 2"/>
           <p:cNvSpPr>
             <a:spLocks noGrp="1"/>
           </p:cNvSpPr>
@@ -1894,13 +1712,7 @@
       </p:sp>
       <p:sp>
         <p:nvSpPr>
-          <p:cNvPr id="4" name="Date Placeholder 3">
-            <a:extLst>
-              <a:ext uri="{FF2B5EF4-FFF2-40B4-BE49-F238E27FC236}">
-                <a16:creationId xmlns:a16="http://schemas.microsoft.com/office/drawing/2014/main" id="{A50637BA-C0CF-BE0D-A4A2-B99399D3FA56}"/>
-              </a:ext>
-            </a:extLst>
-          </p:cNvPr>
+          <p:cNvPr id="4" name="Date Placeholder 3"/>
           <p:cNvSpPr>
             <a:spLocks noGrp="1"/>
           </p:cNvSpPr>
@@ -1915,7 +1727,7 @@
           <a:p>
             <a:fld id="{76E1380B-202A-4ADB-8029-48BBD470229E}" type="datetimeFigureOut">
               <a:rPr lang="en-IN" smtClean="0"/>
-              <a:t>24-09-2026</a:t>
+              <a:t>29-10-2026</a:t>
             </a:fld>
             <a:endParaRPr lang="en-IN"/>
           </a:p>
@@ -1923,13 +1735,7 @@
       </p:sp>
       <p:sp>
         <p:nvSpPr>
-          <p:cNvPr id="5" name="Footer Placeholder 4">
-            <a:extLst>
-              <a:ext uri="{FF2B5EF4-FFF2-40B4-BE49-F238E27FC236}">
-                <a16:creationId xmlns:a16="http://schemas.microsoft.com/office/drawing/2014/main" id="{D3EB3544-E7EF-B90B-7123-043AE6E5D452}"/>
-              </a:ext>
-            </a:extLst>
-          </p:cNvPr>
+          <p:cNvPr id="5" name="Footer Placeholder 4"/>
           <p:cNvSpPr>
             <a:spLocks noGrp="1"/>
           </p:cNvSpPr>
@@ -1948,13 +1754,7 @@
       </p:sp>
       <p:sp>
         <p:nvSpPr>
-          <p:cNvPr id="6" name="Slide Number Placeholder 5">
-            <a:extLst>
-              <a:ext uri="{FF2B5EF4-FFF2-40B4-BE49-F238E27FC236}">
-                <a16:creationId xmlns:a16="http://schemas.microsoft.com/office/drawing/2014/main" id="{C7ED28D1-3A61-7B6D-E385-986EF42C1783}"/>
-              </a:ext>
-            </a:extLst>
-          </p:cNvPr>
+          <p:cNvPr id="6" name="Slide Number Placeholder 5"/>
           <p:cNvSpPr>
             <a:spLocks noGrp="1"/>
           </p:cNvSpPr>
@@ -1976,11 +1776,6 @@
         </p:txBody>
       </p:sp>
     </p:spTree>
-    <p:extLst>
-      <p:ext uri="{BB962C8B-B14F-4D97-AF65-F5344CB8AC3E}">
-        <p14:creationId xmlns:p14="http://schemas.microsoft.com/office/powerpoint/2010/main" val="3798180063"/>
-      </p:ext>
-    </p:extLst>
   </p:cSld>
   <p:clrMapOvr>
     <a:masterClrMapping/>
@@ -2007,13 +1802,7 @@
       </p:grpSpPr>
       <p:sp>
         <p:nvSpPr>
-          <p:cNvPr id="2" name="Title 1">
-            <a:extLst>
-              <a:ext uri="{FF2B5EF4-FFF2-40B4-BE49-F238E27FC236}">
-                <a16:creationId xmlns:a16="http://schemas.microsoft.com/office/drawing/2014/main" id="{E90FFEA6-D58A-647D-9BB3-C8BB8A8B857D}"/>
-              </a:ext>
-            </a:extLst>
-          </p:cNvPr>
+          <p:cNvPr id="2" name="Title 1"/>
           <p:cNvSpPr>
             <a:spLocks noGrp="1"/>
           </p:cNvSpPr>
@@ -2045,13 +1834,7 @@
       </p:sp>
       <p:sp>
         <p:nvSpPr>
-          <p:cNvPr id="3" name="Text Placeholder 2">
-            <a:extLst>
-              <a:ext uri="{FF2B5EF4-FFF2-40B4-BE49-F238E27FC236}">
-                <a16:creationId xmlns:a16="http://schemas.microsoft.com/office/drawing/2014/main" id="{CD124FDA-69B0-3C1A-106E-04BB47D9E912}"/>
-              </a:ext>
-            </a:extLst>
-          </p:cNvPr>
+          <p:cNvPr id="3" name="Text Placeholder 2"/>
           <p:cNvSpPr>
             <a:spLocks noGrp="1"/>
           </p:cNvSpPr>
@@ -2170,13 +1953,7 @@
       </p:sp>
       <p:sp>
         <p:nvSpPr>
-          <p:cNvPr id="4" name="Date Placeholder 3">
-            <a:extLst>
-              <a:ext uri="{FF2B5EF4-FFF2-40B4-BE49-F238E27FC236}">
-                <a16:creationId xmlns:a16="http://schemas.microsoft.com/office/drawing/2014/main" id="{7092A197-8FEB-2E17-7C28-09BED68156F0}"/>
-              </a:ext>
-            </a:extLst>
-          </p:cNvPr>
+          <p:cNvPr id="4" name="Date Placeholder 3"/>
           <p:cNvSpPr>
             <a:spLocks noGrp="1"/>
           </p:cNvSpPr>
@@ -2191,7 +1968,7 @@
           <a:p>
             <a:fld id="{76E1380B-202A-4ADB-8029-48BBD470229E}" type="datetimeFigureOut">
               <a:rPr lang="en-IN" smtClean="0"/>
-              <a:t>24-09-2026</a:t>
+              <a:t>29-10-2026</a:t>
             </a:fld>
             <a:endParaRPr lang="en-IN"/>
           </a:p>
@@ -2199,13 +1976,7 @@
       </p:sp>
       <p:sp>
         <p:nvSpPr>
-          <p:cNvPr id="5" name="Footer Placeholder 4">
-            <a:extLst>
-              <a:ext uri="{FF2B5EF4-FFF2-40B4-BE49-F238E27FC236}">
-                <a16:creationId xmlns:a16="http://schemas.microsoft.com/office/drawing/2014/main" id="{7E699017-CE42-83B3-49F7-31021CADB3F9}"/>
-              </a:ext>
-            </a:extLst>
-          </p:cNvPr>
+          <p:cNvPr id="5" name="Footer Placeholder 4"/>
           <p:cNvSpPr>
             <a:spLocks noGrp="1"/>
           </p:cNvSpPr>
@@ -2224,13 +1995,7 @@
       </p:sp>
       <p:sp>
         <p:nvSpPr>
-          <p:cNvPr id="6" name="Slide Number Placeholder 5">
-            <a:extLst>
-              <a:ext uri="{FF2B5EF4-FFF2-40B4-BE49-F238E27FC236}">
-                <a16:creationId xmlns:a16="http://schemas.microsoft.com/office/drawing/2014/main" id="{409F764B-A203-707F-3333-F7E3B7CB37A8}"/>
-              </a:ext>
-            </a:extLst>
-          </p:cNvPr>
+          <p:cNvPr id="6" name="Slide Number Placeholder 5"/>
           <p:cNvSpPr>
             <a:spLocks noGrp="1"/>
           </p:cNvSpPr>
@@ -2252,11 +2017,6 @@
         </p:txBody>
       </p:sp>
     </p:spTree>
-    <p:extLst>
-      <p:ext uri="{BB962C8B-B14F-4D97-AF65-F5344CB8AC3E}">
-        <p14:creationId xmlns:p14="http://schemas.microsoft.com/office/powerpoint/2010/main" val="3481532428"/>
-      </p:ext>
-    </p:extLst>
   </p:cSld>
   <p:clrMapOvr>
     <a:masterClrMapping/>
@@ -2283,13 +2043,7 @@
       </p:grpSpPr>
       <p:sp>
         <p:nvSpPr>
-          <p:cNvPr id="2" name="Title 1">
-            <a:extLst>
-              <a:ext uri="{FF2B5EF4-FFF2-40B4-BE49-F238E27FC236}">
-                <a16:creationId xmlns:a16="http://schemas.microsoft.com/office/drawing/2014/main" id="{E5485CE9-6EC1-A37D-E234-28A3EB3D611D}"/>
-              </a:ext>
-            </a:extLst>
-          </p:cNvPr>
+          <p:cNvPr id="2" name="Title 1"/>
           <p:cNvSpPr>
             <a:spLocks noGrp="1"/>
           </p:cNvSpPr>
@@ -2312,13 +2066,7 @@
       </p:sp>
       <p:sp>
         <p:nvSpPr>
-          <p:cNvPr id="3" name="Content Placeholder 2">
-            <a:extLst>
-              <a:ext uri="{FF2B5EF4-FFF2-40B4-BE49-F238E27FC236}">
-                <a16:creationId xmlns:a16="http://schemas.microsoft.com/office/drawing/2014/main" id="{91C8B26E-9613-52FD-AB9E-A53E7BCD983E}"/>
-              </a:ext>
-            </a:extLst>
-          </p:cNvPr>
+          <p:cNvPr id="3" name="Content Placeholder 2"/>
           <p:cNvSpPr>
             <a:spLocks noGrp="1"/>
           </p:cNvSpPr>
@@ -2375,13 +2123,7 @@
       </p:sp>
       <p:sp>
         <p:nvSpPr>
-          <p:cNvPr id="4" name="Content Placeholder 3">
-            <a:extLst>
-              <a:ext uri="{FF2B5EF4-FFF2-40B4-BE49-F238E27FC236}">
-                <a16:creationId xmlns:a16="http://schemas.microsoft.com/office/drawing/2014/main" id="{EB56B7B7-57F5-CBA8-9416-A94FA6ACF70E}"/>
-              </a:ext>
-            </a:extLst>
-          </p:cNvPr>
+          <p:cNvPr id="4" name="Content Placeholder 3"/>
           <p:cNvSpPr>
             <a:spLocks noGrp="1"/>
           </p:cNvSpPr>
@@ -2438,13 +2180,7 @@
       </p:sp>
       <p:sp>
         <p:nvSpPr>
-          <p:cNvPr id="5" name="Date Placeholder 4">
-            <a:extLst>
-              <a:ext uri="{FF2B5EF4-FFF2-40B4-BE49-F238E27FC236}">
-                <a16:creationId xmlns:a16="http://schemas.microsoft.com/office/drawing/2014/main" id="{5A04694E-1E5E-9700-B6CD-4244ABC21E0B}"/>
-              </a:ext>
-            </a:extLst>
-          </p:cNvPr>
+          <p:cNvPr id="5" name="Date Placeholder 4"/>
           <p:cNvSpPr>
             <a:spLocks noGrp="1"/>
           </p:cNvSpPr>
@@ -2459,7 +2195,7 @@
           <a:p>
             <a:fld id="{76E1380B-202A-4ADB-8029-48BBD470229E}" type="datetimeFigureOut">
               <a:rPr lang="en-IN" smtClean="0"/>
-              <a:t>24-09-2026</a:t>
+              <a:t>29-10-2026</a:t>
             </a:fld>
             <a:endParaRPr lang="en-IN"/>
           </a:p>
@@ -2467,13 +2203,7 @@
       </p:sp>
       <p:sp>
         <p:nvSpPr>
-          <p:cNvPr id="6" name="Footer Placeholder 5">
-            <a:extLst>
-              <a:ext uri="{FF2B5EF4-FFF2-40B4-BE49-F238E27FC236}">
-                <a16:creationId xmlns:a16="http://schemas.microsoft.com/office/drawing/2014/main" id="{91EA6A25-812C-197C-A392-01C84630252D}"/>
-              </a:ext>
-            </a:extLst>
-          </p:cNvPr>
+          <p:cNvPr id="6" name="Footer Placeholder 5"/>
           <p:cNvSpPr>
             <a:spLocks noGrp="1"/>
           </p:cNvSpPr>
@@ -2492,13 +2222,7 @@
       </p:sp>
       <p:sp>
         <p:nvSpPr>
-          <p:cNvPr id="7" name="Slide Number Placeholder 6">
-            <a:extLst>
-              <a:ext uri="{FF2B5EF4-FFF2-40B4-BE49-F238E27FC236}">
-                <a16:creationId xmlns:a16="http://schemas.microsoft.com/office/drawing/2014/main" id="{E09B391F-D01F-5022-7E76-89516160C68D}"/>
-              </a:ext>
-            </a:extLst>
-          </p:cNvPr>
+          <p:cNvPr id="7" name="Slide Number Placeholder 6"/>
           <p:cNvSpPr>
             <a:spLocks noGrp="1"/>
           </p:cNvSpPr>
@@ -2520,11 +2244,6 @@
         </p:txBody>
       </p:sp>
     </p:spTree>
-    <p:extLst>
-      <p:ext uri="{BB962C8B-B14F-4D97-AF65-F5344CB8AC3E}">
-        <p14:creationId xmlns:p14="http://schemas.microsoft.com/office/powerpoint/2010/main" val="2151525563"/>
-      </p:ext>
-    </p:extLst>
   </p:cSld>
   <p:clrMapOvr>
     <a:masterClrMapping/>
@@ -2551,13 +2270,7 @@
       </p:grpSpPr>
       <p:sp>
         <p:nvSpPr>
-          <p:cNvPr id="2" name="Title 1">
-            <a:extLst>
-              <a:ext uri="{FF2B5EF4-FFF2-40B4-BE49-F238E27FC236}">
-                <a16:creationId xmlns:a16="http://schemas.microsoft.com/office/drawing/2014/main" id="{073FC3AF-8AC8-B9B2-6D2E-47F15E5D17CB}"/>
-              </a:ext>
-            </a:extLst>
-          </p:cNvPr>
+          <p:cNvPr id="2" name="Title 1"/>
           <p:cNvSpPr>
             <a:spLocks noGrp="1"/>
           </p:cNvSpPr>
@@ -2585,13 +2298,7 @@
       </p:sp>
       <p:sp>
         <p:nvSpPr>
-          <p:cNvPr id="3" name="Text Placeholder 2">
-            <a:extLst>
-              <a:ext uri="{FF2B5EF4-FFF2-40B4-BE49-F238E27FC236}">
-                <a16:creationId xmlns:a16="http://schemas.microsoft.com/office/drawing/2014/main" id="{45FFDD15-4508-717D-574A-86A0746B3B07}"/>
-              </a:ext>
-            </a:extLst>
-          </p:cNvPr>
+          <p:cNvPr id="3" name="Text Placeholder 2"/>
           <p:cNvSpPr>
             <a:spLocks noGrp="1"/>
           </p:cNvSpPr>
@@ -2656,13 +2363,7 @@
       </p:sp>
       <p:sp>
         <p:nvSpPr>
-          <p:cNvPr id="4" name="Content Placeholder 3">
-            <a:extLst>
-              <a:ext uri="{FF2B5EF4-FFF2-40B4-BE49-F238E27FC236}">
-                <a16:creationId xmlns:a16="http://schemas.microsoft.com/office/drawing/2014/main" id="{743FD005-0876-6386-8200-7DB9C5E9D073}"/>
-              </a:ext>
-            </a:extLst>
-          </p:cNvPr>
+          <p:cNvPr id="4" name="Content Placeholder 3"/>
           <p:cNvSpPr>
             <a:spLocks noGrp="1"/>
           </p:cNvSpPr>
@@ -2719,13 +2420,7 @@
       </p:sp>
       <p:sp>
         <p:nvSpPr>
-          <p:cNvPr id="5" name="Text Placeholder 4">
-            <a:extLst>
-              <a:ext uri="{FF2B5EF4-FFF2-40B4-BE49-F238E27FC236}">
-                <a16:creationId xmlns:a16="http://schemas.microsoft.com/office/drawing/2014/main" id="{BB59816A-F9EE-79E0-8640-2AA32BF0A78E}"/>
-              </a:ext>
-            </a:extLst>
-          </p:cNvPr>
+          <p:cNvPr id="5" name="Text Placeholder 4"/>
           <p:cNvSpPr>
             <a:spLocks noGrp="1"/>
           </p:cNvSpPr>
@@ -2790,13 +2485,7 @@
       </p:sp>
       <p:sp>
         <p:nvSpPr>
-          <p:cNvPr id="6" name="Content Placeholder 5">
-            <a:extLst>
-              <a:ext uri="{FF2B5EF4-FFF2-40B4-BE49-F238E27FC236}">
-                <a16:creationId xmlns:a16="http://schemas.microsoft.com/office/drawing/2014/main" id="{3F88F227-C99A-0BE8-E2D5-38EF096A9C6F}"/>
-              </a:ext>
-            </a:extLst>
-          </p:cNvPr>
+          <p:cNvPr id="6" name="Content Placeholder 5"/>
           <p:cNvSpPr>
             <a:spLocks noGrp="1"/>
           </p:cNvSpPr>
@@ -2853,13 +2542,7 @@
       </p:sp>
       <p:sp>
         <p:nvSpPr>
-          <p:cNvPr id="7" name="Date Placeholder 6">
-            <a:extLst>
-              <a:ext uri="{FF2B5EF4-FFF2-40B4-BE49-F238E27FC236}">
-                <a16:creationId xmlns:a16="http://schemas.microsoft.com/office/drawing/2014/main" id="{53C3B828-68FD-1497-2365-86E02D435469}"/>
-              </a:ext>
-            </a:extLst>
-          </p:cNvPr>
+          <p:cNvPr id="7" name="Date Placeholder 6"/>
           <p:cNvSpPr>
             <a:spLocks noGrp="1"/>
           </p:cNvSpPr>
@@ -2874,7 +2557,7 @@
           <a:p>
             <a:fld id="{76E1380B-202A-4ADB-8029-48BBD470229E}" type="datetimeFigureOut">
               <a:rPr lang="en-IN" smtClean="0"/>
-              <a:t>24-09-2026</a:t>
+              <a:t>29-10-2026</a:t>
             </a:fld>
             <a:endParaRPr lang="en-IN"/>
           </a:p>
@@ -2882,13 +2565,7 @@
       </p:sp>
       <p:sp>
         <p:nvSpPr>
-          <p:cNvPr id="8" name="Footer Placeholder 7">
-            <a:extLst>
-              <a:ext uri="{FF2B5EF4-FFF2-40B4-BE49-F238E27FC236}">
-                <a16:creationId xmlns:a16="http://schemas.microsoft.com/office/drawing/2014/main" id="{9343CACA-4881-5DE9-2E90-A2E897B58A10}"/>
-              </a:ext>
-            </a:extLst>
-          </p:cNvPr>
+          <p:cNvPr id="8" name="Footer Placeholder 7"/>
           <p:cNvSpPr>
             <a:spLocks noGrp="1"/>
           </p:cNvSpPr>
@@ -2907,13 +2584,7 @@
       </p:sp>
       <p:sp>
         <p:nvSpPr>
-          <p:cNvPr id="9" name="Slide Number Placeholder 8">
-            <a:extLst>
-              <a:ext uri="{FF2B5EF4-FFF2-40B4-BE49-F238E27FC236}">
-                <a16:creationId xmlns:a16="http://schemas.microsoft.com/office/drawing/2014/main" id="{8265C47D-CF0F-61F2-F67C-3FA6B37DFE0F}"/>
-              </a:ext>
-            </a:extLst>
-          </p:cNvPr>
+          <p:cNvPr id="9" name="Slide Number Placeholder 8"/>
           <p:cNvSpPr>
             <a:spLocks noGrp="1"/>
           </p:cNvSpPr>
@@ -2935,11 +2606,6 @@
         </p:txBody>
       </p:sp>
     </p:spTree>
-    <p:extLst>
-      <p:ext uri="{BB962C8B-B14F-4D97-AF65-F5344CB8AC3E}">
-        <p14:creationId xmlns:p14="http://schemas.microsoft.com/office/powerpoint/2010/main" val="1126603348"/>
-      </p:ext>
-    </p:extLst>
   </p:cSld>
   <p:clrMapOvr>
     <a:masterClrMapping/>
@@ -2966,13 +2632,7 @@
       </p:grpSpPr>
       <p:sp>
         <p:nvSpPr>
-          <p:cNvPr id="2" name="Title 1">
-            <a:extLst>
-              <a:ext uri="{FF2B5EF4-FFF2-40B4-BE49-F238E27FC236}">
-                <a16:creationId xmlns:a16="http://schemas.microsoft.com/office/drawing/2014/main" id="{74A7D56E-0FD5-DF7C-68EA-DC17E48FB854}"/>
-              </a:ext>
-            </a:extLst>
-          </p:cNvPr>
+          <p:cNvPr id="2" name="Title 1"/>
           <p:cNvSpPr>
             <a:spLocks noGrp="1"/>
           </p:cNvSpPr>
@@ -2995,13 +2655,7 @@
       </p:sp>
       <p:sp>
         <p:nvSpPr>
-          <p:cNvPr id="3" name="Date Placeholder 2">
-            <a:extLst>
-              <a:ext uri="{FF2B5EF4-FFF2-40B4-BE49-F238E27FC236}">
-                <a16:creationId xmlns:a16="http://schemas.microsoft.com/office/drawing/2014/main" id="{60ECEF17-38CD-3751-C4AB-BFDB19B38146}"/>
-              </a:ext>
-            </a:extLst>
-          </p:cNvPr>
+          <p:cNvPr id="3" name="Date Placeholder 2"/>
           <p:cNvSpPr>
             <a:spLocks noGrp="1"/>
           </p:cNvSpPr>
@@ -3016,7 +2670,7 @@
           <a:p>
             <a:fld id="{76E1380B-202A-4ADB-8029-48BBD470229E}" type="datetimeFigureOut">
               <a:rPr lang="en-IN" smtClean="0"/>
-              <a:t>24-09-2026</a:t>
+              <a:t>29-10-2026</a:t>
             </a:fld>
             <a:endParaRPr lang="en-IN"/>
           </a:p>
@@ -3024,13 +2678,7 @@
       </p:sp>
       <p:sp>
         <p:nvSpPr>
-          <p:cNvPr id="4" name="Footer Placeholder 3">
-            <a:extLst>
-              <a:ext uri="{FF2B5EF4-FFF2-40B4-BE49-F238E27FC236}">
-                <a16:creationId xmlns:a16="http://schemas.microsoft.com/office/drawing/2014/main" id="{BFE1B887-6CEF-B818-C9CD-7158F0CB4C02}"/>
-              </a:ext>
-            </a:extLst>
-          </p:cNvPr>
+          <p:cNvPr id="4" name="Footer Placeholder 3"/>
           <p:cNvSpPr>
             <a:spLocks noGrp="1"/>
           </p:cNvSpPr>
@@ -3049,13 +2697,7 @@
       </p:sp>
       <p:sp>
         <p:nvSpPr>
-          <p:cNvPr id="5" name="Slide Number Placeholder 4">
-            <a:extLst>
-              <a:ext uri="{FF2B5EF4-FFF2-40B4-BE49-F238E27FC236}">
-                <a16:creationId xmlns:a16="http://schemas.microsoft.com/office/drawing/2014/main" id="{67162570-4204-8E32-5E71-D489A80AC459}"/>
-              </a:ext>
-            </a:extLst>
-          </p:cNvPr>
+          <p:cNvPr id="5" name="Slide Number Placeholder 4"/>
           <p:cNvSpPr>
             <a:spLocks noGrp="1"/>
           </p:cNvSpPr>
@@ -3077,11 +2719,6 @@
         </p:txBody>
       </p:sp>
     </p:spTree>
-    <p:extLst>
-      <p:ext uri="{BB962C8B-B14F-4D97-AF65-F5344CB8AC3E}">
-        <p14:creationId xmlns:p14="http://schemas.microsoft.com/office/powerpoint/2010/main" val="2986773237"/>
-      </p:ext>
-    </p:extLst>
   </p:cSld>
   <p:clrMapOvr>
     <a:masterClrMapping/>
@@ -3108,13 +2745,7 @@
       </p:grpSpPr>
       <p:sp>
         <p:nvSpPr>
-          <p:cNvPr id="2" name="Date Placeholder 1">
-            <a:extLst>
-              <a:ext uri="{FF2B5EF4-FFF2-40B4-BE49-F238E27FC236}">
-                <a16:creationId xmlns:a16="http://schemas.microsoft.com/office/drawing/2014/main" id="{B624B40E-1EAA-8AEF-A416-C770A8908ACD}"/>
-              </a:ext>
-            </a:extLst>
-          </p:cNvPr>
+          <p:cNvPr id="2" name="Date Placeholder 1"/>
           <p:cNvSpPr>
             <a:spLocks noGrp="1"/>
           </p:cNvSpPr>
@@ -3129,7 +2760,7 @@
           <a:p>
             <a:fld id="{76E1380B-202A-4ADB-8029-48BBD470229E}" type="datetimeFigureOut">
               <a:rPr lang="en-IN" smtClean="0"/>
-              <a:t>24-09-2026</a:t>
+              <a:t>29-10-2026</a:t>
             </a:fld>
             <a:endParaRPr lang="en-IN"/>
           </a:p>
@@ -3137,13 +2768,7 @@
       </p:sp>
       <p:sp>
         <p:nvSpPr>
-          <p:cNvPr id="3" name="Footer Placeholder 2">
-            <a:extLst>
-              <a:ext uri="{FF2B5EF4-FFF2-40B4-BE49-F238E27FC236}">
-                <a16:creationId xmlns:a16="http://schemas.microsoft.com/office/drawing/2014/main" id="{D02FFDCD-940D-8E1E-9D26-08F41DA47EDD}"/>
-              </a:ext>
-            </a:extLst>
-          </p:cNvPr>
+          <p:cNvPr id="3" name="Footer Placeholder 2"/>
           <p:cNvSpPr>
             <a:spLocks noGrp="1"/>
           </p:cNvSpPr>
@@ -3162,13 +2787,7 @@
       </p:sp>
       <p:sp>
         <p:nvSpPr>
-          <p:cNvPr id="4" name="Slide Number Placeholder 3">
-            <a:extLst>
-              <a:ext uri="{FF2B5EF4-FFF2-40B4-BE49-F238E27FC236}">
-                <a16:creationId xmlns:a16="http://schemas.microsoft.com/office/drawing/2014/main" id="{64D96120-56E0-1BBB-23FC-05FE959F6D98}"/>
-              </a:ext>
-            </a:extLst>
-          </p:cNvPr>
+          <p:cNvPr id="4" name="Slide Number Placeholder 3"/>
           <p:cNvSpPr>
             <a:spLocks noGrp="1"/>
           </p:cNvSpPr>
@@ -3190,11 +2809,6 @@
         </p:txBody>
       </p:sp>
     </p:spTree>
-    <p:extLst>
-      <p:ext uri="{BB962C8B-B14F-4D97-AF65-F5344CB8AC3E}">
-        <p14:creationId xmlns:p14="http://schemas.microsoft.com/office/powerpoint/2010/main" val="3580253243"/>
-      </p:ext>
-    </p:extLst>
   </p:cSld>
   <p:clrMapOvr>
     <a:masterClrMapping/>
@@ -3221,13 +2835,7 @@
       </p:grpSpPr>
       <p:sp>
         <p:nvSpPr>
-          <p:cNvPr id="2" name="Title 1">
-            <a:extLst>
-              <a:ext uri="{FF2B5EF4-FFF2-40B4-BE49-F238E27FC236}">
-                <a16:creationId xmlns:a16="http://schemas.microsoft.com/office/drawing/2014/main" id="{876A1CC4-88F2-23FF-E085-E181C9A1815E}"/>
-              </a:ext>
-            </a:extLst>
-          </p:cNvPr>
+          <p:cNvPr id="2" name="Title 1"/>
           <p:cNvSpPr>
             <a:spLocks noGrp="1"/>
           </p:cNvSpPr>
@@ -3259,13 +2867,7 @@
       </p:sp>
       <p:sp>
         <p:nvSpPr>
-          <p:cNvPr id="3" name="Content Placeholder 2">
-            <a:extLst>
-              <a:ext uri="{FF2B5EF4-FFF2-40B4-BE49-F238E27FC236}">
-                <a16:creationId xmlns:a16="http://schemas.microsoft.com/office/drawing/2014/main" id="{F68AF40E-38A7-7E2D-2733-B41FFF715348}"/>
-              </a:ext>
-            </a:extLst>
-          </p:cNvPr>
+          <p:cNvPr id="3" name="Content Placeholder 2"/>
           <p:cNvSpPr>
             <a:spLocks noGrp="1"/>
           </p:cNvSpPr>
@@ -3350,13 +2952,7 @@
       </p:sp>
       <p:sp>
         <p:nvSpPr>
-          <p:cNvPr id="4" name="Text Placeholder 3">
-            <a:extLst>
-              <a:ext uri="{FF2B5EF4-FFF2-40B4-BE49-F238E27FC236}">
-                <a16:creationId xmlns:a16="http://schemas.microsoft.com/office/drawing/2014/main" id="{B6A9763F-CA21-1637-4481-44386C9C75F2}"/>
-              </a:ext>
-            </a:extLst>
-          </p:cNvPr>
+          <p:cNvPr id="4" name="Text Placeholder 3"/>
           <p:cNvSpPr>
             <a:spLocks noGrp="1"/>
           </p:cNvSpPr>
@@ -3421,13 +3017,7 @@
       </p:sp>
       <p:sp>
         <p:nvSpPr>
-          <p:cNvPr id="5" name="Date Placeholder 4">
-            <a:extLst>
-              <a:ext uri="{FF2B5EF4-FFF2-40B4-BE49-F238E27FC236}">
-                <a16:creationId xmlns:a16="http://schemas.microsoft.com/office/drawing/2014/main" id="{54F77FE0-8C6A-51DF-1EB7-01E8E90E4AA4}"/>
-              </a:ext>
-            </a:extLst>
-          </p:cNvPr>
+          <p:cNvPr id="5" name="Date Placeholder 4"/>
           <p:cNvSpPr>
             <a:spLocks noGrp="1"/>
           </p:cNvSpPr>
@@ -3442,7 +3032,7 @@
           <a:p>
             <a:fld id="{76E1380B-202A-4ADB-8029-48BBD470229E}" type="datetimeFigureOut">
               <a:rPr lang="en-IN" smtClean="0"/>
-              <a:t>24-09-2026</a:t>
+              <a:t>29-10-2026</a:t>
             </a:fld>
             <a:endParaRPr lang="en-IN"/>
           </a:p>
@@ -3450,13 +3040,7 @@
       </p:sp>
       <p:sp>
         <p:nvSpPr>
-          <p:cNvPr id="6" name="Footer Placeholder 5">
-            <a:extLst>
-              <a:ext uri="{FF2B5EF4-FFF2-40B4-BE49-F238E27FC236}">
-                <a16:creationId xmlns:a16="http://schemas.microsoft.com/office/drawing/2014/main" id="{34A3CFB1-188A-8165-AB6D-45C8E757C383}"/>
-              </a:ext>
-            </a:extLst>
-          </p:cNvPr>
+          <p:cNvPr id="6" name="Footer Placeholder 5"/>
           <p:cNvSpPr>
             <a:spLocks noGrp="1"/>
           </p:cNvSpPr>
@@ -3475,13 +3059,7 @@
       </p:sp>
       <p:sp>
         <p:nvSpPr>
-          <p:cNvPr id="7" name="Slide Number Placeholder 6">
-            <a:extLst>
-              <a:ext uri="{FF2B5EF4-FFF2-40B4-BE49-F238E27FC236}">
-                <a16:creationId xmlns:a16="http://schemas.microsoft.com/office/drawing/2014/main" id="{A0FDCC21-6BBD-3BC0-E487-0F68528AD8CA}"/>
-              </a:ext>
-            </a:extLst>
-          </p:cNvPr>
+          <p:cNvPr id="7" name="Slide Number Placeholder 6"/>
           <p:cNvSpPr>
             <a:spLocks noGrp="1"/>
           </p:cNvSpPr>
@@ -3503,11 +3081,6 @@
         </p:txBody>
       </p:sp>
     </p:spTree>
-    <p:extLst>
-      <p:ext uri="{BB962C8B-B14F-4D97-AF65-F5344CB8AC3E}">
-        <p14:creationId xmlns:p14="http://schemas.microsoft.com/office/powerpoint/2010/main" val="2316025275"/>
-      </p:ext>
-    </p:extLst>
   </p:cSld>
   <p:clrMapOvr>
     <a:masterClrMapping/>
@@ -3534,13 +3107,7 @@
       </p:grpSpPr>
       <p:sp>
         <p:nvSpPr>
-          <p:cNvPr id="2" name="Title 1">
-            <a:extLst>
-              <a:ext uri="{FF2B5EF4-FFF2-40B4-BE49-F238E27FC236}">
-                <a16:creationId xmlns:a16="http://schemas.microsoft.com/office/drawing/2014/main" id="{BD1F001F-787C-85EC-646A-75EEC5EB37C0}"/>
-              </a:ext>
-            </a:extLst>
-          </p:cNvPr>
+          <p:cNvPr id="2" name="Title 1"/>
           <p:cNvSpPr>
             <a:spLocks noGrp="1"/>
           </p:cNvSpPr>
@@ -3563,13 +3130,7 @@
       </p:sp>
       <p:sp>
         <p:nvSpPr>
-          <p:cNvPr id="3" name="Content Placeholder 2">
-            <a:extLst>
-              <a:ext uri="{FF2B5EF4-FFF2-40B4-BE49-F238E27FC236}">
-                <a16:creationId xmlns:a16="http://schemas.microsoft.com/office/drawing/2014/main" id="{E3BF2371-B883-4891-AB2F-F7A6DECF3791}"/>
-              </a:ext>
-            </a:extLst>
-          </p:cNvPr>
+          <p:cNvPr id="3" name="Content Placeholder 2"/>
           <p:cNvSpPr>
             <a:spLocks noGrp="1"/>
           </p:cNvSpPr>
@@ -3621,13 +3182,7 @@
       </p:sp>
       <p:sp>
         <p:nvSpPr>
-          <p:cNvPr id="4" name="Date Placeholder 3">
-            <a:extLst>
-              <a:ext uri="{FF2B5EF4-FFF2-40B4-BE49-F238E27FC236}">
-                <a16:creationId xmlns:a16="http://schemas.microsoft.com/office/drawing/2014/main" id="{6F8AFCBC-7CDF-1083-43D2-7537F13F341F}"/>
-              </a:ext>
-            </a:extLst>
-          </p:cNvPr>
+          <p:cNvPr id="4" name="Date Placeholder 3"/>
           <p:cNvSpPr>
             <a:spLocks noGrp="1"/>
           </p:cNvSpPr>
@@ -3642,7 +3197,7 @@
           <a:p>
             <a:fld id="{9DBD89FD-1150-4979-9614-9DD9EB69C9AA}" type="datetimeFigureOut">
               <a:rPr lang="en-IN" smtClean="0"/>
-              <a:t>24-09-2026</a:t>
+              <a:t>29-10-2026</a:t>
             </a:fld>
             <a:endParaRPr lang="en-IN"/>
           </a:p>
@@ -3650,13 +3205,7 @@
       </p:sp>
       <p:sp>
         <p:nvSpPr>
-          <p:cNvPr id="5" name="Footer Placeholder 4">
-            <a:extLst>
-              <a:ext uri="{FF2B5EF4-FFF2-40B4-BE49-F238E27FC236}">
-                <a16:creationId xmlns:a16="http://schemas.microsoft.com/office/drawing/2014/main" id="{8E43B008-8F2A-6C21-B917-4A4987FEA557}"/>
-              </a:ext>
-            </a:extLst>
-          </p:cNvPr>
+          <p:cNvPr id="5" name="Footer Placeholder 4"/>
           <p:cNvSpPr>
             <a:spLocks noGrp="1"/>
           </p:cNvSpPr>
@@ -3675,13 +3224,7 @@
       </p:sp>
       <p:sp>
         <p:nvSpPr>
-          <p:cNvPr id="6" name="Slide Number Placeholder 5">
-            <a:extLst>
-              <a:ext uri="{FF2B5EF4-FFF2-40B4-BE49-F238E27FC236}">
-                <a16:creationId xmlns:a16="http://schemas.microsoft.com/office/drawing/2014/main" id="{5F901356-BC6B-79BE-2C81-FAB97E0994EB}"/>
-              </a:ext>
-            </a:extLst>
-          </p:cNvPr>
+          <p:cNvPr id="6" name="Slide Number Placeholder 5"/>
           <p:cNvSpPr>
             <a:spLocks noGrp="1"/>
           </p:cNvSpPr>
@@ -3703,11 +3246,6 @@
         </p:txBody>
       </p:sp>
     </p:spTree>
-    <p:extLst>
-      <p:ext uri="{BB962C8B-B14F-4D97-AF65-F5344CB8AC3E}">
-        <p14:creationId xmlns:p14="http://schemas.microsoft.com/office/powerpoint/2010/main" val="3983338987"/>
-      </p:ext>
-    </p:extLst>
   </p:cSld>
   <p:clrMapOvr>
     <a:masterClrMapping/>
@@ -3734,13 +3272,7 @@
       </p:grpSpPr>
       <p:sp>
         <p:nvSpPr>
-          <p:cNvPr id="2" name="Title 1">
-            <a:extLst>
-              <a:ext uri="{FF2B5EF4-FFF2-40B4-BE49-F238E27FC236}">
-                <a16:creationId xmlns:a16="http://schemas.microsoft.com/office/drawing/2014/main" id="{FB25EBEA-D782-5BC7-7866-4733364F6B3D}"/>
-              </a:ext>
-            </a:extLst>
-          </p:cNvPr>
+          <p:cNvPr id="2" name="Title 1"/>
           <p:cNvSpPr>
             <a:spLocks noGrp="1"/>
           </p:cNvSpPr>
@@ -3772,13 +3304,7 @@
       </p:sp>
       <p:sp>
         <p:nvSpPr>
-          <p:cNvPr id="3" name="Picture Placeholder 2">
-            <a:extLst>
-              <a:ext uri="{FF2B5EF4-FFF2-40B4-BE49-F238E27FC236}">
-                <a16:creationId xmlns:a16="http://schemas.microsoft.com/office/drawing/2014/main" id="{1159654B-1A8B-CFF6-7B0C-005A1009B0CB}"/>
-              </a:ext>
-            </a:extLst>
-          </p:cNvPr>
+          <p:cNvPr id="3" name="Picture Placeholder 2"/>
           <p:cNvSpPr>
             <a:spLocks noGrp="1"/>
           </p:cNvSpPr>
@@ -3839,13 +3365,7 @@
       </p:sp>
       <p:sp>
         <p:nvSpPr>
-          <p:cNvPr id="4" name="Text Placeholder 3">
-            <a:extLst>
-              <a:ext uri="{FF2B5EF4-FFF2-40B4-BE49-F238E27FC236}">
-                <a16:creationId xmlns:a16="http://schemas.microsoft.com/office/drawing/2014/main" id="{576E49E8-EAD9-5366-72B0-C79C02262688}"/>
-              </a:ext>
-            </a:extLst>
-          </p:cNvPr>
+          <p:cNvPr id="4" name="Text Placeholder 3"/>
           <p:cNvSpPr>
             <a:spLocks noGrp="1"/>
           </p:cNvSpPr>
@@ -3910,13 +3430,7 @@
       </p:sp>
       <p:sp>
         <p:nvSpPr>
-          <p:cNvPr id="5" name="Date Placeholder 4">
-            <a:extLst>
-              <a:ext uri="{FF2B5EF4-FFF2-40B4-BE49-F238E27FC236}">
-                <a16:creationId xmlns:a16="http://schemas.microsoft.com/office/drawing/2014/main" id="{47073613-FE95-9ECA-EB7B-2A9D74612556}"/>
-              </a:ext>
-            </a:extLst>
-          </p:cNvPr>
+          <p:cNvPr id="5" name="Date Placeholder 4"/>
           <p:cNvSpPr>
             <a:spLocks noGrp="1"/>
           </p:cNvSpPr>
@@ -3931,7 +3445,7 @@
           <a:p>
             <a:fld id="{76E1380B-202A-4ADB-8029-48BBD470229E}" type="datetimeFigureOut">
               <a:rPr lang="en-IN" smtClean="0"/>
-              <a:t>24-09-2026</a:t>
+              <a:t>29-10-2026</a:t>
             </a:fld>
             <a:endParaRPr lang="en-IN"/>
           </a:p>
@@ -3939,13 +3453,7 @@
       </p:sp>
       <p:sp>
         <p:nvSpPr>
-          <p:cNvPr id="6" name="Footer Placeholder 5">
-            <a:extLst>
-              <a:ext uri="{FF2B5EF4-FFF2-40B4-BE49-F238E27FC236}">
-                <a16:creationId xmlns:a16="http://schemas.microsoft.com/office/drawing/2014/main" id="{F1936428-F07B-7E31-8930-3DD7736AA8DD}"/>
-              </a:ext>
-            </a:extLst>
-          </p:cNvPr>
+          <p:cNvPr id="6" name="Footer Placeholder 5"/>
           <p:cNvSpPr>
             <a:spLocks noGrp="1"/>
           </p:cNvSpPr>
@@ -3964,13 +3472,7 @@
       </p:sp>
       <p:sp>
         <p:nvSpPr>
-          <p:cNvPr id="7" name="Slide Number Placeholder 6">
-            <a:extLst>
-              <a:ext uri="{FF2B5EF4-FFF2-40B4-BE49-F238E27FC236}">
-                <a16:creationId xmlns:a16="http://schemas.microsoft.com/office/drawing/2014/main" id="{8714FA89-AAD0-FD26-26D2-8AE3B750DF7E}"/>
-              </a:ext>
-            </a:extLst>
-          </p:cNvPr>
+          <p:cNvPr id="7" name="Slide Number Placeholder 6"/>
           <p:cNvSpPr>
             <a:spLocks noGrp="1"/>
           </p:cNvSpPr>
@@ -3992,11 +3494,6 @@
         </p:txBody>
       </p:sp>
     </p:spTree>
-    <p:extLst>
-      <p:ext uri="{BB962C8B-B14F-4D97-AF65-F5344CB8AC3E}">
-        <p14:creationId xmlns:p14="http://schemas.microsoft.com/office/powerpoint/2010/main" val="755083357"/>
-      </p:ext>
-    </p:extLst>
   </p:cSld>
   <p:clrMapOvr>
     <a:masterClrMapping/>
@@ -4023,13 +3520,7 @@
       </p:grpSpPr>
       <p:sp>
         <p:nvSpPr>
-          <p:cNvPr id="2" name="Title 1">
-            <a:extLst>
-              <a:ext uri="{FF2B5EF4-FFF2-40B4-BE49-F238E27FC236}">
-                <a16:creationId xmlns:a16="http://schemas.microsoft.com/office/drawing/2014/main" id="{CA0C3271-7728-ABFE-08BA-08541D5CD11C}"/>
-              </a:ext>
-            </a:extLst>
-          </p:cNvPr>
+          <p:cNvPr id="2" name="Title 1"/>
           <p:cNvSpPr>
             <a:spLocks noGrp="1"/>
           </p:cNvSpPr>
@@ -4052,13 +3543,7 @@
       </p:sp>
       <p:sp>
         <p:nvSpPr>
-          <p:cNvPr id="3" name="Vertical Text Placeholder 2">
-            <a:extLst>
-              <a:ext uri="{FF2B5EF4-FFF2-40B4-BE49-F238E27FC236}">
-                <a16:creationId xmlns:a16="http://schemas.microsoft.com/office/drawing/2014/main" id="{02785F53-745D-5FE5-E22B-4FC16E81831E}"/>
-              </a:ext>
-            </a:extLst>
-          </p:cNvPr>
+          <p:cNvPr id="3" name="Vertical Text Placeholder 2"/>
           <p:cNvSpPr>
             <a:spLocks noGrp="1"/>
           </p:cNvSpPr>
@@ -4110,13 +3595,7 @@
       </p:sp>
       <p:sp>
         <p:nvSpPr>
-          <p:cNvPr id="4" name="Date Placeholder 3">
-            <a:extLst>
-              <a:ext uri="{FF2B5EF4-FFF2-40B4-BE49-F238E27FC236}">
-                <a16:creationId xmlns:a16="http://schemas.microsoft.com/office/drawing/2014/main" id="{8C91A46D-ED0A-47EE-B5CC-D9E4A65443EF}"/>
-              </a:ext>
-            </a:extLst>
-          </p:cNvPr>
+          <p:cNvPr id="4" name="Date Placeholder 3"/>
           <p:cNvSpPr>
             <a:spLocks noGrp="1"/>
           </p:cNvSpPr>
@@ -4131,7 +3610,7 @@
           <a:p>
             <a:fld id="{76E1380B-202A-4ADB-8029-48BBD470229E}" type="datetimeFigureOut">
               <a:rPr lang="en-IN" smtClean="0"/>
-              <a:t>24-09-2026</a:t>
+              <a:t>29-10-2026</a:t>
             </a:fld>
             <a:endParaRPr lang="en-IN"/>
           </a:p>
@@ -4139,13 +3618,7 @@
       </p:sp>
       <p:sp>
         <p:nvSpPr>
-          <p:cNvPr id="5" name="Footer Placeholder 4">
-            <a:extLst>
-              <a:ext uri="{FF2B5EF4-FFF2-40B4-BE49-F238E27FC236}">
-                <a16:creationId xmlns:a16="http://schemas.microsoft.com/office/drawing/2014/main" id="{732E6DF1-BEF5-405C-EC8A-859610E7C76E}"/>
-              </a:ext>
-            </a:extLst>
-          </p:cNvPr>
+          <p:cNvPr id="5" name="Footer Placeholder 4"/>
           <p:cNvSpPr>
             <a:spLocks noGrp="1"/>
           </p:cNvSpPr>
@@ -4164,13 +3637,7 @@
       </p:sp>
       <p:sp>
         <p:nvSpPr>
-          <p:cNvPr id="6" name="Slide Number Placeholder 5">
-            <a:extLst>
-              <a:ext uri="{FF2B5EF4-FFF2-40B4-BE49-F238E27FC236}">
-                <a16:creationId xmlns:a16="http://schemas.microsoft.com/office/drawing/2014/main" id="{CDB1E7E2-BB0D-D28E-849A-92453DFC87BB}"/>
-              </a:ext>
-            </a:extLst>
-          </p:cNvPr>
+          <p:cNvPr id="6" name="Slide Number Placeholder 5"/>
           <p:cNvSpPr>
             <a:spLocks noGrp="1"/>
           </p:cNvSpPr>
@@ -4192,11 +3659,6 @@
         </p:txBody>
       </p:sp>
     </p:spTree>
-    <p:extLst>
-      <p:ext uri="{BB962C8B-B14F-4D97-AF65-F5344CB8AC3E}">
-        <p14:creationId xmlns:p14="http://schemas.microsoft.com/office/powerpoint/2010/main" val="1075577198"/>
-      </p:ext>
-    </p:extLst>
   </p:cSld>
   <p:clrMapOvr>
     <a:masterClrMapping/>
@@ -4223,13 +3685,7 @@
       </p:grpSpPr>
       <p:sp>
         <p:nvSpPr>
-          <p:cNvPr id="2" name="Vertical Title 1">
-            <a:extLst>
-              <a:ext uri="{FF2B5EF4-FFF2-40B4-BE49-F238E27FC236}">
-                <a16:creationId xmlns:a16="http://schemas.microsoft.com/office/drawing/2014/main" id="{CDCC6B7D-EBAA-5823-1636-5EA5EA30D146}"/>
-              </a:ext>
-            </a:extLst>
-          </p:cNvPr>
+          <p:cNvPr id="2" name="Vertical Title 1"/>
           <p:cNvSpPr>
             <a:spLocks noGrp="1"/>
           </p:cNvSpPr>
@@ -4257,13 +3713,7 @@
       </p:sp>
       <p:sp>
         <p:nvSpPr>
-          <p:cNvPr id="3" name="Vertical Text Placeholder 2">
-            <a:extLst>
-              <a:ext uri="{FF2B5EF4-FFF2-40B4-BE49-F238E27FC236}">
-                <a16:creationId xmlns:a16="http://schemas.microsoft.com/office/drawing/2014/main" id="{A9766CC8-A554-43B7-760F-9F5408002E93}"/>
-              </a:ext>
-            </a:extLst>
-          </p:cNvPr>
+          <p:cNvPr id="3" name="Vertical Text Placeholder 2"/>
           <p:cNvSpPr>
             <a:spLocks noGrp="1"/>
           </p:cNvSpPr>
@@ -4320,13 +3770,7 @@
       </p:sp>
       <p:sp>
         <p:nvSpPr>
-          <p:cNvPr id="4" name="Date Placeholder 3">
-            <a:extLst>
-              <a:ext uri="{FF2B5EF4-FFF2-40B4-BE49-F238E27FC236}">
-                <a16:creationId xmlns:a16="http://schemas.microsoft.com/office/drawing/2014/main" id="{8A4E45D6-8674-FF12-EC6D-CE372CB35266}"/>
-              </a:ext>
-            </a:extLst>
-          </p:cNvPr>
+          <p:cNvPr id="4" name="Date Placeholder 3"/>
           <p:cNvSpPr>
             <a:spLocks noGrp="1"/>
           </p:cNvSpPr>
@@ -4341,7 +3785,7 @@
           <a:p>
             <a:fld id="{76E1380B-202A-4ADB-8029-48BBD470229E}" type="datetimeFigureOut">
               <a:rPr lang="en-IN" smtClean="0"/>
-              <a:t>24-09-2026</a:t>
+              <a:t>29-10-2026</a:t>
             </a:fld>
             <a:endParaRPr lang="en-IN"/>
           </a:p>
@@ -4349,13 +3793,7 @@
       </p:sp>
       <p:sp>
         <p:nvSpPr>
-          <p:cNvPr id="5" name="Footer Placeholder 4">
-            <a:extLst>
-              <a:ext uri="{FF2B5EF4-FFF2-40B4-BE49-F238E27FC236}">
-                <a16:creationId xmlns:a16="http://schemas.microsoft.com/office/drawing/2014/main" id="{C1A890E8-91DF-413A-1873-F275B46FD036}"/>
-              </a:ext>
-            </a:extLst>
-          </p:cNvPr>
+          <p:cNvPr id="5" name="Footer Placeholder 4"/>
           <p:cNvSpPr>
             <a:spLocks noGrp="1"/>
           </p:cNvSpPr>
@@ -4374,13 +3812,7 @@
       </p:sp>
       <p:sp>
         <p:nvSpPr>
-          <p:cNvPr id="6" name="Slide Number Placeholder 5">
-            <a:extLst>
-              <a:ext uri="{FF2B5EF4-FFF2-40B4-BE49-F238E27FC236}">
-                <a16:creationId xmlns:a16="http://schemas.microsoft.com/office/drawing/2014/main" id="{A4B37097-10DF-5E03-AD3E-B798B827FB8B}"/>
-              </a:ext>
-            </a:extLst>
-          </p:cNvPr>
+          <p:cNvPr id="6" name="Slide Number Placeholder 5"/>
           <p:cNvSpPr>
             <a:spLocks noGrp="1"/>
           </p:cNvSpPr>
@@ -4402,11 +3834,6 @@
         </p:txBody>
       </p:sp>
     </p:spTree>
-    <p:extLst>
-      <p:ext uri="{BB962C8B-B14F-4D97-AF65-F5344CB8AC3E}">
-        <p14:creationId xmlns:p14="http://schemas.microsoft.com/office/powerpoint/2010/main" val="1964720585"/>
-      </p:ext>
-    </p:extLst>
   </p:cSld>
   <p:clrMapOvr>
     <a:masterClrMapping/>
@@ -4433,13 +3860,7 @@
       </p:grpSpPr>
       <p:sp>
         <p:nvSpPr>
-          <p:cNvPr id="2" name="Title 1">
-            <a:extLst>
-              <a:ext uri="{FF2B5EF4-FFF2-40B4-BE49-F238E27FC236}">
-                <a16:creationId xmlns:a16="http://schemas.microsoft.com/office/drawing/2014/main" id="{A1988FD6-BCD6-50E3-0A0B-27179724EDE9}"/>
-              </a:ext>
-            </a:extLst>
-          </p:cNvPr>
+          <p:cNvPr id="2" name="Title 1"/>
           <p:cNvSpPr>
             <a:spLocks noGrp="1"/>
           </p:cNvSpPr>
@@ -4474,13 +3895,7 @@
       </p:sp>
       <p:sp>
         <p:nvSpPr>
-          <p:cNvPr id="3" name="Subtitle 2">
-            <a:extLst>
-              <a:ext uri="{FF2B5EF4-FFF2-40B4-BE49-F238E27FC236}">
-                <a16:creationId xmlns:a16="http://schemas.microsoft.com/office/drawing/2014/main" id="{238715FC-D600-14D3-5DDC-00423997BBC3}"/>
-              </a:ext>
-            </a:extLst>
-          </p:cNvPr>
+          <p:cNvPr id="3" name="Subtitle 2"/>
           <p:cNvSpPr>
             <a:spLocks noGrp="1"/>
           </p:cNvSpPr>
@@ -4545,13 +3960,7 @@
       </p:sp>
       <p:sp>
         <p:nvSpPr>
-          <p:cNvPr id="4" name="Date Placeholder 3">
-            <a:extLst>
-              <a:ext uri="{FF2B5EF4-FFF2-40B4-BE49-F238E27FC236}">
-                <a16:creationId xmlns:a16="http://schemas.microsoft.com/office/drawing/2014/main" id="{074977AE-DE86-2732-829C-69B67324C93E}"/>
-              </a:ext>
-            </a:extLst>
-          </p:cNvPr>
+          <p:cNvPr id="4" name="Date Placeholder 3"/>
           <p:cNvSpPr>
             <a:spLocks noGrp="1"/>
           </p:cNvSpPr>
@@ -4566,7 +3975,7 @@
           <a:p>
             <a:fld id="{4FCF3042-9457-4066-8C5E-A728C46299CF}" type="datetimeFigureOut">
               <a:rPr lang="en-IN" smtClean="0"/>
-              <a:t>24-09-2026</a:t>
+              <a:t>29-10-2026</a:t>
             </a:fld>
             <a:endParaRPr lang="en-IN"/>
           </a:p>
@@ -4574,13 +3983,7 @@
       </p:sp>
       <p:sp>
         <p:nvSpPr>
-          <p:cNvPr id="5" name="Footer Placeholder 4">
-            <a:extLst>
-              <a:ext uri="{FF2B5EF4-FFF2-40B4-BE49-F238E27FC236}">
-                <a16:creationId xmlns:a16="http://schemas.microsoft.com/office/drawing/2014/main" id="{C0013E8A-91A9-9A7D-186B-AD4920876244}"/>
-              </a:ext>
-            </a:extLst>
-          </p:cNvPr>
+          <p:cNvPr id="5" name="Footer Placeholder 4"/>
           <p:cNvSpPr>
             <a:spLocks noGrp="1"/>
           </p:cNvSpPr>
@@ -4599,13 +4002,7 @@
       </p:sp>
       <p:sp>
         <p:nvSpPr>
-          <p:cNvPr id="6" name="Slide Number Placeholder 5">
-            <a:extLst>
-              <a:ext uri="{FF2B5EF4-FFF2-40B4-BE49-F238E27FC236}">
-                <a16:creationId xmlns:a16="http://schemas.microsoft.com/office/drawing/2014/main" id="{6911FED8-C4C2-8034-3FB9-CE6B054460B0}"/>
-              </a:ext>
-            </a:extLst>
-          </p:cNvPr>
+          <p:cNvPr id="6" name="Slide Number Placeholder 5"/>
           <p:cNvSpPr>
             <a:spLocks noGrp="1"/>
           </p:cNvSpPr>
@@ -4627,11 +4024,6 @@
         </p:txBody>
       </p:sp>
     </p:spTree>
-    <p:extLst>
-      <p:ext uri="{BB962C8B-B14F-4D97-AF65-F5344CB8AC3E}">
-        <p14:creationId xmlns:p14="http://schemas.microsoft.com/office/powerpoint/2010/main" val="4011697782"/>
-      </p:ext>
-    </p:extLst>
   </p:cSld>
   <p:clrMapOvr>
     <a:masterClrMapping/>
@@ -4658,13 +4050,7 @@
       </p:grpSpPr>
       <p:sp>
         <p:nvSpPr>
-          <p:cNvPr id="2" name="Title 1">
-            <a:extLst>
-              <a:ext uri="{FF2B5EF4-FFF2-40B4-BE49-F238E27FC236}">
-                <a16:creationId xmlns:a16="http://schemas.microsoft.com/office/drawing/2014/main" id="{D8C69710-3765-D9FB-BF3B-0AC5C93BCB6D}"/>
-              </a:ext>
-            </a:extLst>
-          </p:cNvPr>
+          <p:cNvPr id="2" name="Title 1"/>
           <p:cNvSpPr>
             <a:spLocks noGrp="1"/>
           </p:cNvSpPr>
@@ -4695,13 +4081,7 @@
       </p:sp>
       <p:sp>
         <p:nvSpPr>
-          <p:cNvPr id="3" name="Content Placeholder 2">
-            <a:extLst>
-              <a:ext uri="{FF2B5EF4-FFF2-40B4-BE49-F238E27FC236}">
-                <a16:creationId xmlns:a16="http://schemas.microsoft.com/office/drawing/2014/main" id="{723AEEBF-1BBE-3437-B26A-A1C6D70E6DFE}"/>
-              </a:ext>
-            </a:extLst>
-          </p:cNvPr>
+          <p:cNvPr id="3" name="Content Placeholder 2"/>
           <p:cNvSpPr>
             <a:spLocks noGrp="1"/>
           </p:cNvSpPr>
@@ -4753,13 +4133,7 @@
       </p:sp>
       <p:sp>
         <p:nvSpPr>
-          <p:cNvPr id="4" name="Date Placeholder 3">
-            <a:extLst>
-              <a:ext uri="{FF2B5EF4-FFF2-40B4-BE49-F238E27FC236}">
-                <a16:creationId xmlns:a16="http://schemas.microsoft.com/office/drawing/2014/main" id="{8793C8A5-EBFE-C563-9916-CB396228DF3F}"/>
-              </a:ext>
-            </a:extLst>
-          </p:cNvPr>
+          <p:cNvPr id="4" name="Date Placeholder 3"/>
           <p:cNvSpPr>
             <a:spLocks noGrp="1"/>
           </p:cNvSpPr>
@@ -4774,7 +4148,7 @@
           <a:p>
             <a:fld id="{4FCF3042-9457-4066-8C5E-A728C46299CF}" type="datetimeFigureOut">
               <a:rPr lang="en-IN" smtClean="0"/>
-              <a:t>24-09-2026</a:t>
+              <a:t>29-10-2026</a:t>
             </a:fld>
             <a:endParaRPr lang="en-IN"/>
           </a:p>
@@ -4782,13 +4156,7 @@
       </p:sp>
       <p:sp>
         <p:nvSpPr>
-          <p:cNvPr id="5" name="Footer Placeholder 4">
-            <a:extLst>
-              <a:ext uri="{FF2B5EF4-FFF2-40B4-BE49-F238E27FC236}">
-                <a16:creationId xmlns:a16="http://schemas.microsoft.com/office/drawing/2014/main" id="{69EBC35D-475F-CFB2-50D3-4EF26912F238}"/>
-              </a:ext>
-            </a:extLst>
-          </p:cNvPr>
+          <p:cNvPr id="5" name="Footer Placeholder 4"/>
           <p:cNvSpPr>
             <a:spLocks noGrp="1"/>
           </p:cNvSpPr>
@@ -4807,13 +4175,7 @@
       </p:sp>
       <p:sp>
         <p:nvSpPr>
-          <p:cNvPr id="6" name="Slide Number Placeholder 5">
-            <a:extLst>
-              <a:ext uri="{FF2B5EF4-FFF2-40B4-BE49-F238E27FC236}">
-                <a16:creationId xmlns:a16="http://schemas.microsoft.com/office/drawing/2014/main" id="{A2FA3E53-1DFA-7B31-C713-4C0D7665F6AD}"/>
-              </a:ext>
-            </a:extLst>
-          </p:cNvPr>
+          <p:cNvPr id="6" name="Slide Number Placeholder 5"/>
           <p:cNvSpPr>
             <a:spLocks noGrp="1"/>
           </p:cNvSpPr>
@@ -4835,11 +4197,6 @@
         </p:txBody>
       </p:sp>
     </p:spTree>
-    <p:extLst>
-      <p:ext uri="{BB962C8B-B14F-4D97-AF65-F5344CB8AC3E}">
-        <p14:creationId xmlns:p14="http://schemas.microsoft.com/office/powerpoint/2010/main" val="3033299727"/>
-      </p:ext>
-    </p:extLst>
   </p:cSld>
   <p:clrMapOvr>
     <a:masterClrMapping/>
@@ -4866,13 +4223,7 @@
       </p:grpSpPr>
       <p:sp>
         <p:nvSpPr>
-          <p:cNvPr id="2" name="Title 1">
-            <a:extLst>
-              <a:ext uri="{FF2B5EF4-FFF2-40B4-BE49-F238E27FC236}">
-                <a16:creationId xmlns:a16="http://schemas.microsoft.com/office/drawing/2014/main" id="{99B2F31A-53EF-48A6-F1B7-FCAA38A4E794}"/>
-              </a:ext>
-            </a:extLst>
-          </p:cNvPr>
+          <p:cNvPr id="2" name="Title 1"/>
           <p:cNvSpPr>
             <a:spLocks noGrp="1"/>
           </p:cNvSpPr>
@@ -4907,13 +4258,7 @@
       </p:sp>
       <p:sp>
         <p:nvSpPr>
-          <p:cNvPr id="3" name="Text Placeholder 2">
-            <a:extLst>
-              <a:ext uri="{FF2B5EF4-FFF2-40B4-BE49-F238E27FC236}">
-                <a16:creationId xmlns:a16="http://schemas.microsoft.com/office/drawing/2014/main" id="{D6F19282-EBAA-2E6C-B5D0-2BD02E282D55}"/>
-              </a:ext>
-            </a:extLst>
-          </p:cNvPr>
+          <p:cNvPr id="3" name="Text Placeholder 2"/>
           <p:cNvSpPr>
             <a:spLocks noGrp="1"/>
           </p:cNvSpPr>
@@ -5032,13 +4377,7 @@
       </p:sp>
       <p:sp>
         <p:nvSpPr>
-          <p:cNvPr id="4" name="Date Placeholder 3">
-            <a:extLst>
-              <a:ext uri="{FF2B5EF4-FFF2-40B4-BE49-F238E27FC236}">
-                <a16:creationId xmlns:a16="http://schemas.microsoft.com/office/drawing/2014/main" id="{E1D06B2D-4A8F-5B64-54A6-5EEA1E3DFCFF}"/>
-              </a:ext>
-            </a:extLst>
-          </p:cNvPr>
+          <p:cNvPr id="4" name="Date Placeholder 3"/>
           <p:cNvSpPr>
             <a:spLocks noGrp="1"/>
           </p:cNvSpPr>
@@ -5053,7 +4392,7 @@
           <a:p>
             <a:fld id="{4FCF3042-9457-4066-8C5E-A728C46299CF}" type="datetimeFigureOut">
               <a:rPr lang="en-IN" smtClean="0"/>
-              <a:t>24-09-2026</a:t>
+              <a:t>29-10-2026</a:t>
             </a:fld>
             <a:endParaRPr lang="en-IN"/>
           </a:p>
@@ -5061,13 +4400,7 @@
       </p:sp>
       <p:sp>
         <p:nvSpPr>
-          <p:cNvPr id="5" name="Footer Placeholder 4">
-            <a:extLst>
-              <a:ext uri="{FF2B5EF4-FFF2-40B4-BE49-F238E27FC236}">
-                <a16:creationId xmlns:a16="http://schemas.microsoft.com/office/drawing/2014/main" id="{C30E9BE5-38E4-41A8-BEE2-74BD78D4727B}"/>
-              </a:ext>
-            </a:extLst>
-          </p:cNvPr>
+          <p:cNvPr id="5" name="Footer Placeholder 4"/>
           <p:cNvSpPr>
             <a:spLocks noGrp="1"/>
           </p:cNvSpPr>
@@ -5086,13 +4419,7 @@
       </p:sp>
       <p:sp>
         <p:nvSpPr>
-          <p:cNvPr id="6" name="Slide Number Placeholder 5">
-            <a:extLst>
-              <a:ext uri="{FF2B5EF4-FFF2-40B4-BE49-F238E27FC236}">
-                <a16:creationId xmlns:a16="http://schemas.microsoft.com/office/drawing/2014/main" id="{C1D7004C-7F2F-5B27-5D32-445CD1C858A1}"/>
-              </a:ext>
-            </a:extLst>
-          </p:cNvPr>
+          <p:cNvPr id="6" name="Slide Number Placeholder 5"/>
           <p:cNvSpPr>
             <a:spLocks noGrp="1"/>
           </p:cNvSpPr>
@@ -5114,11 +4441,6 @@
         </p:txBody>
       </p:sp>
     </p:spTree>
-    <p:extLst>
-      <p:ext uri="{BB962C8B-B14F-4D97-AF65-F5344CB8AC3E}">
-        <p14:creationId xmlns:p14="http://schemas.microsoft.com/office/powerpoint/2010/main" val="756808663"/>
-      </p:ext>
-    </p:extLst>
   </p:cSld>
   <p:clrMapOvr>
     <a:masterClrMapping/>
@@ -5145,13 +4467,7 @@
       </p:grpSpPr>
       <p:sp>
         <p:nvSpPr>
-          <p:cNvPr id="2" name="Title 1">
-            <a:extLst>
-              <a:ext uri="{FF2B5EF4-FFF2-40B4-BE49-F238E27FC236}">
-                <a16:creationId xmlns:a16="http://schemas.microsoft.com/office/drawing/2014/main" id="{B2FF45D6-5E5D-2827-FD1E-60B569402380}"/>
-              </a:ext>
-            </a:extLst>
-          </p:cNvPr>
+          <p:cNvPr id="2" name="Title 1"/>
           <p:cNvSpPr>
             <a:spLocks noGrp="1"/>
           </p:cNvSpPr>
@@ -5182,13 +4498,7 @@
       </p:sp>
       <p:sp>
         <p:nvSpPr>
-          <p:cNvPr id="3" name="Content Placeholder 2">
-            <a:extLst>
-              <a:ext uri="{FF2B5EF4-FFF2-40B4-BE49-F238E27FC236}">
-                <a16:creationId xmlns:a16="http://schemas.microsoft.com/office/drawing/2014/main" id="{A588AC93-C419-2CD1-9FC6-AE42E2B69A44}"/>
-              </a:ext>
-            </a:extLst>
-          </p:cNvPr>
+          <p:cNvPr id="3" name="Content Placeholder 2"/>
           <p:cNvSpPr>
             <a:spLocks noGrp="1"/>
           </p:cNvSpPr>
@@ -5245,13 +4555,7 @@
       </p:sp>
       <p:sp>
         <p:nvSpPr>
-          <p:cNvPr id="4" name="Content Placeholder 3">
-            <a:extLst>
-              <a:ext uri="{FF2B5EF4-FFF2-40B4-BE49-F238E27FC236}">
-                <a16:creationId xmlns:a16="http://schemas.microsoft.com/office/drawing/2014/main" id="{17345EBA-BD5C-A6FF-80EB-9D0D167861E5}"/>
-              </a:ext>
-            </a:extLst>
-          </p:cNvPr>
+          <p:cNvPr id="4" name="Content Placeholder 3"/>
           <p:cNvSpPr>
             <a:spLocks noGrp="1"/>
           </p:cNvSpPr>
@@ -5308,13 +4612,7 @@
       </p:sp>
       <p:sp>
         <p:nvSpPr>
-          <p:cNvPr id="5" name="Date Placeholder 4">
-            <a:extLst>
-              <a:ext uri="{FF2B5EF4-FFF2-40B4-BE49-F238E27FC236}">
-                <a16:creationId xmlns:a16="http://schemas.microsoft.com/office/drawing/2014/main" id="{DFC9E9C6-BB6B-9F89-6728-83533563F9CD}"/>
-              </a:ext>
-            </a:extLst>
-          </p:cNvPr>
+          <p:cNvPr id="5" name="Date Placeholder 4"/>
           <p:cNvSpPr>
             <a:spLocks noGrp="1"/>
           </p:cNvSpPr>
@@ -5329,7 +4627,7 @@
           <a:p>
             <a:fld id="{4FCF3042-9457-4066-8C5E-A728C46299CF}" type="datetimeFigureOut">
               <a:rPr lang="en-IN" smtClean="0"/>
-              <a:t>24-09-2026</a:t>
+              <a:t>29-10-2026</a:t>
             </a:fld>
             <a:endParaRPr lang="en-IN"/>
           </a:p>
@@ -5337,13 +4635,7 @@
       </p:sp>
       <p:sp>
         <p:nvSpPr>
-          <p:cNvPr id="6" name="Footer Placeholder 5">
-            <a:extLst>
-              <a:ext uri="{FF2B5EF4-FFF2-40B4-BE49-F238E27FC236}">
-                <a16:creationId xmlns:a16="http://schemas.microsoft.com/office/drawing/2014/main" id="{62AD7458-A7D6-9FDD-36AB-1C355C6C3C18}"/>
-              </a:ext>
-            </a:extLst>
-          </p:cNvPr>
+          <p:cNvPr id="6" name="Footer Placeholder 5"/>
           <p:cNvSpPr>
             <a:spLocks noGrp="1"/>
           </p:cNvSpPr>
@@ -5362,13 +4654,7 @@
       </p:sp>
       <p:sp>
         <p:nvSpPr>
-          <p:cNvPr id="7" name="Slide Number Placeholder 6">
-            <a:extLst>
-              <a:ext uri="{FF2B5EF4-FFF2-40B4-BE49-F238E27FC236}">
-                <a16:creationId xmlns:a16="http://schemas.microsoft.com/office/drawing/2014/main" id="{7B105FA4-CC24-7C7C-A532-B373363D066F}"/>
-              </a:ext>
-            </a:extLst>
-          </p:cNvPr>
+          <p:cNvPr id="7" name="Slide Number Placeholder 6"/>
           <p:cNvSpPr>
             <a:spLocks noGrp="1"/>
           </p:cNvSpPr>
@@ -5390,11 +4676,6 @@
         </p:txBody>
       </p:sp>
     </p:spTree>
-    <p:extLst>
-      <p:ext uri="{BB962C8B-B14F-4D97-AF65-F5344CB8AC3E}">
-        <p14:creationId xmlns:p14="http://schemas.microsoft.com/office/powerpoint/2010/main" val="2874896138"/>
-      </p:ext>
-    </p:extLst>
   </p:cSld>
   <p:clrMapOvr>
     <a:masterClrMapping/>
@@ -5421,13 +4702,7 @@
       </p:grpSpPr>
       <p:sp>
         <p:nvSpPr>
-          <p:cNvPr id="2" name="Title 1">
-            <a:extLst>
-              <a:ext uri="{FF2B5EF4-FFF2-40B4-BE49-F238E27FC236}">
-                <a16:creationId xmlns:a16="http://schemas.microsoft.com/office/drawing/2014/main" id="{6E76F29B-C364-3C85-9F33-458B4F4B2DAB}"/>
-              </a:ext>
-            </a:extLst>
-          </p:cNvPr>
+          <p:cNvPr id="2" name="Title 1"/>
           <p:cNvSpPr>
             <a:spLocks noGrp="1"/>
           </p:cNvSpPr>
@@ -5458,13 +4733,7 @@
       </p:sp>
       <p:sp>
         <p:nvSpPr>
-          <p:cNvPr id="3" name="Text Placeholder 2">
-            <a:extLst>
-              <a:ext uri="{FF2B5EF4-FFF2-40B4-BE49-F238E27FC236}">
-                <a16:creationId xmlns:a16="http://schemas.microsoft.com/office/drawing/2014/main" id="{6A79D6EF-30CF-C565-01E4-4E4995566BB9}"/>
-              </a:ext>
-            </a:extLst>
-          </p:cNvPr>
+          <p:cNvPr id="3" name="Text Placeholder 2"/>
           <p:cNvSpPr>
             <a:spLocks noGrp="1"/>
           </p:cNvSpPr>
@@ -5529,13 +4798,7 @@
       </p:sp>
       <p:sp>
         <p:nvSpPr>
-          <p:cNvPr id="4" name="Content Placeholder 3">
-            <a:extLst>
-              <a:ext uri="{FF2B5EF4-FFF2-40B4-BE49-F238E27FC236}">
-                <a16:creationId xmlns:a16="http://schemas.microsoft.com/office/drawing/2014/main" id="{306D05A6-7A71-B3B0-F013-E7DD32567DAF}"/>
-              </a:ext>
-            </a:extLst>
-          </p:cNvPr>
+          <p:cNvPr id="4" name="Content Placeholder 3"/>
           <p:cNvSpPr>
             <a:spLocks noGrp="1"/>
           </p:cNvSpPr>
@@ -5592,13 +4855,7 @@
       </p:sp>
       <p:sp>
         <p:nvSpPr>
-          <p:cNvPr id="5" name="Text Placeholder 4">
-            <a:extLst>
-              <a:ext uri="{FF2B5EF4-FFF2-40B4-BE49-F238E27FC236}">
-                <a16:creationId xmlns:a16="http://schemas.microsoft.com/office/drawing/2014/main" id="{433F03AE-E67D-BA4A-EDE9-7ED6446469BA}"/>
-              </a:ext>
-            </a:extLst>
-          </p:cNvPr>
+          <p:cNvPr id="5" name="Text Placeholder 4"/>
           <p:cNvSpPr>
             <a:spLocks noGrp="1"/>
           </p:cNvSpPr>
@@ -5663,13 +4920,7 @@
       </p:sp>
       <p:sp>
         <p:nvSpPr>
-          <p:cNvPr id="6" name="Content Placeholder 5">
-            <a:extLst>
-              <a:ext uri="{FF2B5EF4-FFF2-40B4-BE49-F238E27FC236}">
-                <a16:creationId xmlns:a16="http://schemas.microsoft.com/office/drawing/2014/main" id="{DF412A95-0108-4305-9DD8-084EB84EC459}"/>
-              </a:ext>
-            </a:extLst>
-          </p:cNvPr>
+          <p:cNvPr id="6" name="Content Placeholder 5"/>
           <p:cNvSpPr>
             <a:spLocks noGrp="1"/>
           </p:cNvSpPr>
@@ -5726,13 +4977,7 @@
       </p:sp>
       <p:sp>
         <p:nvSpPr>
-          <p:cNvPr id="7" name="Date Placeholder 6">
-            <a:extLst>
-              <a:ext uri="{FF2B5EF4-FFF2-40B4-BE49-F238E27FC236}">
-                <a16:creationId xmlns:a16="http://schemas.microsoft.com/office/drawing/2014/main" id="{3154DE32-970C-2086-BD83-DD9B1A0D36C5}"/>
-              </a:ext>
-            </a:extLst>
-          </p:cNvPr>
+          <p:cNvPr id="7" name="Date Placeholder 6"/>
           <p:cNvSpPr>
             <a:spLocks noGrp="1"/>
           </p:cNvSpPr>
@@ -5747,7 +4992,7 @@
           <a:p>
             <a:fld id="{4FCF3042-9457-4066-8C5E-A728C46299CF}" type="datetimeFigureOut">
               <a:rPr lang="en-IN" smtClean="0"/>
-              <a:t>24-09-2026</a:t>
+              <a:t>29-10-2026</a:t>
             </a:fld>
             <a:endParaRPr lang="en-IN"/>
           </a:p>
@@ -5755,13 +5000,7 @@
       </p:sp>
       <p:sp>
         <p:nvSpPr>
-          <p:cNvPr id="8" name="Footer Placeholder 7">
-            <a:extLst>
-              <a:ext uri="{FF2B5EF4-FFF2-40B4-BE49-F238E27FC236}">
-                <a16:creationId xmlns:a16="http://schemas.microsoft.com/office/drawing/2014/main" id="{7D3B36E7-364D-C3CC-C4F2-7689287A8F8D}"/>
-              </a:ext>
-            </a:extLst>
-          </p:cNvPr>
+          <p:cNvPr id="8" name="Footer Placeholder 7"/>
           <p:cNvSpPr>
             <a:spLocks noGrp="1"/>
           </p:cNvSpPr>
@@ -5780,13 +5019,7 @@
       </p:sp>
       <p:sp>
         <p:nvSpPr>
-          <p:cNvPr id="9" name="Slide Number Placeholder 8">
-            <a:extLst>
-              <a:ext uri="{FF2B5EF4-FFF2-40B4-BE49-F238E27FC236}">
-                <a16:creationId xmlns:a16="http://schemas.microsoft.com/office/drawing/2014/main" id="{3A0D10CA-0A20-361F-D7AA-189EB9B5248B}"/>
-              </a:ext>
-            </a:extLst>
-          </p:cNvPr>
+          <p:cNvPr id="9" name="Slide Number Placeholder 8"/>
           <p:cNvSpPr>
             <a:spLocks noGrp="1"/>
           </p:cNvSpPr>
@@ -5808,11 +5041,6 @@
         </p:txBody>
       </p:sp>
     </p:spTree>
-    <p:extLst>
-      <p:ext uri="{BB962C8B-B14F-4D97-AF65-F5344CB8AC3E}">
-        <p14:creationId xmlns:p14="http://schemas.microsoft.com/office/powerpoint/2010/main" val="2489418650"/>
-      </p:ext>
-    </p:extLst>
   </p:cSld>
   <p:clrMapOvr>
     <a:masterClrMapping/>
@@ -5839,13 +5067,7 @@
       </p:grpSpPr>
       <p:sp>
         <p:nvSpPr>
-          <p:cNvPr id="2" name="Title 1">
-            <a:extLst>
-              <a:ext uri="{FF2B5EF4-FFF2-40B4-BE49-F238E27FC236}">
-                <a16:creationId xmlns:a16="http://schemas.microsoft.com/office/drawing/2014/main" id="{17C856B8-5AB4-8CA9-2A68-C8448AFE6A7A}"/>
-              </a:ext>
-            </a:extLst>
-          </p:cNvPr>
+          <p:cNvPr id="2" name="Title 1"/>
           <p:cNvSpPr>
             <a:spLocks noGrp="1"/>
           </p:cNvSpPr>
@@ -5876,13 +5098,7 @@
       </p:sp>
       <p:sp>
         <p:nvSpPr>
-          <p:cNvPr id="3" name="Date Placeholder 2">
-            <a:extLst>
-              <a:ext uri="{FF2B5EF4-FFF2-40B4-BE49-F238E27FC236}">
-                <a16:creationId xmlns:a16="http://schemas.microsoft.com/office/drawing/2014/main" id="{5198FFDD-0D19-087E-C4C4-3DDC78364B55}"/>
-              </a:ext>
-            </a:extLst>
-          </p:cNvPr>
+          <p:cNvPr id="3" name="Date Placeholder 2"/>
           <p:cNvSpPr>
             <a:spLocks noGrp="1"/>
           </p:cNvSpPr>
@@ -5897,7 +5113,7 @@
           <a:p>
             <a:fld id="{4FCF3042-9457-4066-8C5E-A728C46299CF}" type="datetimeFigureOut">
               <a:rPr lang="en-IN" smtClean="0"/>
-              <a:t>24-09-2026</a:t>
+              <a:t>29-10-2026</a:t>
             </a:fld>
             <a:endParaRPr lang="en-IN"/>
           </a:p>
@@ -5905,13 +5121,7 @@
       </p:sp>
       <p:sp>
         <p:nvSpPr>
-          <p:cNvPr id="4" name="Footer Placeholder 3">
-            <a:extLst>
-              <a:ext uri="{FF2B5EF4-FFF2-40B4-BE49-F238E27FC236}">
-                <a16:creationId xmlns:a16="http://schemas.microsoft.com/office/drawing/2014/main" id="{B1F7418C-237A-D9C4-5BB9-65F45E43B0F0}"/>
-              </a:ext>
-            </a:extLst>
-          </p:cNvPr>
+          <p:cNvPr id="4" name="Footer Placeholder 3"/>
           <p:cNvSpPr>
             <a:spLocks noGrp="1"/>
           </p:cNvSpPr>
@@ -5930,13 +5140,7 @@
       </p:sp>
       <p:sp>
         <p:nvSpPr>
-          <p:cNvPr id="5" name="Slide Number Placeholder 4">
-            <a:extLst>
-              <a:ext uri="{FF2B5EF4-FFF2-40B4-BE49-F238E27FC236}">
-                <a16:creationId xmlns:a16="http://schemas.microsoft.com/office/drawing/2014/main" id="{061E1A3C-CA6A-DBF9-3EC0-EAE3556E40BC}"/>
-              </a:ext>
-            </a:extLst>
-          </p:cNvPr>
+          <p:cNvPr id="5" name="Slide Number Placeholder 4"/>
           <p:cNvSpPr>
             <a:spLocks noGrp="1"/>
           </p:cNvSpPr>
@@ -5958,11 +5162,6 @@
         </p:txBody>
       </p:sp>
     </p:spTree>
-    <p:extLst>
-      <p:ext uri="{BB962C8B-B14F-4D97-AF65-F5344CB8AC3E}">
-        <p14:creationId xmlns:p14="http://schemas.microsoft.com/office/powerpoint/2010/main" val="2654290569"/>
-      </p:ext>
-    </p:extLst>
   </p:cSld>
   <p:clrMapOvr>
     <a:masterClrMapping/>
@@ -5989,13 +5188,7 @@
       </p:grpSpPr>
       <p:sp>
         <p:nvSpPr>
-          <p:cNvPr id="2" name="Date Placeholder 1">
-            <a:extLst>
-              <a:ext uri="{FF2B5EF4-FFF2-40B4-BE49-F238E27FC236}">
-                <a16:creationId xmlns:a16="http://schemas.microsoft.com/office/drawing/2014/main" id="{D8A8A2BD-86AB-022B-0471-10E419A4AC32}"/>
-              </a:ext>
-            </a:extLst>
-          </p:cNvPr>
+          <p:cNvPr id="2" name="Date Placeholder 1"/>
           <p:cNvSpPr>
             <a:spLocks noGrp="1"/>
           </p:cNvSpPr>
@@ -6010,7 +5203,7 @@
           <a:p>
             <a:fld id="{4FCF3042-9457-4066-8C5E-A728C46299CF}" type="datetimeFigureOut">
               <a:rPr lang="en-IN" smtClean="0"/>
-              <a:t>24-09-2026</a:t>
+              <a:t>29-10-2026</a:t>
             </a:fld>
             <a:endParaRPr lang="en-IN"/>
           </a:p>
@@ -6018,13 +5211,7 @@
       </p:sp>
       <p:sp>
         <p:nvSpPr>
-          <p:cNvPr id="3" name="Footer Placeholder 2">
-            <a:extLst>
-              <a:ext uri="{FF2B5EF4-FFF2-40B4-BE49-F238E27FC236}">
-                <a16:creationId xmlns:a16="http://schemas.microsoft.com/office/drawing/2014/main" id="{BE1AE599-C3F5-0A87-1BDF-0A00F4F96D45}"/>
-              </a:ext>
-            </a:extLst>
-          </p:cNvPr>
+          <p:cNvPr id="3" name="Footer Placeholder 2"/>
           <p:cNvSpPr>
             <a:spLocks noGrp="1"/>
           </p:cNvSpPr>
@@ -6043,13 +5230,7 @@
       </p:sp>
       <p:sp>
         <p:nvSpPr>
-          <p:cNvPr id="4" name="Slide Number Placeholder 3">
-            <a:extLst>
-              <a:ext uri="{FF2B5EF4-FFF2-40B4-BE49-F238E27FC236}">
-                <a16:creationId xmlns:a16="http://schemas.microsoft.com/office/drawing/2014/main" id="{2868FB37-60C0-EFA6-A8F7-0FE9F3C70513}"/>
-              </a:ext>
-            </a:extLst>
-          </p:cNvPr>
+          <p:cNvPr id="4" name="Slide Number Placeholder 3"/>
           <p:cNvSpPr>
             <a:spLocks noGrp="1"/>
           </p:cNvSpPr>
@@ -6071,11 +5252,6 @@
         </p:txBody>
       </p:sp>
     </p:spTree>
-    <p:extLst>
-      <p:ext uri="{BB962C8B-B14F-4D97-AF65-F5344CB8AC3E}">
-        <p14:creationId xmlns:p14="http://schemas.microsoft.com/office/powerpoint/2010/main" val="3208479457"/>
-      </p:ext>
-    </p:extLst>
   </p:cSld>
   <p:clrMapOvr>
     <a:masterClrMapping/>
@@ -6102,13 +5278,7 @@
       </p:grpSpPr>
       <p:sp>
         <p:nvSpPr>
-          <p:cNvPr id="2" name="Title 1">
-            <a:extLst>
-              <a:ext uri="{FF2B5EF4-FFF2-40B4-BE49-F238E27FC236}">
-                <a16:creationId xmlns:a16="http://schemas.microsoft.com/office/drawing/2014/main" id="{0D731EE1-438F-6B19-E833-B0AABFA3D779}"/>
-              </a:ext>
-            </a:extLst>
-          </p:cNvPr>
+          <p:cNvPr id="2" name="Title 1"/>
           <p:cNvSpPr>
             <a:spLocks noGrp="1"/>
           </p:cNvSpPr>
@@ -6140,13 +5310,7 @@
       </p:sp>
       <p:sp>
         <p:nvSpPr>
-          <p:cNvPr id="3" name="Text Placeholder 2">
-            <a:extLst>
-              <a:ext uri="{FF2B5EF4-FFF2-40B4-BE49-F238E27FC236}">
-                <a16:creationId xmlns:a16="http://schemas.microsoft.com/office/drawing/2014/main" id="{366086E3-B9A4-8ECE-6979-FA4F575AA9E4}"/>
-              </a:ext>
-            </a:extLst>
-          </p:cNvPr>
+          <p:cNvPr id="3" name="Text Placeholder 2"/>
           <p:cNvSpPr>
             <a:spLocks noGrp="1"/>
           </p:cNvSpPr>
@@ -6265,13 +5429,7 @@
       </p:sp>
       <p:sp>
         <p:nvSpPr>
-          <p:cNvPr id="4" name="Date Placeholder 3">
-            <a:extLst>
-              <a:ext uri="{FF2B5EF4-FFF2-40B4-BE49-F238E27FC236}">
-                <a16:creationId xmlns:a16="http://schemas.microsoft.com/office/drawing/2014/main" id="{BD02C63F-668F-F11D-D4E9-8FF555F107BD}"/>
-              </a:ext>
-            </a:extLst>
-          </p:cNvPr>
+          <p:cNvPr id="4" name="Date Placeholder 3"/>
           <p:cNvSpPr>
             <a:spLocks noGrp="1"/>
           </p:cNvSpPr>
@@ -6286,7 +5444,7 @@
           <a:p>
             <a:fld id="{9DBD89FD-1150-4979-9614-9DD9EB69C9AA}" type="datetimeFigureOut">
               <a:rPr lang="en-IN" smtClean="0"/>
-              <a:t>24-09-2026</a:t>
+              <a:t>29-10-2026</a:t>
             </a:fld>
             <a:endParaRPr lang="en-IN"/>
           </a:p>
@@ -6294,13 +5452,7 @@
       </p:sp>
       <p:sp>
         <p:nvSpPr>
-          <p:cNvPr id="5" name="Footer Placeholder 4">
-            <a:extLst>
-              <a:ext uri="{FF2B5EF4-FFF2-40B4-BE49-F238E27FC236}">
-                <a16:creationId xmlns:a16="http://schemas.microsoft.com/office/drawing/2014/main" id="{19B8B1E7-9509-C949-3D6D-07B2A6C5B5E8}"/>
-              </a:ext>
-            </a:extLst>
-          </p:cNvPr>
+          <p:cNvPr id="5" name="Footer Placeholder 4"/>
           <p:cNvSpPr>
             <a:spLocks noGrp="1"/>
           </p:cNvSpPr>
@@ -6319,13 +5471,7 @@
       </p:sp>
       <p:sp>
         <p:nvSpPr>
-          <p:cNvPr id="6" name="Slide Number Placeholder 5">
-            <a:extLst>
-              <a:ext uri="{FF2B5EF4-FFF2-40B4-BE49-F238E27FC236}">
-                <a16:creationId xmlns:a16="http://schemas.microsoft.com/office/drawing/2014/main" id="{0D1C8284-31CD-BD88-D5A6-B3C27D6C3493}"/>
-              </a:ext>
-            </a:extLst>
-          </p:cNvPr>
+          <p:cNvPr id="6" name="Slide Number Placeholder 5"/>
           <p:cNvSpPr>
             <a:spLocks noGrp="1"/>
           </p:cNvSpPr>
@@ -6347,11 +5493,6 @@
         </p:txBody>
       </p:sp>
     </p:spTree>
-    <p:extLst>
-      <p:ext uri="{BB962C8B-B14F-4D97-AF65-F5344CB8AC3E}">
-        <p14:creationId xmlns:p14="http://schemas.microsoft.com/office/powerpoint/2010/main" val="344471727"/>
-      </p:ext>
-    </p:extLst>
   </p:cSld>
   <p:clrMapOvr>
     <a:masterClrMapping/>
@@ -6378,13 +5519,7 @@
       </p:grpSpPr>
       <p:sp>
         <p:nvSpPr>
-          <p:cNvPr id="2" name="Title 1">
-            <a:extLst>
-              <a:ext uri="{FF2B5EF4-FFF2-40B4-BE49-F238E27FC236}">
-                <a16:creationId xmlns:a16="http://schemas.microsoft.com/office/drawing/2014/main" id="{12025D5A-EDD9-B428-5145-1CFA01D665A5}"/>
-              </a:ext>
-            </a:extLst>
-          </p:cNvPr>
+          <p:cNvPr id="2" name="Title 1"/>
           <p:cNvSpPr>
             <a:spLocks noGrp="1"/>
           </p:cNvSpPr>
@@ -6419,13 +5554,7 @@
       </p:sp>
       <p:sp>
         <p:nvSpPr>
-          <p:cNvPr id="3" name="Content Placeholder 2">
-            <a:extLst>
-              <a:ext uri="{FF2B5EF4-FFF2-40B4-BE49-F238E27FC236}">
-                <a16:creationId xmlns:a16="http://schemas.microsoft.com/office/drawing/2014/main" id="{FA82E5E3-23C5-C25E-7E1D-CE259CC58CD0}"/>
-              </a:ext>
-            </a:extLst>
-          </p:cNvPr>
+          <p:cNvPr id="3" name="Content Placeholder 2"/>
           <p:cNvSpPr>
             <a:spLocks noGrp="1"/>
           </p:cNvSpPr>
@@ -6510,13 +5639,7 @@
       </p:sp>
       <p:sp>
         <p:nvSpPr>
-          <p:cNvPr id="4" name="Text Placeholder 3">
-            <a:extLst>
-              <a:ext uri="{FF2B5EF4-FFF2-40B4-BE49-F238E27FC236}">
-                <a16:creationId xmlns:a16="http://schemas.microsoft.com/office/drawing/2014/main" id="{520BE691-C863-C931-7917-C7369D60A68E}"/>
-              </a:ext>
-            </a:extLst>
-          </p:cNvPr>
+          <p:cNvPr id="4" name="Text Placeholder 3"/>
           <p:cNvSpPr>
             <a:spLocks noGrp="1"/>
           </p:cNvSpPr>
@@ -6581,13 +5704,7 @@
       </p:sp>
       <p:sp>
         <p:nvSpPr>
-          <p:cNvPr id="5" name="Date Placeholder 4">
-            <a:extLst>
-              <a:ext uri="{FF2B5EF4-FFF2-40B4-BE49-F238E27FC236}">
-                <a16:creationId xmlns:a16="http://schemas.microsoft.com/office/drawing/2014/main" id="{24D84DAA-FACE-0D9B-6D5D-8493AAAD6A76}"/>
-              </a:ext>
-            </a:extLst>
-          </p:cNvPr>
+          <p:cNvPr id="5" name="Date Placeholder 4"/>
           <p:cNvSpPr>
             <a:spLocks noGrp="1"/>
           </p:cNvSpPr>
@@ -6602,7 +5719,7 @@
           <a:p>
             <a:fld id="{4FCF3042-9457-4066-8C5E-A728C46299CF}" type="datetimeFigureOut">
               <a:rPr lang="en-IN" smtClean="0"/>
-              <a:t>24-09-2026</a:t>
+              <a:t>29-10-2026</a:t>
             </a:fld>
             <a:endParaRPr lang="en-IN"/>
           </a:p>
@@ -6610,13 +5727,7 @@
       </p:sp>
       <p:sp>
         <p:nvSpPr>
-          <p:cNvPr id="6" name="Footer Placeholder 5">
-            <a:extLst>
-              <a:ext uri="{FF2B5EF4-FFF2-40B4-BE49-F238E27FC236}">
-                <a16:creationId xmlns:a16="http://schemas.microsoft.com/office/drawing/2014/main" id="{A4A0A0E5-937D-F99C-BEE5-92B1D193ECF9}"/>
-              </a:ext>
-            </a:extLst>
-          </p:cNvPr>
+          <p:cNvPr id="6" name="Footer Placeholder 5"/>
           <p:cNvSpPr>
             <a:spLocks noGrp="1"/>
           </p:cNvSpPr>
@@ -6635,13 +5746,7 @@
       </p:sp>
       <p:sp>
         <p:nvSpPr>
-          <p:cNvPr id="7" name="Slide Number Placeholder 6">
-            <a:extLst>
-              <a:ext uri="{FF2B5EF4-FFF2-40B4-BE49-F238E27FC236}">
-                <a16:creationId xmlns:a16="http://schemas.microsoft.com/office/drawing/2014/main" id="{F8A2A5B6-8257-EB0A-DB50-6DA887DBAF0C}"/>
-              </a:ext>
-            </a:extLst>
-          </p:cNvPr>
+          <p:cNvPr id="7" name="Slide Number Placeholder 6"/>
           <p:cNvSpPr>
             <a:spLocks noGrp="1"/>
           </p:cNvSpPr>
@@ -6663,11 +5768,6 @@
         </p:txBody>
       </p:sp>
     </p:spTree>
-    <p:extLst>
-      <p:ext uri="{BB962C8B-B14F-4D97-AF65-F5344CB8AC3E}">
-        <p14:creationId xmlns:p14="http://schemas.microsoft.com/office/powerpoint/2010/main" val="2017567441"/>
-      </p:ext>
-    </p:extLst>
   </p:cSld>
   <p:clrMapOvr>
     <a:masterClrMapping/>
@@ -6694,13 +5794,7 @@
       </p:grpSpPr>
       <p:sp>
         <p:nvSpPr>
-          <p:cNvPr id="2" name="Title 1">
-            <a:extLst>
-              <a:ext uri="{FF2B5EF4-FFF2-40B4-BE49-F238E27FC236}">
-                <a16:creationId xmlns:a16="http://schemas.microsoft.com/office/drawing/2014/main" id="{2649BC89-9E28-F64D-235D-01C064FAB959}"/>
-              </a:ext>
-            </a:extLst>
-          </p:cNvPr>
+          <p:cNvPr id="2" name="Title 1"/>
           <p:cNvSpPr>
             <a:spLocks noGrp="1"/>
           </p:cNvSpPr>
@@ -6735,13 +5829,7 @@
       </p:sp>
       <p:sp>
         <p:nvSpPr>
-          <p:cNvPr id="3" name="Picture Placeholder 2">
-            <a:extLst>
-              <a:ext uri="{FF2B5EF4-FFF2-40B4-BE49-F238E27FC236}">
-                <a16:creationId xmlns:a16="http://schemas.microsoft.com/office/drawing/2014/main" id="{89391578-F9AF-3032-C137-CA4AEA5E27CE}"/>
-              </a:ext>
-            </a:extLst>
-          </p:cNvPr>
+          <p:cNvPr id="3" name="Picture Placeholder 2"/>
           <p:cNvSpPr>
             <a:spLocks noGrp="1"/>
           </p:cNvSpPr>
@@ -6802,13 +5890,7 @@
       </p:sp>
       <p:sp>
         <p:nvSpPr>
-          <p:cNvPr id="4" name="Text Placeholder 3">
-            <a:extLst>
-              <a:ext uri="{FF2B5EF4-FFF2-40B4-BE49-F238E27FC236}">
-                <a16:creationId xmlns:a16="http://schemas.microsoft.com/office/drawing/2014/main" id="{88FDC878-E222-0A6A-CC8C-BD85FB1E37F9}"/>
-              </a:ext>
-            </a:extLst>
-          </p:cNvPr>
+          <p:cNvPr id="4" name="Text Placeholder 3"/>
           <p:cNvSpPr>
             <a:spLocks noGrp="1"/>
           </p:cNvSpPr>
@@ -6873,13 +5955,7 @@
       </p:sp>
       <p:sp>
         <p:nvSpPr>
-          <p:cNvPr id="5" name="Date Placeholder 4">
-            <a:extLst>
-              <a:ext uri="{FF2B5EF4-FFF2-40B4-BE49-F238E27FC236}">
-                <a16:creationId xmlns:a16="http://schemas.microsoft.com/office/drawing/2014/main" id="{FCC0F4CC-59C2-58F9-6DDF-C7CC3C54AC55}"/>
-              </a:ext>
-            </a:extLst>
-          </p:cNvPr>
+          <p:cNvPr id="5" name="Date Placeholder 4"/>
           <p:cNvSpPr>
             <a:spLocks noGrp="1"/>
           </p:cNvSpPr>
@@ -6894,7 +5970,7 @@
           <a:p>
             <a:fld id="{4FCF3042-9457-4066-8C5E-A728C46299CF}" type="datetimeFigureOut">
               <a:rPr lang="en-IN" smtClean="0"/>
-              <a:t>24-09-2026</a:t>
+              <a:t>29-10-2026</a:t>
             </a:fld>
             <a:endParaRPr lang="en-IN"/>
           </a:p>
@@ -6902,13 +5978,7 @@
       </p:sp>
       <p:sp>
         <p:nvSpPr>
-          <p:cNvPr id="6" name="Footer Placeholder 5">
-            <a:extLst>
-              <a:ext uri="{FF2B5EF4-FFF2-40B4-BE49-F238E27FC236}">
-                <a16:creationId xmlns:a16="http://schemas.microsoft.com/office/drawing/2014/main" id="{FA56E46E-A612-8C9F-02A3-D9FD58B2537A}"/>
-              </a:ext>
-            </a:extLst>
-          </p:cNvPr>
+          <p:cNvPr id="6" name="Footer Placeholder 5"/>
           <p:cNvSpPr>
             <a:spLocks noGrp="1"/>
           </p:cNvSpPr>
@@ -6927,13 +5997,7 @@
       </p:sp>
       <p:sp>
         <p:nvSpPr>
-          <p:cNvPr id="7" name="Slide Number Placeholder 6">
-            <a:extLst>
-              <a:ext uri="{FF2B5EF4-FFF2-40B4-BE49-F238E27FC236}">
-                <a16:creationId xmlns:a16="http://schemas.microsoft.com/office/drawing/2014/main" id="{87FA379D-7644-7796-AB55-8757BB81AE7D}"/>
-              </a:ext>
-            </a:extLst>
-          </p:cNvPr>
+          <p:cNvPr id="7" name="Slide Number Placeholder 6"/>
           <p:cNvSpPr>
             <a:spLocks noGrp="1"/>
           </p:cNvSpPr>
@@ -6955,11 +6019,6 @@
         </p:txBody>
       </p:sp>
     </p:spTree>
-    <p:extLst>
-      <p:ext uri="{BB962C8B-B14F-4D97-AF65-F5344CB8AC3E}">
-        <p14:creationId xmlns:p14="http://schemas.microsoft.com/office/powerpoint/2010/main" val="2686051836"/>
-      </p:ext>
-    </p:extLst>
   </p:cSld>
   <p:clrMapOvr>
     <a:masterClrMapping/>
@@ -6986,13 +6045,7 @@
       </p:grpSpPr>
       <p:sp>
         <p:nvSpPr>
-          <p:cNvPr id="2" name="Title 1">
-            <a:extLst>
-              <a:ext uri="{FF2B5EF4-FFF2-40B4-BE49-F238E27FC236}">
-                <a16:creationId xmlns:a16="http://schemas.microsoft.com/office/drawing/2014/main" id="{58590A78-5875-0061-40F7-D4E41FF03C95}"/>
-              </a:ext>
-            </a:extLst>
-          </p:cNvPr>
+          <p:cNvPr id="2" name="Title 1"/>
           <p:cNvSpPr>
             <a:spLocks noGrp="1"/>
           </p:cNvSpPr>
@@ -7023,13 +6076,7 @@
       </p:sp>
       <p:sp>
         <p:nvSpPr>
-          <p:cNvPr id="3" name="Vertical Text Placeholder 2">
-            <a:extLst>
-              <a:ext uri="{FF2B5EF4-FFF2-40B4-BE49-F238E27FC236}">
-                <a16:creationId xmlns:a16="http://schemas.microsoft.com/office/drawing/2014/main" id="{D83D6357-7A68-125E-F1BB-A84478849547}"/>
-              </a:ext>
-            </a:extLst>
-          </p:cNvPr>
+          <p:cNvPr id="3" name="Vertical Text Placeholder 2"/>
           <p:cNvSpPr>
             <a:spLocks noGrp="1"/>
           </p:cNvSpPr>
@@ -7081,13 +6128,7 @@
       </p:sp>
       <p:sp>
         <p:nvSpPr>
-          <p:cNvPr id="4" name="Date Placeholder 3">
-            <a:extLst>
-              <a:ext uri="{FF2B5EF4-FFF2-40B4-BE49-F238E27FC236}">
-                <a16:creationId xmlns:a16="http://schemas.microsoft.com/office/drawing/2014/main" id="{C5C09C4D-FB71-8B9C-090B-C5783F9DEAB5}"/>
-              </a:ext>
-            </a:extLst>
-          </p:cNvPr>
+          <p:cNvPr id="4" name="Date Placeholder 3"/>
           <p:cNvSpPr>
             <a:spLocks noGrp="1"/>
           </p:cNvSpPr>
@@ -7102,7 +6143,7 @@
           <a:p>
             <a:fld id="{4FCF3042-9457-4066-8C5E-A728C46299CF}" type="datetimeFigureOut">
               <a:rPr lang="en-IN" smtClean="0"/>
-              <a:t>24-09-2026</a:t>
+              <a:t>29-10-2026</a:t>
             </a:fld>
             <a:endParaRPr lang="en-IN"/>
           </a:p>
@@ -7110,13 +6151,7 @@
       </p:sp>
       <p:sp>
         <p:nvSpPr>
-          <p:cNvPr id="5" name="Footer Placeholder 4">
-            <a:extLst>
-              <a:ext uri="{FF2B5EF4-FFF2-40B4-BE49-F238E27FC236}">
-                <a16:creationId xmlns:a16="http://schemas.microsoft.com/office/drawing/2014/main" id="{EF226D23-9858-0ECB-6B80-E383570168DB}"/>
-              </a:ext>
-            </a:extLst>
-          </p:cNvPr>
+          <p:cNvPr id="5" name="Footer Placeholder 4"/>
           <p:cNvSpPr>
             <a:spLocks noGrp="1"/>
           </p:cNvSpPr>
@@ -7135,13 +6170,7 @@
       </p:sp>
       <p:sp>
         <p:nvSpPr>
-          <p:cNvPr id="6" name="Slide Number Placeholder 5">
-            <a:extLst>
-              <a:ext uri="{FF2B5EF4-FFF2-40B4-BE49-F238E27FC236}">
-                <a16:creationId xmlns:a16="http://schemas.microsoft.com/office/drawing/2014/main" id="{84146D52-1972-9CF4-90D4-7EAAE15673D6}"/>
-              </a:ext>
-            </a:extLst>
-          </p:cNvPr>
+          <p:cNvPr id="6" name="Slide Number Placeholder 5"/>
           <p:cNvSpPr>
             <a:spLocks noGrp="1"/>
           </p:cNvSpPr>
@@ -7163,11 +6192,6 @@
         </p:txBody>
       </p:sp>
     </p:spTree>
-    <p:extLst>
-      <p:ext uri="{BB962C8B-B14F-4D97-AF65-F5344CB8AC3E}">
-        <p14:creationId xmlns:p14="http://schemas.microsoft.com/office/powerpoint/2010/main" val="3886582633"/>
-      </p:ext>
-    </p:extLst>
   </p:cSld>
   <p:clrMapOvr>
     <a:masterClrMapping/>
@@ -7194,13 +6218,7 @@
       </p:grpSpPr>
       <p:sp>
         <p:nvSpPr>
-          <p:cNvPr id="2" name="Vertical Title 1">
-            <a:extLst>
-              <a:ext uri="{FF2B5EF4-FFF2-40B4-BE49-F238E27FC236}">
-                <a16:creationId xmlns:a16="http://schemas.microsoft.com/office/drawing/2014/main" id="{80EC00B9-AC54-17A0-9131-1DBCAC91AD84}"/>
-              </a:ext>
-            </a:extLst>
-          </p:cNvPr>
+          <p:cNvPr id="2" name="Vertical Title 1"/>
           <p:cNvSpPr>
             <a:spLocks noGrp="1"/>
           </p:cNvSpPr>
@@ -7231,13 +6249,7 @@
       </p:sp>
       <p:sp>
         <p:nvSpPr>
-          <p:cNvPr id="3" name="Vertical Text Placeholder 2">
-            <a:extLst>
-              <a:ext uri="{FF2B5EF4-FFF2-40B4-BE49-F238E27FC236}">
-                <a16:creationId xmlns:a16="http://schemas.microsoft.com/office/drawing/2014/main" id="{EF8226FF-F990-51BE-8511-27FEDD3947AF}"/>
-              </a:ext>
-            </a:extLst>
-          </p:cNvPr>
+          <p:cNvPr id="3" name="Vertical Text Placeholder 2"/>
           <p:cNvSpPr>
             <a:spLocks noGrp="1"/>
           </p:cNvSpPr>
@@ -7294,13 +6306,7 @@
       </p:sp>
       <p:sp>
         <p:nvSpPr>
-          <p:cNvPr id="4" name="Date Placeholder 3">
-            <a:extLst>
-              <a:ext uri="{FF2B5EF4-FFF2-40B4-BE49-F238E27FC236}">
-                <a16:creationId xmlns:a16="http://schemas.microsoft.com/office/drawing/2014/main" id="{20C5C954-72E3-C9B3-4BB6-39EB7625982E}"/>
-              </a:ext>
-            </a:extLst>
-          </p:cNvPr>
+          <p:cNvPr id="4" name="Date Placeholder 3"/>
           <p:cNvSpPr>
             <a:spLocks noGrp="1"/>
           </p:cNvSpPr>
@@ -7315,7 +6321,7 @@
           <a:p>
             <a:fld id="{4FCF3042-9457-4066-8C5E-A728C46299CF}" type="datetimeFigureOut">
               <a:rPr lang="en-IN" smtClean="0"/>
-              <a:t>24-09-2026</a:t>
+              <a:t>29-10-2026</a:t>
             </a:fld>
             <a:endParaRPr lang="en-IN"/>
           </a:p>
@@ -7323,13 +6329,7 @@
       </p:sp>
       <p:sp>
         <p:nvSpPr>
-          <p:cNvPr id="5" name="Footer Placeholder 4">
-            <a:extLst>
-              <a:ext uri="{FF2B5EF4-FFF2-40B4-BE49-F238E27FC236}">
-                <a16:creationId xmlns:a16="http://schemas.microsoft.com/office/drawing/2014/main" id="{73143D11-1971-0E5A-C0D6-692CB5544014}"/>
-              </a:ext>
-            </a:extLst>
-          </p:cNvPr>
+          <p:cNvPr id="5" name="Footer Placeholder 4"/>
           <p:cNvSpPr>
             <a:spLocks noGrp="1"/>
           </p:cNvSpPr>
@@ -7348,13 +6348,7 @@
       </p:sp>
       <p:sp>
         <p:nvSpPr>
-          <p:cNvPr id="6" name="Slide Number Placeholder 5">
-            <a:extLst>
-              <a:ext uri="{FF2B5EF4-FFF2-40B4-BE49-F238E27FC236}">
-                <a16:creationId xmlns:a16="http://schemas.microsoft.com/office/drawing/2014/main" id="{E739AD57-F2AF-2E46-C454-C8E1AF40B439}"/>
-              </a:ext>
-            </a:extLst>
-          </p:cNvPr>
+          <p:cNvPr id="6" name="Slide Number Placeholder 5"/>
           <p:cNvSpPr>
             <a:spLocks noGrp="1"/>
           </p:cNvSpPr>
@@ -7376,11 +6370,6 @@
         </p:txBody>
       </p:sp>
     </p:spTree>
-    <p:extLst>
-      <p:ext uri="{BB962C8B-B14F-4D97-AF65-F5344CB8AC3E}">
-        <p14:creationId xmlns:p14="http://schemas.microsoft.com/office/powerpoint/2010/main" val="2414208651"/>
-      </p:ext>
-    </p:extLst>
   </p:cSld>
   <p:clrMapOvr>
     <a:masterClrMapping/>
@@ -7519,7 +6508,7 @@
           <a:p>
             <a:fld id="{D75449C2-1BC0-4712-B87F-A46355E94878}" type="datetimeFigureOut">
               <a:rPr lang="en-IN" smtClean="0"/>
-              <a:t>24-09-2026</a:t>
+              <a:t>29-10-2026</a:t>
             </a:fld>
             <a:endParaRPr lang="en-IN"/>
           </a:p>
@@ -7568,11 +6557,6 @@
         </p:txBody>
       </p:sp>
     </p:spTree>
-    <p:extLst>
-      <p:ext uri="{BB962C8B-B14F-4D97-AF65-F5344CB8AC3E}">
-        <p14:creationId xmlns:p14="http://schemas.microsoft.com/office/powerpoint/2010/main" val="3591431364"/>
-      </p:ext>
-    </p:extLst>
   </p:cSld>
   <p:clrMapOvr>
     <a:masterClrMapping/>
@@ -7689,7 +6673,7 @@
           <a:p>
             <a:fld id="{D75449C2-1BC0-4712-B87F-A46355E94878}" type="datetimeFigureOut">
               <a:rPr lang="en-IN" smtClean="0"/>
-              <a:t>24-09-2026</a:t>
+              <a:t>29-10-2026</a:t>
             </a:fld>
             <a:endParaRPr lang="en-IN"/>
           </a:p>
@@ -7738,11 +6722,6 @@
         </p:txBody>
       </p:sp>
     </p:spTree>
-    <p:extLst>
-      <p:ext uri="{BB962C8B-B14F-4D97-AF65-F5344CB8AC3E}">
-        <p14:creationId xmlns:p14="http://schemas.microsoft.com/office/powerpoint/2010/main" val="232207313"/>
-      </p:ext>
-    </p:extLst>
   </p:cSld>
   <p:clrMapOvr>
     <a:masterClrMapping/>
@@ -7935,7 +6914,7 @@
           <a:p>
             <a:fld id="{D75449C2-1BC0-4712-B87F-A46355E94878}" type="datetimeFigureOut">
               <a:rPr lang="en-IN" smtClean="0"/>
-              <a:t>24-09-2026</a:t>
+              <a:t>29-10-2026</a:t>
             </a:fld>
             <a:endParaRPr lang="en-IN"/>
           </a:p>
@@ -7984,11 +6963,6 @@
         </p:txBody>
       </p:sp>
     </p:spTree>
-    <p:extLst>
-      <p:ext uri="{BB962C8B-B14F-4D97-AF65-F5344CB8AC3E}">
-        <p14:creationId xmlns:p14="http://schemas.microsoft.com/office/powerpoint/2010/main" val="3918118332"/>
-      </p:ext>
-    </p:extLst>
   </p:cSld>
   <p:clrMapOvr>
     <a:masterClrMapping/>
@@ -8167,7 +7141,7 @@
           <a:p>
             <a:fld id="{D75449C2-1BC0-4712-B87F-A46355E94878}" type="datetimeFigureOut">
               <a:rPr lang="en-IN" smtClean="0"/>
-              <a:t>24-09-2026</a:t>
+              <a:t>29-10-2026</a:t>
             </a:fld>
             <a:endParaRPr lang="en-IN"/>
           </a:p>
@@ -8216,11 +7190,6 @@
         </p:txBody>
       </p:sp>
     </p:spTree>
-    <p:extLst>
-      <p:ext uri="{BB962C8B-B14F-4D97-AF65-F5344CB8AC3E}">
-        <p14:creationId xmlns:p14="http://schemas.microsoft.com/office/powerpoint/2010/main" val="610727601"/>
-      </p:ext>
-    </p:extLst>
   </p:cSld>
   <p:clrMapOvr>
     <a:masterClrMapping/>
@@ -8534,7 +7503,7 @@
           <a:p>
             <a:fld id="{D75449C2-1BC0-4712-B87F-A46355E94878}" type="datetimeFigureOut">
               <a:rPr lang="en-IN" smtClean="0"/>
-              <a:t>24-09-2026</a:t>
+              <a:t>29-10-2026</a:t>
             </a:fld>
             <a:endParaRPr lang="en-IN"/>
           </a:p>
@@ -8583,11 +7552,6 @@
         </p:txBody>
       </p:sp>
     </p:spTree>
-    <p:extLst>
-      <p:ext uri="{BB962C8B-B14F-4D97-AF65-F5344CB8AC3E}">
-        <p14:creationId xmlns:p14="http://schemas.microsoft.com/office/powerpoint/2010/main" val="3338509285"/>
-      </p:ext>
-    </p:extLst>
   </p:cSld>
   <p:clrMapOvr>
     <a:masterClrMapping/>
@@ -8652,7 +7616,7 @@
           <a:p>
             <a:fld id="{D75449C2-1BC0-4712-B87F-A46355E94878}" type="datetimeFigureOut">
               <a:rPr lang="en-IN" smtClean="0"/>
-              <a:t>24-09-2026</a:t>
+              <a:t>29-10-2026</a:t>
             </a:fld>
             <a:endParaRPr lang="en-IN"/>
           </a:p>
@@ -8701,11 +7665,6 @@
         </p:txBody>
       </p:sp>
     </p:spTree>
-    <p:extLst>
-      <p:ext uri="{BB962C8B-B14F-4D97-AF65-F5344CB8AC3E}">
-        <p14:creationId xmlns:p14="http://schemas.microsoft.com/office/powerpoint/2010/main" val="4235643605"/>
-      </p:ext>
-    </p:extLst>
   </p:cSld>
   <p:clrMapOvr>
     <a:masterClrMapping/>
@@ -8732,13 +7691,7 @@
       </p:grpSpPr>
       <p:sp>
         <p:nvSpPr>
-          <p:cNvPr id="2" name="Title 1">
-            <a:extLst>
-              <a:ext uri="{FF2B5EF4-FFF2-40B4-BE49-F238E27FC236}">
-                <a16:creationId xmlns:a16="http://schemas.microsoft.com/office/drawing/2014/main" id="{0167EFB4-D658-6814-F065-5E9C6419AE2A}"/>
-              </a:ext>
-            </a:extLst>
-          </p:cNvPr>
+          <p:cNvPr id="2" name="Title 1"/>
           <p:cNvSpPr>
             <a:spLocks noGrp="1"/>
           </p:cNvSpPr>
@@ -8761,13 +7714,7 @@
       </p:sp>
       <p:sp>
         <p:nvSpPr>
-          <p:cNvPr id="3" name="Content Placeholder 2">
-            <a:extLst>
-              <a:ext uri="{FF2B5EF4-FFF2-40B4-BE49-F238E27FC236}">
-                <a16:creationId xmlns:a16="http://schemas.microsoft.com/office/drawing/2014/main" id="{D7216235-C3A8-F060-30C7-0FFDD2CBC328}"/>
-              </a:ext>
-            </a:extLst>
-          </p:cNvPr>
+          <p:cNvPr id="3" name="Content Placeholder 2"/>
           <p:cNvSpPr>
             <a:spLocks noGrp="1"/>
           </p:cNvSpPr>
@@ -8824,13 +7771,7 @@
       </p:sp>
       <p:sp>
         <p:nvSpPr>
-          <p:cNvPr id="4" name="Content Placeholder 3">
-            <a:extLst>
-              <a:ext uri="{FF2B5EF4-FFF2-40B4-BE49-F238E27FC236}">
-                <a16:creationId xmlns:a16="http://schemas.microsoft.com/office/drawing/2014/main" id="{4DD1B408-6CEC-1F37-36CA-5765C1E2781B}"/>
-              </a:ext>
-            </a:extLst>
-          </p:cNvPr>
+          <p:cNvPr id="4" name="Content Placeholder 3"/>
           <p:cNvSpPr>
             <a:spLocks noGrp="1"/>
           </p:cNvSpPr>
@@ -8887,13 +7828,7 @@
       </p:sp>
       <p:sp>
         <p:nvSpPr>
-          <p:cNvPr id="5" name="Date Placeholder 4">
-            <a:extLst>
-              <a:ext uri="{FF2B5EF4-FFF2-40B4-BE49-F238E27FC236}">
-                <a16:creationId xmlns:a16="http://schemas.microsoft.com/office/drawing/2014/main" id="{A432379E-606B-C181-DA9D-53E859FD2062}"/>
-              </a:ext>
-            </a:extLst>
-          </p:cNvPr>
+          <p:cNvPr id="5" name="Date Placeholder 4"/>
           <p:cNvSpPr>
             <a:spLocks noGrp="1"/>
           </p:cNvSpPr>
@@ -8908,7 +7843,7 @@
           <a:p>
             <a:fld id="{9DBD89FD-1150-4979-9614-9DD9EB69C9AA}" type="datetimeFigureOut">
               <a:rPr lang="en-IN" smtClean="0"/>
-              <a:t>24-09-2026</a:t>
+              <a:t>29-10-2026</a:t>
             </a:fld>
             <a:endParaRPr lang="en-IN"/>
           </a:p>
@@ -8916,13 +7851,7 @@
       </p:sp>
       <p:sp>
         <p:nvSpPr>
-          <p:cNvPr id="6" name="Footer Placeholder 5">
-            <a:extLst>
-              <a:ext uri="{FF2B5EF4-FFF2-40B4-BE49-F238E27FC236}">
-                <a16:creationId xmlns:a16="http://schemas.microsoft.com/office/drawing/2014/main" id="{1DE78BF4-0F10-5E48-1C57-4766C37BA541}"/>
-              </a:ext>
-            </a:extLst>
-          </p:cNvPr>
+          <p:cNvPr id="6" name="Footer Placeholder 5"/>
           <p:cNvSpPr>
             <a:spLocks noGrp="1"/>
           </p:cNvSpPr>
@@ -8941,13 +7870,7 @@
       </p:sp>
       <p:sp>
         <p:nvSpPr>
-          <p:cNvPr id="7" name="Slide Number Placeholder 6">
-            <a:extLst>
-              <a:ext uri="{FF2B5EF4-FFF2-40B4-BE49-F238E27FC236}">
-                <a16:creationId xmlns:a16="http://schemas.microsoft.com/office/drawing/2014/main" id="{29925577-7D15-A784-D602-C2EF5F4BECAC}"/>
-              </a:ext>
-            </a:extLst>
-          </p:cNvPr>
+          <p:cNvPr id="7" name="Slide Number Placeholder 6"/>
           <p:cNvSpPr>
             <a:spLocks noGrp="1"/>
           </p:cNvSpPr>
@@ -8969,11 +7892,6 @@
         </p:txBody>
       </p:sp>
     </p:spTree>
-    <p:extLst>
-      <p:ext uri="{BB962C8B-B14F-4D97-AF65-F5344CB8AC3E}">
-        <p14:creationId xmlns:p14="http://schemas.microsoft.com/office/powerpoint/2010/main" val="3584232679"/>
-      </p:ext>
-    </p:extLst>
   </p:cSld>
   <p:clrMapOvr>
     <a:masterClrMapping/>
@@ -9015,7 +7933,7 @@
           <a:p>
             <a:fld id="{D75449C2-1BC0-4712-B87F-A46355E94878}" type="datetimeFigureOut">
               <a:rPr lang="en-IN" smtClean="0"/>
-              <a:t>24-09-2026</a:t>
+              <a:t>29-10-2026</a:t>
             </a:fld>
             <a:endParaRPr lang="en-IN"/>
           </a:p>
@@ -9064,11 +7982,6 @@
         </p:txBody>
       </p:sp>
     </p:spTree>
-    <p:extLst>
-      <p:ext uri="{BB962C8B-B14F-4D97-AF65-F5344CB8AC3E}">
-        <p14:creationId xmlns:p14="http://schemas.microsoft.com/office/powerpoint/2010/main" val="4190733249"/>
-      </p:ext>
-    </p:extLst>
   </p:cSld>
   <p:clrMapOvr>
     <a:masterClrMapping/>
@@ -9292,7 +8205,7 @@
           <a:p>
             <a:fld id="{C764DE79-268F-4C1A-8933-263129D2AF90}" type="datetimeFigureOut">
               <a:rPr lang="en-US" smtClean="0"/>
-              <a:t>9/24/2026</a:t>
+              <a:t>10/29/2026</a:t>
             </a:fld>
             <a:endParaRPr lang="en-US" dirty="0"/>
           </a:p>
@@ -9341,11 +8254,6 @@
         </p:txBody>
       </p:sp>
     </p:spTree>
-    <p:extLst>
-      <p:ext uri="{BB962C8B-B14F-4D97-AF65-F5344CB8AC3E}">
-        <p14:creationId xmlns:p14="http://schemas.microsoft.com/office/powerpoint/2010/main" val="3886911002"/>
-      </p:ext>
-    </p:extLst>
   </p:cSld>
   <p:clrMapOvr>
     <a:masterClrMapping/>
@@ -9549,7 +8457,7 @@
           <a:p>
             <a:fld id="{D75449C2-1BC0-4712-B87F-A46355E94878}" type="datetimeFigureOut">
               <a:rPr lang="en-IN" smtClean="0"/>
-              <a:t>24-09-2026</a:t>
+              <a:t>29-10-2026</a:t>
             </a:fld>
             <a:endParaRPr lang="en-IN"/>
           </a:p>
@@ -9598,11 +8506,6 @@
         </p:txBody>
       </p:sp>
     </p:spTree>
-    <p:extLst>
-      <p:ext uri="{BB962C8B-B14F-4D97-AF65-F5344CB8AC3E}">
-        <p14:creationId xmlns:p14="http://schemas.microsoft.com/office/powerpoint/2010/main" val="1051797868"/>
-      </p:ext>
-    </p:extLst>
   </p:cSld>
   <p:clrMapOvr>
     <a:masterClrMapping/>
@@ -9719,7 +8622,7 @@
           <a:p>
             <a:fld id="{C764DE79-268F-4C1A-8933-263129D2AF90}" type="datetimeFigureOut">
               <a:rPr lang="en-US" smtClean="0"/>
-              <a:t>9/24/2026</a:t>
+              <a:t>10/29/2026</a:t>
             </a:fld>
             <a:endParaRPr lang="en-US" dirty="0"/>
           </a:p>
@@ -9768,11 +8671,6 @@
         </p:txBody>
       </p:sp>
     </p:spTree>
-    <p:extLst>
-      <p:ext uri="{BB962C8B-B14F-4D97-AF65-F5344CB8AC3E}">
-        <p14:creationId xmlns:p14="http://schemas.microsoft.com/office/powerpoint/2010/main" val="2594411304"/>
-      </p:ext>
-    </p:extLst>
   </p:cSld>
   <p:clrMapOvr>
     <a:masterClrMapping/>
@@ -9899,7 +8797,7 @@
           <a:p>
             <a:fld id="{D75449C2-1BC0-4712-B87F-A46355E94878}" type="datetimeFigureOut">
               <a:rPr lang="en-IN" smtClean="0"/>
-              <a:t>24-09-2026</a:t>
+              <a:t>29-10-2026</a:t>
             </a:fld>
             <a:endParaRPr lang="en-IN"/>
           </a:p>
@@ -9948,11 +8846,6 @@
         </p:txBody>
       </p:sp>
     </p:spTree>
-    <p:extLst>
-      <p:ext uri="{BB962C8B-B14F-4D97-AF65-F5344CB8AC3E}">
-        <p14:creationId xmlns:p14="http://schemas.microsoft.com/office/powerpoint/2010/main" val="3429915613"/>
-      </p:ext>
-    </p:extLst>
   </p:cSld>
   <p:clrMapOvr>
     <a:masterClrMapping/>
@@ -9978,11 +8871,6 @@
         </a:xfrm>
       </p:grpSpPr>
     </p:spTree>
-    <p:extLst>
-      <p:ext uri="{BB962C8B-B14F-4D97-AF65-F5344CB8AC3E}">
-        <p14:creationId xmlns:p14="http://schemas.microsoft.com/office/powerpoint/2010/main" val="3503896073"/>
-      </p:ext>
-    </p:extLst>
   </p:cSld>
   <p:clrMapOvr>
     <a:masterClrMapping/>
@@ -10009,13 +8897,7 @@
       </p:grpSpPr>
       <p:sp>
         <p:nvSpPr>
-          <p:cNvPr id="2" name="Title 1">
-            <a:extLst>
-              <a:ext uri="{FF2B5EF4-FFF2-40B4-BE49-F238E27FC236}">
-                <a16:creationId xmlns:a16="http://schemas.microsoft.com/office/drawing/2014/main" id="{3907B010-FF59-0CB7-4087-1CC665E8D7FA}"/>
-              </a:ext>
-            </a:extLst>
-          </p:cNvPr>
+          <p:cNvPr id="2" name="Title 1"/>
           <p:cNvSpPr>
             <a:spLocks noGrp="1"/>
           </p:cNvSpPr>
@@ -10043,13 +8925,7 @@
       </p:sp>
       <p:sp>
         <p:nvSpPr>
-          <p:cNvPr id="3" name="Text Placeholder 2">
-            <a:extLst>
-              <a:ext uri="{FF2B5EF4-FFF2-40B4-BE49-F238E27FC236}">
-                <a16:creationId xmlns:a16="http://schemas.microsoft.com/office/drawing/2014/main" id="{E706A10E-F566-59C7-C794-172B18FFFAD2}"/>
-              </a:ext>
-            </a:extLst>
-          </p:cNvPr>
+          <p:cNvPr id="3" name="Text Placeholder 2"/>
           <p:cNvSpPr>
             <a:spLocks noGrp="1"/>
           </p:cNvSpPr>
@@ -10114,13 +8990,7 @@
       </p:sp>
       <p:sp>
         <p:nvSpPr>
-          <p:cNvPr id="4" name="Content Placeholder 3">
-            <a:extLst>
-              <a:ext uri="{FF2B5EF4-FFF2-40B4-BE49-F238E27FC236}">
-                <a16:creationId xmlns:a16="http://schemas.microsoft.com/office/drawing/2014/main" id="{53DADCB8-B9B3-6FC5-E50D-D7693B0C06F9}"/>
-              </a:ext>
-            </a:extLst>
-          </p:cNvPr>
+          <p:cNvPr id="4" name="Content Placeholder 3"/>
           <p:cNvSpPr>
             <a:spLocks noGrp="1"/>
           </p:cNvSpPr>
@@ -10177,13 +9047,7 @@
       </p:sp>
       <p:sp>
         <p:nvSpPr>
-          <p:cNvPr id="5" name="Text Placeholder 4">
-            <a:extLst>
-              <a:ext uri="{FF2B5EF4-FFF2-40B4-BE49-F238E27FC236}">
-                <a16:creationId xmlns:a16="http://schemas.microsoft.com/office/drawing/2014/main" id="{FB931BBB-5BB6-56F1-B332-0E7C857AD78D}"/>
-              </a:ext>
-            </a:extLst>
-          </p:cNvPr>
+          <p:cNvPr id="5" name="Text Placeholder 4"/>
           <p:cNvSpPr>
             <a:spLocks noGrp="1"/>
           </p:cNvSpPr>
@@ -10248,13 +9112,7 @@
       </p:sp>
       <p:sp>
         <p:nvSpPr>
-          <p:cNvPr id="6" name="Content Placeholder 5">
-            <a:extLst>
-              <a:ext uri="{FF2B5EF4-FFF2-40B4-BE49-F238E27FC236}">
-                <a16:creationId xmlns:a16="http://schemas.microsoft.com/office/drawing/2014/main" id="{60834126-F3FE-BF3B-C669-34B160F359B8}"/>
-              </a:ext>
-            </a:extLst>
-          </p:cNvPr>
+          <p:cNvPr id="6" name="Content Placeholder 5"/>
           <p:cNvSpPr>
             <a:spLocks noGrp="1"/>
           </p:cNvSpPr>
@@ -10311,13 +9169,7 @@
       </p:sp>
       <p:sp>
         <p:nvSpPr>
-          <p:cNvPr id="7" name="Date Placeholder 6">
-            <a:extLst>
-              <a:ext uri="{FF2B5EF4-FFF2-40B4-BE49-F238E27FC236}">
-                <a16:creationId xmlns:a16="http://schemas.microsoft.com/office/drawing/2014/main" id="{14DAAAE8-DC57-C01B-79C4-A6DDCDD0B588}"/>
-              </a:ext>
-            </a:extLst>
-          </p:cNvPr>
+          <p:cNvPr id="7" name="Date Placeholder 6"/>
           <p:cNvSpPr>
             <a:spLocks noGrp="1"/>
           </p:cNvSpPr>
@@ -10332,7 +9184,7 @@
           <a:p>
             <a:fld id="{9DBD89FD-1150-4979-9614-9DD9EB69C9AA}" type="datetimeFigureOut">
               <a:rPr lang="en-IN" smtClean="0"/>
-              <a:t>24-09-2026</a:t>
+              <a:t>29-10-2026</a:t>
             </a:fld>
             <a:endParaRPr lang="en-IN"/>
           </a:p>
@@ -10340,13 +9192,7 @@
       </p:sp>
       <p:sp>
         <p:nvSpPr>
-          <p:cNvPr id="8" name="Footer Placeholder 7">
-            <a:extLst>
-              <a:ext uri="{FF2B5EF4-FFF2-40B4-BE49-F238E27FC236}">
-                <a16:creationId xmlns:a16="http://schemas.microsoft.com/office/drawing/2014/main" id="{90978D50-BF56-325F-3BA9-7086F2D89042}"/>
-              </a:ext>
-            </a:extLst>
-          </p:cNvPr>
+          <p:cNvPr id="8" name="Footer Placeholder 7"/>
           <p:cNvSpPr>
             <a:spLocks noGrp="1"/>
           </p:cNvSpPr>
@@ -10365,13 +9211,7 @@
       </p:sp>
       <p:sp>
         <p:nvSpPr>
-          <p:cNvPr id="9" name="Slide Number Placeholder 8">
-            <a:extLst>
-              <a:ext uri="{FF2B5EF4-FFF2-40B4-BE49-F238E27FC236}">
-                <a16:creationId xmlns:a16="http://schemas.microsoft.com/office/drawing/2014/main" id="{4AE1807C-9917-1E23-B74A-55208340B9DD}"/>
-              </a:ext>
-            </a:extLst>
-          </p:cNvPr>
+          <p:cNvPr id="9" name="Slide Number Placeholder 8"/>
           <p:cNvSpPr>
             <a:spLocks noGrp="1"/>
           </p:cNvSpPr>
@@ -10393,11 +9233,6 @@
         </p:txBody>
       </p:sp>
     </p:spTree>
-    <p:extLst>
-      <p:ext uri="{BB962C8B-B14F-4D97-AF65-F5344CB8AC3E}">
-        <p14:creationId xmlns:p14="http://schemas.microsoft.com/office/powerpoint/2010/main" val="1089587054"/>
-      </p:ext>
-    </p:extLst>
   </p:cSld>
   <p:clrMapOvr>
     <a:masterClrMapping/>
@@ -10424,13 +9259,7 @@
       </p:grpSpPr>
       <p:sp>
         <p:nvSpPr>
-          <p:cNvPr id="2" name="Title 1">
-            <a:extLst>
-              <a:ext uri="{FF2B5EF4-FFF2-40B4-BE49-F238E27FC236}">
-                <a16:creationId xmlns:a16="http://schemas.microsoft.com/office/drawing/2014/main" id="{9DE971EB-AB59-B523-AC91-1EA0C69063B7}"/>
-              </a:ext>
-            </a:extLst>
-          </p:cNvPr>
+          <p:cNvPr id="2" name="Title 1"/>
           <p:cNvSpPr>
             <a:spLocks noGrp="1"/>
           </p:cNvSpPr>
@@ -10453,13 +9282,7 @@
       </p:sp>
       <p:sp>
         <p:nvSpPr>
-          <p:cNvPr id="3" name="Date Placeholder 2">
-            <a:extLst>
-              <a:ext uri="{FF2B5EF4-FFF2-40B4-BE49-F238E27FC236}">
-                <a16:creationId xmlns:a16="http://schemas.microsoft.com/office/drawing/2014/main" id="{1632BB51-D151-4018-E94C-9492D14A2E20}"/>
-              </a:ext>
-            </a:extLst>
-          </p:cNvPr>
+          <p:cNvPr id="3" name="Date Placeholder 2"/>
           <p:cNvSpPr>
             <a:spLocks noGrp="1"/>
           </p:cNvSpPr>
@@ -10474,7 +9297,7 @@
           <a:p>
             <a:fld id="{9DBD89FD-1150-4979-9614-9DD9EB69C9AA}" type="datetimeFigureOut">
               <a:rPr lang="en-IN" smtClean="0"/>
-              <a:t>24-09-2026</a:t>
+              <a:t>29-10-2026</a:t>
             </a:fld>
             <a:endParaRPr lang="en-IN"/>
           </a:p>
@@ -10482,13 +9305,7 @@
       </p:sp>
       <p:sp>
         <p:nvSpPr>
-          <p:cNvPr id="4" name="Footer Placeholder 3">
-            <a:extLst>
-              <a:ext uri="{FF2B5EF4-FFF2-40B4-BE49-F238E27FC236}">
-                <a16:creationId xmlns:a16="http://schemas.microsoft.com/office/drawing/2014/main" id="{6CA76A11-3EFF-9F2E-7592-FC46C91DE854}"/>
-              </a:ext>
-            </a:extLst>
-          </p:cNvPr>
+          <p:cNvPr id="4" name="Footer Placeholder 3"/>
           <p:cNvSpPr>
             <a:spLocks noGrp="1"/>
           </p:cNvSpPr>
@@ -10507,13 +9324,7 @@
       </p:sp>
       <p:sp>
         <p:nvSpPr>
-          <p:cNvPr id="5" name="Slide Number Placeholder 4">
-            <a:extLst>
-              <a:ext uri="{FF2B5EF4-FFF2-40B4-BE49-F238E27FC236}">
-                <a16:creationId xmlns:a16="http://schemas.microsoft.com/office/drawing/2014/main" id="{5E7E4494-87A1-9015-81E3-AB1F67ADDF40}"/>
-              </a:ext>
-            </a:extLst>
-          </p:cNvPr>
+          <p:cNvPr id="5" name="Slide Number Placeholder 4"/>
           <p:cNvSpPr>
             <a:spLocks noGrp="1"/>
           </p:cNvSpPr>
@@ -10535,11 +9346,6 @@
         </p:txBody>
       </p:sp>
     </p:spTree>
-    <p:extLst>
-      <p:ext uri="{BB962C8B-B14F-4D97-AF65-F5344CB8AC3E}">
-        <p14:creationId xmlns:p14="http://schemas.microsoft.com/office/powerpoint/2010/main" val="3337207530"/>
-      </p:ext>
-    </p:extLst>
   </p:cSld>
   <p:clrMapOvr>
     <a:masterClrMapping/>
@@ -10566,13 +9372,7 @@
       </p:grpSpPr>
       <p:sp>
         <p:nvSpPr>
-          <p:cNvPr id="2" name="Date Placeholder 1">
-            <a:extLst>
-              <a:ext uri="{FF2B5EF4-FFF2-40B4-BE49-F238E27FC236}">
-                <a16:creationId xmlns:a16="http://schemas.microsoft.com/office/drawing/2014/main" id="{F87C2251-4AD5-6CC6-554E-ACA868802A17}"/>
-              </a:ext>
-            </a:extLst>
-          </p:cNvPr>
+          <p:cNvPr id="2" name="Date Placeholder 1"/>
           <p:cNvSpPr>
             <a:spLocks noGrp="1"/>
           </p:cNvSpPr>
@@ -10587,7 +9387,7 @@
           <a:p>
             <a:fld id="{9DBD89FD-1150-4979-9614-9DD9EB69C9AA}" type="datetimeFigureOut">
               <a:rPr lang="en-IN" smtClean="0"/>
-              <a:t>24-09-2026</a:t>
+              <a:t>29-10-2026</a:t>
             </a:fld>
             <a:endParaRPr lang="en-IN"/>
           </a:p>
@@ -10595,13 +9395,7 @@
       </p:sp>
       <p:sp>
         <p:nvSpPr>
-          <p:cNvPr id="3" name="Footer Placeholder 2">
-            <a:extLst>
-              <a:ext uri="{FF2B5EF4-FFF2-40B4-BE49-F238E27FC236}">
-                <a16:creationId xmlns:a16="http://schemas.microsoft.com/office/drawing/2014/main" id="{339E874E-4321-DEEB-AF2B-11C3E932AC60}"/>
-              </a:ext>
-            </a:extLst>
-          </p:cNvPr>
+          <p:cNvPr id="3" name="Footer Placeholder 2"/>
           <p:cNvSpPr>
             <a:spLocks noGrp="1"/>
           </p:cNvSpPr>
@@ -10620,13 +9414,7 @@
       </p:sp>
       <p:sp>
         <p:nvSpPr>
-          <p:cNvPr id="4" name="Slide Number Placeholder 3">
-            <a:extLst>
-              <a:ext uri="{FF2B5EF4-FFF2-40B4-BE49-F238E27FC236}">
-                <a16:creationId xmlns:a16="http://schemas.microsoft.com/office/drawing/2014/main" id="{3A0854DB-44F2-EB81-AD02-3521BE282E75}"/>
-              </a:ext>
-            </a:extLst>
-          </p:cNvPr>
+          <p:cNvPr id="4" name="Slide Number Placeholder 3"/>
           <p:cNvSpPr>
             <a:spLocks noGrp="1"/>
           </p:cNvSpPr>
@@ -10648,11 +9436,6 @@
         </p:txBody>
       </p:sp>
     </p:spTree>
-    <p:extLst>
-      <p:ext uri="{BB962C8B-B14F-4D97-AF65-F5344CB8AC3E}">
-        <p14:creationId xmlns:p14="http://schemas.microsoft.com/office/powerpoint/2010/main" val="1259684655"/>
-      </p:ext>
-    </p:extLst>
   </p:cSld>
   <p:clrMapOvr>
     <a:masterClrMapping/>
@@ -10679,13 +9462,7 @@
       </p:grpSpPr>
       <p:sp>
         <p:nvSpPr>
-          <p:cNvPr id="2" name="Title 1">
-            <a:extLst>
-              <a:ext uri="{FF2B5EF4-FFF2-40B4-BE49-F238E27FC236}">
-                <a16:creationId xmlns:a16="http://schemas.microsoft.com/office/drawing/2014/main" id="{2B8F300B-399B-1F5B-EAE1-123CB0B495CD}"/>
-              </a:ext>
-            </a:extLst>
-          </p:cNvPr>
+          <p:cNvPr id="2" name="Title 1"/>
           <p:cNvSpPr>
             <a:spLocks noGrp="1"/>
           </p:cNvSpPr>
@@ -10717,13 +9494,7 @@
       </p:sp>
       <p:sp>
         <p:nvSpPr>
-          <p:cNvPr id="3" name="Content Placeholder 2">
-            <a:extLst>
-              <a:ext uri="{FF2B5EF4-FFF2-40B4-BE49-F238E27FC236}">
-                <a16:creationId xmlns:a16="http://schemas.microsoft.com/office/drawing/2014/main" id="{F261BF94-CB3C-A8B2-E5D4-C36CE25CDC3C}"/>
-              </a:ext>
-            </a:extLst>
-          </p:cNvPr>
+          <p:cNvPr id="3" name="Content Placeholder 2"/>
           <p:cNvSpPr>
             <a:spLocks noGrp="1"/>
           </p:cNvSpPr>
@@ -10808,13 +9579,7 @@
       </p:sp>
       <p:sp>
         <p:nvSpPr>
-          <p:cNvPr id="4" name="Text Placeholder 3">
-            <a:extLst>
-              <a:ext uri="{FF2B5EF4-FFF2-40B4-BE49-F238E27FC236}">
-                <a16:creationId xmlns:a16="http://schemas.microsoft.com/office/drawing/2014/main" id="{111BE399-58D6-C8D0-6E62-3CCFC67D2B7F}"/>
-              </a:ext>
-            </a:extLst>
-          </p:cNvPr>
+          <p:cNvPr id="4" name="Text Placeholder 3"/>
           <p:cNvSpPr>
             <a:spLocks noGrp="1"/>
           </p:cNvSpPr>
@@ -10879,13 +9644,7 @@
       </p:sp>
       <p:sp>
         <p:nvSpPr>
-          <p:cNvPr id="5" name="Date Placeholder 4">
-            <a:extLst>
-              <a:ext uri="{FF2B5EF4-FFF2-40B4-BE49-F238E27FC236}">
-                <a16:creationId xmlns:a16="http://schemas.microsoft.com/office/drawing/2014/main" id="{C4457D2B-22FA-E3BD-0160-4BB8741A0BC2}"/>
-              </a:ext>
-            </a:extLst>
-          </p:cNvPr>
+          <p:cNvPr id="5" name="Date Placeholder 4"/>
           <p:cNvSpPr>
             <a:spLocks noGrp="1"/>
           </p:cNvSpPr>
@@ -10900,7 +9659,7 @@
           <a:p>
             <a:fld id="{9DBD89FD-1150-4979-9614-9DD9EB69C9AA}" type="datetimeFigureOut">
               <a:rPr lang="en-IN" smtClean="0"/>
-              <a:t>24-09-2026</a:t>
+              <a:t>29-10-2026</a:t>
             </a:fld>
             <a:endParaRPr lang="en-IN"/>
           </a:p>
@@ -10908,13 +9667,7 @@
       </p:sp>
       <p:sp>
         <p:nvSpPr>
-          <p:cNvPr id="6" name="Footer Placeholder 5">
-            <a:extLst>
-              <a:ext uri="{FF2B5EF4-FFF2-40B4-BE49-F238E27FC236}">
-                <a16:creationId xmlns:a16="http://schemas.microsoft.com/office/drawing/2014/main" id="{56ED5D03-8CBC-D73D-86C4-D4AEA7D7B017}"/>
-              </a:ext>
-            </a:extLst>
-          </p:cNvPr>
+          <p:cNvPr id="6" name="Footer Placeholder 5"/>
           <p:cNvSpPr>
             <a:spLocks noGrp="1"/>
           </p:cNvSpPr>
@@ -10933,13 +9686,7 @@
       </p:sp>
       <p:sp>
         <p:nvSpPr>
-          <p:cNvPr id="7" name="Slide Number Placeholder 6">
-            <a:extLst>
-              <a:ext uri="{FF2B5EF4-FFF2-40B4-BE49-F238E27FC236}">
-                <a16:creationId xmlns:a16="http://schemas.microsoft.com/office/drawing/2014/main" id="{4729FACB-D6ED-6C3C-011B-654286285383}"/>
-              </a:ext>
-            </a:extLst>
-          </p:cNvPr>
+          <p:cNvPr id="7" name="Slide Number Placeholder 6"/>
           <p:cNvSpPr>
             <a:spLocks noGrp="1"/>
           </p:cNvSpPr>
@@ -10961,11 +9708,6 @@
         </p:txBody>
       </p:sp>
     </p:spTree>
-    <p:extLst>
-      <p:ext uri="{BB962C8B-B14F-4D97-AF65-F5344CB8AC3E}">
-        <p14:creationId xmlns:p14="http://schemas.microsoft.com/office/powerpoint/2010/main" val="4181046943"/>
-      </p:ext>
-    </p:extLst>
   </p:cSld>
   <p:clrMapOvr>
     <a:masterClrMapping/>
@@ -10992,13 +9734,7 @@
       </p:grpSpPr>
       <p:sp>
         <p:nvSpPr>
-          <p:cNvPr id="2" name="Title 1">
-            <a:extLst>
-              <a:ext uri="{FF2B5EF4-FFF2-40B4-BE49-F238E27FC236}">
-                <a16:creationId xmlns:a16="http://schemas.microsoft.com/office/drawing/2014/main" id="{2BFA36FA-3CFF-29E4-33DD-468945E22100}"/>
-              </a:ext>
-            </a:extLst>
-          </p:cNvPr>
+          <p:cNvPr id="2" name="Title 1"/>
           <p:cNvSpPr>
             <a:spLocks noGrp="1"/>
           </p:cNvSpPr>
@@ -11030,13 +9766,7 @@
       </p:sp>
       <p:sp>
         <p:nvSpPr>
-          <p:cNvPr id="3" name="Picture Placeholder 2">
-            <a:extLst>
-              <a:ext uri="{FF2B5EF4-FFF2-40B4-BE49-F238E27FC236}">
-                <a16:creationId xmlns:a16="http://schemas.microsoft.com/office/drawing/2014/main" id="{6E801A5C-2B15-8CEE-60A8-415FCF7631B8}"/>
-              </a:ext>
-            </a:extLst>
-          </p:cNvPr>
+          <p:cNvPr id="3" name="Picture Placeholder 2"/>
           <p:cNvSpPr>
             <a:spLocks noGrp="1"/>
           </p:cNvSpPr>
@@ -11097,13 +9827,7 @@
       </p:sp>
       <p:sp>
         <p:nvSpPr>
-          <p:cNvPr id="4" name="Text Placeholder 3">
-            <a:extLst>
-              <a:ext uri="{FF2B5EF4-FFF2-40B4-BE49-F238E27FC236}">
-                <a16:creationId xmlns:a16="http://schemas.microsoft.com/office/drawing/2014/main" id="{928917E3-6163-AA46-B140-9EB4F5FBACF6}"/>
-              </a:ext>
-            </a:extLst>
-          </p:cNvPr>
+          <p:cNvPr id="4" name="Text Placeholder 3"/>
           <p:cNvSpPr>
             <a:spLocks noGrp="1"/>
           </p:cNvSpPr>
@@ -11168,13 +9892,7 @@
       </p:sp>
       <p:sp>
         <p:nvSpPr>
-          <p:cNvPr id="5" name="Date Placeholder 4">
-            <a:extLst>
-              <a:ext uri="{FF2B5EF4-FFF2-40B4-BE49-F238E27FC236}">
-                <a16:creationId xmlns:a16="http://schemas.microsoft.com/office/drawing/2014/main" id="{5194199E-F1B5-870F-869F-027453C8E90E}"/>
-              </a:ext>
-            </a:extLst>
-          </p:cNvPr>
+          <p:cNvPr id="5" name="Date Placeholder 4"/>
           <p:cNvSpPr>
             <a:spLocks noGrp="1"/>
           </p:cNvSpPr>
@@ -11189,7 +9907,7 @@
           <a:p>
             <a:fld id="{9DBD89FD-1150-4979-9614-9DD9EB69C9AA}" type="datetimeFigureOut">
               <a:rPr lang="en-IN" smtClean="0"/>
-              <a:t>24-09-2026</a:t>
+              <a:t>29-10-2026</a:t>
             </a:fld>
             <a:endParaRPr lang="en-IN"/>
           </a:p>
@@ -11197,13 +9915,7 @@
       </p:sp>
       <p:sp>
         <p:nvSpPr>
-          <p:cNvPr id="6" name="Footer Placeholder 5">
-            <a:extLst>
-              <a:ext uri="{FF2B5EF4-FFF2-40B4-BE49-F238E27FC236}">
-                <a16:creationId xmlns:a16="http://schemas.microsoft.com/office/drawing/2014/main" id="{790E109C-B14B-88CF-5190-BD96216D6DB6}"/>
-              </a:ext>
-            </a:extLst>
-          </p:cNvPr>
+          <p:cNvPr id="6" name="Footer Placeholder 5"/>
           <p:cNvSpPr>
             <a:spLocks noGrp="1"/>
           </p:cNvSpPr>
@@ -11222,13 +9934,7 @@
       </p:sp>
       <p:sp>
         <p:nvSpPr>
-          <p:cNvPr id="7" name="Slide Number Placeholder 6">
-            <a:extLst>
-              <a:ext uri="{FF2B5EF4-FFF2-40B4-BE49-F238E27FC236}">
-                <a16:creationId xmlns:a16="http://schemas.microsoft.com/office/drawing/2014/main" id="{DF877B40-ED5C-2D77-3B00-4D0FB1410724}"/>
-              </a:ext>
-            </a:extLst>
-          </p:cNvPr>
+          <p:cNvPr id="7" name="Slide Number Placeholder 6"/>
           <p:cNvSpPr>
             <a:spLocks noGrp="1"/>
           </p:cNvSpPr>
@@ -11250,11 +9956,6 @@
         </p:txBody>
       </p:sp>
     </p:spTree>
-    <p:extLst>
-      <p:ext uri="{BB962C8B-B14F-4D97-AF65-F5344CB8AC3E}">
-        <p14:creationId xmlns:p14="http://schemas.microsoft.com/office/powerpoint/2010/main" val="873152046"/>
-      </p:ext>
-    </p:extLst>
   </p:cSld>
   <p:clrMapOvr>
     <a:masterClrMapping/>
@@ -11286,13 +9987,7 @@
       </p:grpSpPr>
       <p:sp>
         <p:nvSpPr>
-          <p:cNvPr id="2" name="Title Placeholder 1">
-            <a:extLst>
-              <a:ext uri="{FF2B5EF4-FFF2-40B4-BE49-F238E27FC236}">
-                <a16:creationId xmlns:a16="http://schemas.microsoft.com/office/drawing/2014/main" id="{2B6B5D22-ED43-B9AC-E8A9-8807377886C0}"/>
-              </a:ext>
-            </a:extLst>
-          </p:cNvPr>
+          <p:cNvPr id="2" name="Title Placeholder 1"/>
           <p:cNvSpPr>
             <a:spLocks noGrp="1"/>
           </p:cNvSpPr>
@@ -11325,13 +10020,7 @@
       </p:sp>
       <p:sp>
         <p:nvSpPr>
-          <p:cNvPr id="3" name="Text Placeholder 2">
-            <a:extLst>
-              <a:ext uri="{FF2B5EF4-FFF2-40B4-BE49-F238E27FC236}">
-                <a16:creationId xmlns:a16="http://schemas.microsoft.com/office/drawing/2014/main" id="{50583EB0-98B5-F93C-94DB-C00E242CDD68}"/>
-              </a:ext>
-            </a:extLst>
-          </p:cNvPr>
+          <p:cNvPr id="3" name="Text Placeholder 2"/>
           <p:cNvSpPr>
             <a:spLocks noGrp="1"/>
           </p:cNvSpPr>
@@ -11393,13 +10082,7 @@
       </p:sp>
       <p:sp>
         <p:nvSpPr>
-          <p:cNvPr id="4" name="Date Placeholder 3">
-            <a:extLst>
-              <a:ext uri="{FF2B5EF4-FFF2-40B4-BE49-F238E27FC236}">
-                <a16:creationId xmlns:a16="http://schemas.microsoft.com/office/drawing/2014/main" id="{D2470165-6173-C423-6D40-4FD72CB096E4}"/>
-              </a:ext>
-            </a:extLst>
-          </p:cNvPr>
+          <p:cNvPr id="4" name="Date Placeholder 3"/>
           <p:cNvSpPr>
             <a:spLocks noGrp="1"/>
           </p:cNvSpPr>
@@ -11432,7 +10115,7 @@
           <a:p>
             <a:fld id="{9DBD89FD-1150-4979-9614-9DD9EB69C9AA}" type="datetimeFigureOut">
               <a:rPr lang="en-IN" smtClean="0"/>
-              <a:t>24-09-2026</a:t>
+              <a:t>29-10-2026</a:t>
             </a:fld>
             <a:endParaRPr lang="en-IN"/>
           </a:p>
@@ -11440,13 +10123,7 @@
       </p:sp>
       <p:sp>
         <p:nvSpPr>
-          <p:cNvPr id="5" name="Footer Placeholder 4">
-            <a:extLst>
-              <a:ext uri="{FF2B5EF4-FFF2-40B4-BE49-F238E27FC236}">
-                <a16:creationId xmlns:a16="http://schemas.microsoft.com/office/drawing/2014/main" id="{0EE5ADCD-ADE6-6D82-B2EF-82963F61BDE4}"/>
-              </a:ext>
-            </a:extLst>
-          </p:cNvPr>
+          <p:cNvPr id="5" name="Footer Placeholder 4"/>
           <p:cNvSpPr>
             <a:spLocks noGrp="1"/>
           </p:cNvSpPr>
@@ -11483,13 +10160,7 @@
       </p:sp>
       <p:sp>
         <p:nvSpPr>
-          <p:cNvPr id="6" name="Slide Number Placeholder 5">
-            <a:extLst>
-              <a:ext uri="{FF2B5EF4-FFF2-40B4-BE49-F238E27FC236}">
-                <a16:creationId xmlns:a16="http://schemas.microsoft.com/office/drawing/2014/main" id="{8637BA67-9B2E-019B-174B-578A8E1738A4}"/>
-              </a:ext>
-            </a:extLst>
-          </p:cNvPr>
+          <p:cNvPr id="6" name="Slide Number Placeholder 5"/>
           <p:cNvSpPr>
             <a:spLocks noGrp="1"/>
           </p:cNvSpPr>
@@ -11529,25 +10200,20 @@
         </p:txBody>
       </p:sp>
     </p:spTree>
-    <p:extLst>
-      <p:ext uri="{BB962C8B-B14F-4D97-AF65-F5344CB8AC3E}">
-        <p14:creationId xmlns:p14="http://schemas.microsoft.com/office/powerpoint/2010/main" val="3203345564"/>
-      </p:ext>
-    </p:extLst>
   </p:cSld>
   <p:clrMap bg1="lt1" tx1="dk1" bg2="lt2" tx2="dk2" accent1="accent1" accent2="accent2" accent3="accent3" accent4="accent4" accent5="accent5" accent6="accent6" hlink="hlink" folHlink="folHlink"/>
   <p:sldLayoutIdLst>
-    <p:sldLayoutId id="2147483732" r:id="rId1"/>
-    <p:sldLayoutId id="2147483733" r:id="rId2"/>
-    <p:sldLayoutId id="2147483734" r:id="rId3"/>
-    <p:sldLayoutId id="2147483735" r:id="rId4"/>
-    <p:sldLayoutId id="2147483736" r:id="rId5"/>
-    <p:sldLayoutId id="2147483737" r:id="rId6"/>
-    <p:sldLayoutId id="2147483738" r:id="rId7"/>
-    <p:sldLayoutId id="2147483739" r:id="rId8"/>
-    <p:sldLayoutId id="2147483740" r:id="rId9"/>
-    <p:sldLayoutId id="2147483741" r:id="rId10"/>
-    <p:sldLayoutId id="2147483742" r:id="rId11"/>
+    <p:sldLayoutId id="2147483649" r:id="rId1"/>
+    <p:sldLayoutId id="2147483650" r:id="rId2"/>
+    <p:sldLayoutId id="2147483651" r:id="rId3"/>
+    <p:sldLayoutId id="2147483652" r:id="rId4"/>
+    <p:sldLayoutId id="2147483653" r:id="rId5"/>
+    <p:sldLayoutId id="2147483654" r:id="rId6"/>
+    <p:sldLayoutId id="2147483655" r:id="rId7"/>
+    <p:sldLayoutId id="2147483656" r:id="rId8"/>
+    <p:sldLayoutId id="2147483657" r:id="rId9"/>
+    <p:sldLayoutId id="2147483658" r:id="rId10"/>
+    <p:sldLayoutId id="2147483659" r:id="rId11"/>
   </p:sldLayoutIdLst>
   <p:txStyles>
     <p:titleStyle>
@@ -11856,13 +10522,7 @@
       </p:grpSpPr>
       <p:sp>
         <p:nvSpPr>
-          <p:cNvPr id="2" name="Title Placeholder 1">
-            <a:extLst>
-              <a:ext uri="{FF2B5EF4-FFF2-40B4-BE49-F238E27FC236}">
-                <a16:creationId xmlns:a16="http://schemas.microsoft.com/office/drawing/2014/main" id="{670CBE7B-BF07-7F1A-B734-4812FD19E9C8}"/>
-              </a:ext>
-            </a:extLst>
-          </p:cNvPr>
+          <p:cNvPr id="2" name="Title Placeholder 1"/>
           <p:cNvSpPr>
             <a:spLocks noGrp="1"/>
           </p:cNvSpPr>
@@ -11895,13 +10555,7 @@
       </p:sp>
       <p:sp>
         <p:nvSpPr>
-          <p:cNvPr id="3" name="Text Placeholder 2">
-            <a:extLst>
-              <a:ext uri="{FF2B5EF4-FFF2-40B4-BE49-F238E27FC236}">
-                <a16:creationId xmlns:a16="http://schemas.microsoft.com/office/drawing/2014/main" id="{6DBE36C3-7221-4821-FFDF-2C3212B0639E}"/>
-              </a:ext>
-            </a:extLst>
-          </p:cNvPr>
+          <p:cNvPr id="3" name="Text Placeholder 2"/>
           <p:cNvSpPr>
             <a:spLocks noGrp="1"/>
           </p:cNvSpPr>
@@ -11963,13 +10617,7 @@
       </p:sp>
       <p:sp>
         <p:nvSpPr>
-          <p:cNvPr id="4" name="Date Placeholder 3">
-            <a:extLst>
-              <a:ext uri="{FF2B5EF4-FFF2-40B4-BE49-F238E27FC236}">
-                <a16:creationId xmlns:a16="http://schemas.microsoft.com/office/drawing/2014/main" id="{2ABFE97E-49C2-026F-AF69-49D62509C2F4}"/>
-              </a:ext>
-            </a:extLst>
-          </p:cNvPr>
+          <p:cNvPr id="4" name="Date Placeholder 3"/>
           <p:cNvSpPr>
             <a:spLocks noGrp="1"/>
           </p:cNvSpPr>
@@ -12002,7 +10650,7 @@
           <a:p>
             <a:fld id="{76E1380B-202A-4ADB-8029-48BBD470229E}" type="datetimeFigureOut">
               <a:rPr lang="en-IN" smtClean="0"/>
-              <a:t>24-09-2026</a:t>
+              <a:t>29-10-2026</a:t>
             </a:fld>
             <a:endParaRPr lang="en-IN"/>
           </a:p>
@@ -12010,13 +10658,7 @@
       </p:sp>
       <p:sp>
         <p:nvSpPr>
-          <p:cNvPr id="5" name="Footer Placeholder 4">
-            <a:extLst>
-              <a:ext uri="{FF2B5EF4-FFF2-40B4-BE49-F238E27FC236}">
-                <a16:creationId xmlns:a16="http://schemas.microsoft.com/office/drawing/2014/main" id="{0B3594C0-D29D-84E3-A127-37FC25DB7D1D}"/>
-              </a:ext>
-            </a:extLst>
-          </p:cNvPr>
+          <p:cNvPr id="5" name="Footer Placeholder 4"/>
           <p:cNvSpPr>
             <a:spLocks noGrp="1"/>
           </p:cNvSpPr>
@@ -12053,13 +10695,7 @@
       </p:sp>
       <p:sp>
         <p:nvSpPr>
-          <p:cNvPr id="6" name="Slide Number Placeholder 5">
-            <a:extLst>
-              <a:ext uri="{FF2B5EF4-FFF2-40B4-BE49-F238E27FC236}">
-                <a16:creationId xmlns:a16="http://schemas.microsoft.com/office/drawing/2014/main" id="{2DAB4BA9-2607-136F-0D6C-48184857D09B}"/>
-              </a:ext>
-            </a:extLst>
-          </p:cNvPr>
+          <p:cNvPr id="6" name="Slide Number Placeholder 5"/>
           <p:cNvSpPr>
             <a:spLocks noGrp="1"/>
           </p:cNvSpPr>
@@ -12099,25 +10735,20 @@
         </p:txBody>
       </p:sp>
     </p:spTree>
-    <p:extLst>
-      <p:ext uri="{BB962C8B-B14F-4D97-AF65-F5344CB8AC3E}">
-        <p14:creationId xmlns:p14="http://schemas.microsoft.com/office/powerpoint/2010/main" val="1006655309"/>
-      </p:ext>
-    </p:extLst>
   </p:cSld>
   <p:clrMap bg1="lt1" tx1="dk1" bg2="lt2" tx2="dk2" accent1="accent1" accent2="accent2" accent3="accent3" accent4="accent4" accent5="accent5" accent6="accent6" hlink="hlink" folHlink="folHlink"/>
   <p:sldLayoutIdLst>
-    <p:sldLayoutId id="2147483720" r:id="rId1"/>
-    <p:sldLayoutId id="2147483721" r:id="rId2"/>
-    <p:sldLayoutId id="2147483722" r:id="rId3"/>
-    <p:sldLayoutId id="2147483723" r:id="rId4"/>
-    <p:sldLayoutId id="2147483724" r:id="rId5"/>
-    <p:sldLayoutId id="2147483725" r:id="rId6"/>
-    <p:sldLayoutId id="2147483726" r:id="rId7"/>
-    <p:sldLayoutId id="2147483727" r:id="rId8"/>
-    <p:sldLayoutId id="2147483728" r:id="rId9"/>
-    <p:sldLayoutId id="2147483729" r:id="rId10"/>
-    <p:sldLayoutId id="2147483730" r:id="rId11"/>
+    <p:sldLayoutId id="2147483661" r:id="rId1"/>
+    <p:sldLayoutId id="2147483662" r:id="rId2"/>
+    <p:sldLayoutId id="2147483663" r:id="rId3"/>
+    <p:sldLayoutId id="2147483664" r:id="rId4"/>
+    <p:sldLayoutId id="2147483665" r:id="rId5"/>
+    <p:sldLayoutId id="2147483666" r:id="rId6"/>
+    <p:sldLayoutId id="2147483667" r:id="rId7"/>
+    <p:sldLayoutId id="2147483668" r:id="rId8"/>
+    <p:sldLayoutId id="2147483669" r:id="rId9"/>
+    <p:sldLayoutId id="2147483670" r:id="rId10"/>
+    <p:sldLayoutId id="2147483671" r:id="rId11"/>
   </p:sldLayoutIdLst>
   <p:txStyles>
     <p:titleStyle>
@@ -12426,13 +11057,7 @@
       </p:grpSpPr>
       <p:sp>
         <p:nvSpPr>
-          <p:cNvPr id="3" name="Text Placeholder 2">
-            <a:extLst>
-              <a:ext uri="{FF2B5EF4-FFF2-40B4-BE49-F238E27FC236}">
-                <a16:creationId xmlns:a16="http://schemas.microsoft.com/office/drawing/2014/main" id="{ADCAE7C7-C77B-E7F0-C90A-816659C3565F}"/>
-              </a:ext>
-            </a:extLst>
-          </p:cNvPr>
+          <p:cNvPr id="3" name="Text Placeholder 2"/>
           <p:cNvSpPr>
             <a:spLocks noGrp="1"/>
           </p:cNvSpPr>
@@ -12494,13 +11119,7 @@
       </p:sp>
       <p:sp>
         <p:nvSpPr>
-          <p:cNvPr id="4" name="Date Placeholder 3">
-            <a:extLst>
-              <a:ext uri="{FF2B5EF4-FFF2-40B4-BE49-F238E27FC236}">
-                <a16:creationId xmlns:a16="http://schemas.microsoft.com/office/drawing/2014/main" id="{0A25FFFF-FC5F-0CA4-EC43-1522DC94DEF6}"/>
-              </a:ext>
-            </a:extLst>
-          </p:cNvPr>
+          <p:cNvPr id="4" name="Date Placeholder 3"/>
           <p:cNvSpPr>
             <a:spLocks noGrp="1"/>
           </p:cNvSpPr>
@@ -12533,7 +11152,7 @@
           <a:p>
             <a:fld id="{4FCF3042-9457-4066-8C5E-A728C46299CF}" type="datetimeFigureOut">
               <a:rPr lang="en-IN" smtClean="0"/>
-              <a:t>24-09-2026</a:t>
+              <a:t>29-10-2026</a:t>
             </a:fld>
             <a:endParaRPr lang="en-IN"/>
           </a:p>
@@ -12541,13 +11160,7 @@
       </p:sp>
       <p:sp>
         <p:nvSpPr>
-          <p:cNvPr id="5" name="Footer Placeholder 4">
-            <a:extLst>
-              <a:ext uri="{FF2B5EF4-FFF2-40B4-BE49-F238E27FC236}">
-                <a16:creationId xmlns:a16="http://schemas.microsoft.com/office/drawing/2014/main" id="{1DD31B25-21B2-599E-8779-990350E80D3F}"/>
-              </a:ext>
-            </a:extLst>
-          </p:cNvPr>
+          <p:cNvPr id="5" name="Footer Placeholder 4"/>
           <p:cNvSpPr>
             <a:spLocks noGrp="1"/>
           </p:cNvSpPr>
@@ -12584,13 +11197,7 @@
       </p:sp>
       <p:sp>
         <p:nvSpPr>
-          <p:cNvPr id="6" name="Slide Number Placeholder 5">
-            <a:extLst>
-              <a:ext uri="{FF2B5EF4-FFF2-40B4-BE49-F238E27FC236}">
-                <a16:creationId xmlns:a16="http://schemas.microsoft.com/office/drawing/2014/main" id="{0137C28A-80E3-A329-704C-FFC7E4B7F987}"/>
-              </a:ext>
-            </a:extLst>
-          </p:cNvPr>
+          <p:cNvPr id="6" name="Slide Number Placeholder 5"/>
           <p:cNvSpPr>
             <a:spLocks noGrp="1"/>
           </p:cNvSpPr>
@@ -12631,13 +11238,7 @@
       </p:sp>
       <p:pic>
         <p:nvPicPr>
-          <p:cNvPr id="7" name="Picture 6">
-            <a:extLst>
-              <a:ext uri="{FF2B5EF4-FFF2-40B4-BE49-F238E27FC236}">
-                <a16:creationId xmlns:a16="http://schemas.microsoft.com/office/drawing/2014/main" id="{976ECDB2-D6B7-EFA7-C691-CE763FD3D534}"/>
-              </a:ext>
-            </a:extLst>
-          </p:cNvPr>
+          <p:cNvPr id="7" name="Picture 6"/>
           <p:cNvPicPr/>
           <p:nvPr userDrawn="1"/>
         </p:nvPicPr>
@@ -12662,25 +11263,20 @@
         </p:spPr>
       </p:pic>
     </p:spTree>
-    <p:extLst>
-      <p:ext uri="{BB962C8B-B14F-4D97-AF65-F5344CB8AC3E}">
-        <p14:creationId xmlns:p14="http://schemas.microsoft.com/office/powerpoint/2010/main" val="3220237604"/>
-      </p:ext>
-    </p:extLst>
   </p:cSld>
   <p:clrMap bg1="lt1" tx1="dk1" bg2="lt2" tx2="dk2" accent1="accent1" accent2="accent2" accent3="accent3" accent4="accent4" accent5="accent5" accent6="accent6" hlink="hlink" folHlink="folHlink"/>
   <p:sldLayoutIdLst>
-    <p:sldLayoutId id="2147483708" r:id="rId1"/>
-    <p:sldLayoutId id="2147483709" r:id="rId2"/>
-    <p:sldLayoutId id="2147483710" r:id="rId3"/>
-    <p:sldLayoutId id="2147483711" r:id="rId4"/>
-    <p:sldLayoutId id="2147483712" r:id="rId5"/>
-    <p:sldLayoutId id="2147483713" r:id="rId6"/>
-    <p:sldLayoutId id="2147483714" r:id="rId7"/>
-    <p:sldLayoutId id="2147483715" r:id="rId8"/>
-    <p:sldLayoutId id="2147483716" r:id="rId9"/>
-    <p:sldLayoutId id="2147483717" r:id="rId10"/>
-    <p:sldLayoutId id="2147483718" r:id="rId11"/>
+    <p:sldLayoutId id="2147483673" r:id="rId1"/>
+    <p:sldLayoutId id="2147483674" r:id="rId2"/>
+    <p:sldLayoutId id="2147483675" r:id="rId3"/>
+    <p:sldLayoutId id="2147483676" r:id="rId4"/>
+    <p:sldLayoutId id="2147483677" r:id="rId5"/>
+    <p:sldLayoutId id="2147483678" r:id="rId6"/>
+    <p:sldLayoutId id="2147483679" r:id="rId7"/>
+    <p:sldLayoutId id="2147483680" r:id="rId8"/>
+    <p:sldLayoutId id="2147483681" r:id="rId9"/>
+    <p:sldLayoutId id="2147483682" r:id="rId10"/>
+    <p:sldLayoutId id="2147483683" r:id="rId11"/>
   </p:sldLayoutIdLst>
   <p:txStyles>
     <p:titleStyle>
@@ -13117,7 +11713,7 @@
           <a:p>
             <a:fld id="{9DBD89FD-1150-4979-9614-9DD9EB69C9AA}" type="datetimeFigureOut">
               <a:rPr lang="en-IN" smtClean="0"/>
-              <a:t>24-09-2026</a:t>
+              <a:t>29-10-2026</a:t>
             </a:fld>
             <a:endParaRPr lang="en-IN"/>
           </a:p>
@@ -13203,13 +11799,7 @@
       </p:sp>
       <p:pic>
         <p:nvPicPr>
-          <p:cNvPr id="7" name="Picture 6">
-            <a:extLst>
-              <a:ext uri="{FF2B5EF4-FFF2-40B4-BE49-F238E27FC236}">
-                <a16:creationId xmlns:a16="http://schemas.microsoft.com/office/drawing/2014/main" id="{B7A06C70-E092-D371-A213-D2FAC30D48C2}"/>
-              </a:ext>
-            </a:extLst>
-          </p:cNvPr>
+          <p:cNvPr id="7" name="Picture 6"/>
           <p:cNvPicPr/>
           <p:nvPr userDrawn="1"/>
         </p:nvPicPr>
@@ -13234,26 +11824,21 @@
         </p:spPr>
       </p:pic>
     </p:spTree>
-    <p:extLst>
-      <p:ext uri="{BB962C8B-B14F-4D97-AF65-F5344CB8AC3E}">
-        <p14:creationId xmlns:p14="http://schemas.microsoft.com/office/powerpoint/2010/main" val="3217939247"/>
-      </p:ext>
-    </p:extLst>
   </p:cSld>
   <p:clrMap bg1="lt1" tx1="dk1" bg2="lt2" tx2="dk2" accent1="accent1" accent2="accent2" accent3="accent3" accent4="accent4" accent5="accent5" accent6="accent6" hlink="hlink" folHlink="folHlink"/>
   <p:sldLayoutIdLst>
-    <p:sldLayoutId id="2147483756" r:id="rId1"/>
-    <p:sldLayoutId id="2147483757" r:id="rId2"/>
-    <p:sldLayoutId id="2147483758" r:id="rId3"/>
-    <p:sldLayoutId id="2147483759" r:id="rId4"/>
-    <p:sldLayoutId id="2147483760" r:id="rId5"/>
-    <p:sldLayoutId id="2147483761" r:id="rId6"/>
-    <p:sldLayoutId id="2147483762" r:id="rId7"/>
-    <p:sldLayoutId id="2147483763" r:id="rId8"/>
-    <p:sldLayoutId id="2147483764" r:id="rId9"/>
-    <p:sldLayoutId id="2147483765" r:id="rId10"/>
-    <p:sldLayoutId id="2147483766" r:id="rId11"/>
-    <p:sldLayoutId id="2147483706" r:id="rId12"/>
+    <p:sldLayoutId id="2147483685" r:id="rId1"/>
+    <p:sldLayoutId id="2147483686" r:id="rId2"/>
+    <p:sldLayoutId id="2147483687" r:id="rId3"/>
+    <p:sldLayoutId id="2147483688" r:id="rId4"/>
+    <p:sldLayoutId id="2147483689" r:id="rId5"/>
+    <p:sldLayoutId id="2147483690" r:id="rId6"/>
+    <p:sldLayoutId id="2147483691" r:id="rId7"/>
+    <p:sldLayoutId id="2147483692" r:id="rId8"/>
+    <p:sldLayoutId id="2147483693" r:id="rId9"/>
+    <p:sldLayoutId id="2147483694" r:id="rId10"/>
+    <p:sldLayoutId id="2147483695" r:id="rId11"/>
+    <p:sldLayoutId id="2147483696" r:id="rId12"/>
   </p:sldLayoutIdLst>
   <p:txStyles>
     <p:titleStyle>
@@ -13570,13 +12155,7 @@
       </p:grpSpPr>
       <p:pic>
         <p:nvPicPr>
-          <p:cNvPr id="4" name="Picture 3">
-            <a:extLst>
-              <a:ext uri="{FF2B5EF4-FFF2-40B4-BE49-F238E27FC236}">
-                <a16:creationId xmlns:a16="http://schemas.microsoft.com/office/drawing/2014/main" id="{6E91B5C2-4C0B-E2C4-1889-F1184977CF64}"/>
-              </a:ext>
-            </a:extLst>
-          </p:cNvPr>
+          <p:cNvPr id="4" name="Picture 3"/>
           <p:cNvPicPr/>
           <p:nvPr/>
         </p:nvPicPr>
@@ -13602,16 +12181,8 @@
       </p:pic>
       <p:sp>
         <p:nvSpPr>
-          <p:cNvPr id="8" name="Text Placeholder 6">
-            <a:extLst>
-              <a:ext uri="{FF2B5EF4-FFF2-40B4-BE49-F238E27FC236}">
-                <a16:creationId xmlns:a16="http://schemas.microsoft.com/office/drawing/2014/main" id="{32823A3D-2D05-3E2C-A45E-040FADD03327}"/>
-              </a:ext>
-            </a:extLst>
-          </p:cNvPr>
-          <p:cNvSpPr txBox="1">
-            <a:spLocks/>
-          </p:cNvSpPr>
+          <p:cNvPr id="8" name="Text Placeholder 6"/>
+          <p:cNvSpPr txBox="1"/>
           <p:nvPr/>
         </p:nvSpPr>
         <p:spPr>
@@ -13816,13 +12387,7 @@
       </p:sp>
       <p:sp>
         <p:nvSpPr>
-          <p:cNvPr id="2" name="Title 1">
-            <a:extLst>
-              <a:ext uri="{FF2B5EF4-FFF2-40B4-BE49-F238E27FC236}">
-                <a16:creationId xmlns:a16="http://schemas.microsoft.com/office/drawing/2014/main" id="{8528DE82-C5E5-81ED-279C-247B47B57F12}"/>
-              </a:ext>
-            </a:extLst>
-          </p:cNvPr>
+          <p:cNvPr id="2" name="Title 1"/>
           <p:cNvSpPr>
             <a:spLocks noGrp="1"/>
           </p:cNvSpPr>
@@ -13910,13 +12475,7 @@
       </p:sp>
       <p:sp>
         <p:nvSpPr>
-          <p:cNvPr id="3" name="Subtitle 2">
-            <a:extLst>
-              <a:ext uri="{FF2B5EF4-FFF2-40B4-BE49-F238E27FC236}">
-                <a16:creationId xmlns:a16="http://schemas.microsoft.com/office/drawing/2014/main" id="{5F77B31E-09B8-20A6-291A-404A4807B446}"/>
-              </a:ext>
-            </a:extLst>
-          </p:cNvPr>
+          <p:cNvPr id="3" name="Subtitle 2"/>
           <p:cNvSpPr>
             <a:spLocks noGrp="1"/>
           </p:cNvSpPr>
@@ -14015,7 +12574,6 @@
               <a:t> Thanvitha - 2420030040</a:t>
             </a:r>
             <a:endParaRPr lang="en-US" b="1" cap="all" dirty="0">
-              <a:ln/>
               <a:solidFill>
                 <a:srgbClr val="C00000"/>
               </a:solidFill>
@@ -14030,13 +12588,7 @@
       </p:sp>
       <p:pic>
         <p:nvPicPr>
-          <p:cNvPr id="9" name="Picture 8" descr="Viral pneumonia, lung X-ray - Stock Image - C037/2788 - Science Photo  Library">
-            <a:extLst>
-              <a:ext uri="{FF2B5EF4-FFF2-40B4-BE49-F238E27FC236}">
-                <a16:creationId xmlns:a16="http://schemas.microsoft.com/office/drawing/2014/main" id="{8F9451F2-C767-299C-1BC0-03E1D6585377}"/>
-              </a:ext>
-            </a:extLst>
-          </p:cNvPr>
+          <p:cNvPr id="9" name="Picture 8" descr="Viral pneumonia, lung X-ray - Stock Image - C037/2788 - Science Photo  Library"/>
           <p:cNvPicPr>
             <a:picLocks noChangeAspect="1"/>
           </p:cNvPicPr>
@@ -14059,11 +12611,6 @@
         </p:spPr>
       </p:pic>
     </p:spTree>
-    <p:extLst>
-      <p:ext uri="{BB962C8B-B14F-4D97-AF65-F5344CB8AC3E}">
-        <p14:creationId xmlns:p14="http://schemas.microsoft.com/office/powerpoint/2010/main" val="3584482409"/>
-      </p:ext>
-    </p:extLst>
   </p:cSld>
   <p:clrMapOvr>
     <a:masterClrMapping/>
@@ -14076,13 +12623,7 @@
   <p:cSld>
     <p:spTree>
       <p:nvGrpSpPr>
-        <p:cNvPr id="1" name="">
-          <a:extLst>
-            <a:ext uri="{FF2B5EF4-FFF2-40B4-BE49-F238E27FC236}">
-              <a16:creationId xmlns:a16="http://schemas.microsoft.com/office/drawing/2014/main" id="{115671CA-8D5E-3F5D-2C2B-A935D080368C}"/>
-            </a:ext>
-          </a:extLst>
-        </p:cNvPr>
+        <p:cNvPr id="1" name=""/>
         <p:cNvGrpSpPr/>
         <p:nvPr/>
       </p:nvGrpSpPr>
@@ -14096,13 +12637,7 @@
       </p:grpSpPr>
       <p:sp>
         <p:nvSpPr>
-          <p:cNvPr id="4" name="Rounded Rectangle 17">
-            <a:extLst>
-              <a:ext uri="{FF2B5EF4-FFF2-40B4-BE49-F238E27FC236}">
-                <a16:creationId xmlns:a16="http://schemas.microsoft.com/office/drawing/2014/main" id="{0370A898-7946-9913-D235-3C2D43AC91BC}"/>
-              </a:ext>
-            </a:extLst>
-          </p:cNvPr>
+          <p:cNvPr id="4" name="Rounded Rectangle 17"/>
           <p:cNvSpPr/>
           <p:nvPr/>
         </p:nvSpPr>
@@ -14163,13 +12698,7 @@
       </p:sp>
       <p:pic>
         <p:nvPicPr>
-          <p:cNvPr id="6" name="Picture 5">
-            <a:extLst>
-              <a:ext uri="{FF2B5EF4-FFF2-40B4-BE49-F238E27FC236}">
-                <a16:creationId xmlns:a16="http://schemas.microsoft.com/office/drawing/2014/main" id="{28DCDE9A-30AD-04CF-5255-C184A032695D}"/>
-              </a:ext>
-            </a:extLst>
-          </p:cNvPr>
+          <p:cNvPr id="6" name="Picture 5"/>
           <p:cNvPicPr>
             <a:picLocks noChangeAspect="1"/>
           </p:cNvPicPr>
@@ -14193,11 +12722,6 @@
         </p:spPr>
       </p:pic>
     </p:spTree>
-    <p:extLst>
-      <p:ext uri="{BB962C8B-B14F-4D97-AF65-F5344CB8AC3E}">
-        <p14:creationId xmlns:p14="http://schemas.microsoft.com/office/powerpoint/2010/main" val="4114544890"/>
-      </p:ext>
-    </p:extLst>
   </p:cSld>
   <p:clrMapOvr>
     <a:masterClrMapping/>
@@ -14210,13 +12734,7 @@
   <p:cSld>
     <p:spTree>
       <p:nvGrpSpPr>
-        <p:cNvPr id="1" name="">
-          <a:extLst>
-            <a:ext uri="{FF2B5EF4-FFF2-40B4-BE49-F238E27FC236}">
-              <a16:creationId xmlns:a16="http://schemas.microsoft.com/office/drawing/2014/main" id="{DC8ED268-7E05-CE67-2538-120A688CEFEC}"/>
-            </a:ext>
-          </a:extLst>
-        </p:cNvPr>
+        <p:cNvPr id="1" name=""/>
         <p:cNvGrpSpPr/>
         <p:nvPr/>
       </p:nvGrpSpPr>
@@ -14230,13 +12748,7 @@
       </p:grpSpPr>
       <p:sp>
         <p:nvSpPr>
-          <p:cNvPr id="4" name="Rounded Rectangle 17">
-            <a:extLst>
-              <a:ext uri="{FF2B5EF4-FFF2-40B4-BE49-F238E27FC236}">
-                <a16:creationId xmlns:a16="http://schemas.microsoft.com/office/drawing/2014/main" id="{197602FD-0E3E-FAEC-5139-09449CB5472F}"/>
-              </a:ext>
-            </a:extLst>
-          </p:cNvPr>
+          <p:cNvPr id="4" name="Rounded Rectangle 17"/>
           <p:cNvSpPr/>
           <p:nvPr/>
         </p:nvSpPr>
@@ -14297,23 +12809,11 @@
       </p:sp>
       <p:graphicFrame>
         <p:nvGraphicFramePr>
-          <p:cNvPr id="3" name="Table 2">
-            <a:extLst>
-              <a:ext uri="{FF2B5EF4-FFF2-40B4-BE49-F238E27FC236}">
-                <a16:creationId xmlns:a16="http://schemas.microsoft.com/office/drawing/2014/main" id="{94051B42-5936-FBB6-AF18-81249FC40DFD}"/>
-              </a:ext>
-            </a:extLst>
-          </p:cNvPr>
+          <p:cNvPr id="3" name="Table 2"/>
           <p:cNvGraphicFramePr>
             <a:graphicFrameLocks noGrp="1"/>
           </p:cNvGraphicFramePr>
-          <p:nvPr>
-            <p:extLst>
-              <p:ext uri="{D42A27DB-BD31-4B8C-83A1-F6EECF244321}">
-                <p14:modId xmlns:p14="http://schemas.microsoft.com/office/powerpoint/2010/main" val="892588877"/>
-              </p:ext>
-            </p:extLst>
-          </p:nvPr>
+          <p:nvPr/>
         </p:nvGraphicFramePr>
         <p:xfrm>
           <a:off x="2032000" y="1478618"/>
@@ -14329,14 +12829,14 @@
                 <a:gridCol w="4064000">
                   <a:extLst>
                     <a:ext uri="{9D8B030D-6E8A-4147-A177-3AD203B41FA5}">
-                      <a16:colId xmlns:a16="http://schemas.microsoft.com/office/drawing/2014/main" val="4156129305"/>
+                      <a16:colId xmlns:a16="http://schemas.microsoft.com/office/drawing/2014/main" val="20000"/>
                     </a:ext>
                   </a:extLst>
                 </a:gridCol>
                 <a:gridCol w="4064000">
                   <a:extLst>
                     <a:ext uri="{9D8B030D-6E8A-4147-A177-3AD203B41FA5}">
-                      <a16:colId xmlns:a16="http://schemas.microsoft.com/office/drawing/2014/main" val="2767383347"/>
+                      <a16:colId xmlns:a16="http://schemas.microsoft.com/office/drawing/2014/main" val="20001"/>
                     </a:ext>
                   </a:extLst>
                 </a:gridCol>
@@ -14376,7 +12876,7 @@
                 </a:tc>
                 <a:extLst>
                   <a:ext uri="{0D108BD9-81ED-4DB2-BD59-A6C34878D82A}">
-                    <a16:rowId xmlns:a16="http://schemas.microsoft.com/office/drawing/2014/main" val="3734249086"/>
+                    <a16:rowId xmlns:a16="http://schemas.microsoft.com/office/drawing/2014/main" val="10000"/>
                   </a:ext>
                 </a:extLst>
               </a:tr>
@@ -14415,7 +12915,7 @@
                 </a:tc>
                 <a:extLst>
                   <a:ext uri="{0D108BD9-81ED-4DB2-BD59-A6C34878D82A}">
-                    <a16:rowId xmlns:a16="http://schemas.microsoft.com/office/drawing/2014/main" val="1666581755"/>
+                    <a16:rowId xmlns:a16="http://schemas.microsoft.com/office/drawing/2014/main" val="10001"/>
                   </a:ext>
                 </a:extLst>
               </a:tr>
@@ -14454,7 +12954,7 @@
                 </a:tc>
                 <a:extLst>
                   <a:ext uri="{0D108BD9-81ED-4DB2-BD59-A6C34878D82A}">
-                    <a16:rowId xmlns:a16="http://schemas.microsoft.com/office/drawing/2014/main" val="1282768474"/>
+                    <a16:rowId xmlns:a16="http://schemas.microsoft.com/office/drawing/2014/main" val="10002"/>
                   </a:ext>
                 </a:extLst>
               </a:tr>
@@ -14493,7 +12993,7 @@
                 </a:tc>
                 <a:extLst>
                   <a:ext uri="{0D108BD9-81ED-4DB2-BD59-A6C34878D82A}">
-                    <a16:rowId xmlns:a16="http://schemas.microsoft.com/office/drawing/2014/main" val="3003252920"/>
+                    <a16:rowId xmlns:a16="http://schemas.microsoft.com/office/drawing/2014/main" val="10003"/>
                   </a:ext>
                 </a:extLst>
               </a:tr>
@@ -14532,7 +13032,7 @@
                 </a:tc>
                 <a:extLst>
                   <a:ext uri="{0D108BD9-81ED-4DB2-BD59-A6C34878D82A}">
-                    <a16:rowId xmlns:a16="http://schemas.microsoft.com/office/drawing/2014/main" val="190814114"/>
+                    <a16:rowId xmlns:a16="http://schemas.microsoft.com/office/drawing/2014/main" val="10004"/>
                   </a:ext>
                 </a:extLst>
               </a:tr>
@@ -14571,7 +13071,7 @@
                 </a:tc>
                 <a:extLst>
                   <a:ext uri="{0D108BD9-81ED-4DB2-BD59-A6C34878D82A}">
-                    <a16:rowId xmlns:a16="http://schemas.microsoft.com/office/drawing/2014/main" val="2481640833"/>
+                    <a16:rowId xmlns:a16="http://schemas.microsoft.com/office/drawing/2014/main" val="10005"/>
                   </a:ext>
                 </a:extLst>
               </a:tr>
@@ -14610,7 +13110,7 @@
                 </a:tc>
                 <a:extLst>
                   <a:ext uri="{0D108BD9-81ED-4DB2-BD59-A6C34878D82A}">
-                    <a16:rowId xmlns:a16="http://schemas.microsoft.com/office/drawing/2014/main" val="924134182"/>
+                    <a16:rowId xmlns:a16="http://schemas.microsoft.com/office/drawing/2014/main" val="10006"/>
                   </a:ext>
                 </a:extLst>
               </a:tr>
@@ -14649,7 +13149,7 @@
                 </a:tc>
                 <a:extLst>
                   <a:ext uri="{0D108BD9-81ED-4DB2-BD59-A6C34878D82A}">
-                    <a16:rowId xmlns:a16="http://schemas.microsoft.com/office/drawing/2014/main" val="3099577975"/>
+                    <a16:rowId xmlns:a16="http://schemas.microsoft.com/office/drawing/2014/main" val="10007"/>
                   </a:ext>
                 </a:extLst>
               </a:tr>
@@ -14688,7 +13188,7 @@
                 </a:tc>
                 <a:extLst>
                   <a:ext uri="{0D108BD9-81ED-4DB2-BD59-A6C34878D82A}">
-                    <a16:rowId xmlns:a16="http://schemas.microsoft.com/office/drawing/2014/main" val="794280118"/>
+                    <a16:rowId xmlns:a16="http://schemas.microsoft.com/office/drawing/2014/main" val="10008"/>
                   </a:ext>
                 </a:extLst>
               </a:tr>
@@ -14727,7 +13227,7 @@
                 </a:tc>
                 <a:extLst>
                   <a:ext uri="{0D108BD9-81ED-4DB2-BD59-A6C34878D82A}">
-                    <a16:rowId xmlns:a16="http://schemas.microsoft.com/office/drawing/2014/main" val="1109740460"/>
+                    <a16:rowId xmlns:a16="http://schemas.microsoft.com/office/drawing/2014/main" val="10009"/>
                   </a:ext>
                 </a:extLst>
               </a:tr>
@@ -14766,7 +13266,7 @@
                 </a:tc>
                 <a:extLst>
                   <a:ext uri="{0D108BD9-81ED-4DB2-BD59-A6C34878D82A}">
-                    <a16:rowId xmlns:a16="http://schemas.microsoft.com/office/drawing/2014/main" val="4220321107"/>
+                    <a16:rowId xmlns:a16="http://schemas.microsoft.com/office/drawing/2014/main" val="10010"/>
                   </a:ext>
                 </a:extLst>
               </a:tr>
@@ -14775,11 +13275,6 @@
         </a:graphic>
       </p:graphicFrame>
     </p:spTree>
-    <p:extLst>
-      <p:ext uri="{BB962C8B-B14F-4D97-AF65-F5344CB8AC3E}">
-        <p14:creationId xmlns:p14="http://schemas.microsoft.com/office/powerpoint/2010/main" val="1612886219"/>
-      </p:ext>
-    </p:extLst>
   </p:cSld>
   <p:clrMapOvr>
     <a:masterClrMapping/>
@@ -14792,13 +13287,7 @@
   <p:cSld>
     <p:spTree>
       <p:nvGrpSpPr>
-        <p:cNvPr id="1" name="">
-          <a:extLst>
-            <a:ext uri="{FF2B5EF4-FFF2-40B4-BE49-F238E27FC236}">
-              <a16:creationId xmlns:a16="http://schemas.microsoft.com/office/drawing/2014/main" id="{AA3D7CE3-09B2-F6BF-D99B-3C85F0936A89}"/>
-            </a:ext>
-          </a:extLst>
-        </p:cNvPr>
+        <p:cNvPr id="1" name=""/>
         <p:cNvGrpSpPr/>
         <p:nvPr/>
       </p:nvGrpSpPr>
@@ -14812,13 +13301,7 @@
       </p:grpSpPr>
       <p:sp>
         <p:nvSpPr>
-          <p:cNvPr id="4" name="Rounded Rectangle 17">
-            <a:extLst>
-              <a:ext uri="{FF2B5EF4-FFF2-40B4-BE49-F238E27FC236}">
-                <a16:creationId xmlns:a16="http://schemas.microsoft.com/office/drawing/2014/main" id="{A9DF99F3-A32C-1F38-5713-4D83BE9CA29C}"/>
-              </a:ext>
-            </a:extLst>
-          </p:cNvPr>
+          <p:cNvPr id="4" name="Rounded Rectangle 17"/>
           <p:cNvSpPr/>
           <p:nvPr/>
         </p:nvSpPr>
@@ -14879,13 +13362,7 @@
       </p:sp>
       <p:sp>
         <p:nvSpPr>
-          <p:cNvPr id="5" name="TextBox 4">
-            <a:extLst>
-              <a:ext uri="{FF2B5EF4-FFF2-40B4-BE49-F238E27FC236}">
-                <a16:creationId xmlns:a16="http://schemas.microsoft.com/office/drawing/2014/main" id="{A155A7D5-2621-E312-33C1-B244CB4889D3}"/>
-              </a:ext>
-            </a:extLst>
-          </p:cNvPr>
+          <p:cNvPr id="5" name="TextBox 4"/>
           <p:cNvSpPr txBox="1"/>
           <p:nvPr/>
         </p:nvSpPr>
@@ -14914,13 +13391,7 @@
       </p:sp>
       <p:pic>
         <p:nvPicPr>
-          <p:cNvPr id="3" name="Picture 2">
-            <a:extLst>
-              <a:ext uri="{FF2B5EF4-FFF2-40B4-BE49-F238E27FC236}">
-                <a16:creationId xmlns:a16="http://schemas.microsoft.com/office/drawing/2014/main" id="{157B7E55-A9D5-C0A9-35E8-A8E79116F372}"/>
-              </a:ext>
-            </a:extLst>
-          </p:cNvPr>
+          <p:cNvPr id="3" name="Picture 2"/>
           <p:cNvPicPr>
             <a:picLocks noChangeAspect="1"/>
           </p:cNvPicPr>
@@ -14934,7 +13405,7 @@
         </p:blipFill>
         <p:spPr>
           <a:xfrm>
-            <a:off x="3026136" y="2262255"/>
+            <a:off x="3026136" y="2272415"/>
             <a:ext cx="7784592" cy="4377564"/>
           </a:xfrm>
           <a:prstGeom prst="rect">
@@ -14943,11 +13414,6 @@
         </p:spPr>
       </p:pic>
     </p:spTree>
-    <p:extLst>
-      <p:ext uri="{BB962C8B-B14F-4D97-AF65-F5344CB8AC3E}">
-        <p14:creationId xmlns:p14="http://schemas.microsoft.com/office/powerpoint/2010/main" val="2360104627"/>
-      </p:ext>
-    </p:extLst>
   </p:cSld>
   <p:clrMapOvr>
     <a:masterClrMapping/>
@@ -14960,13 +13426,7 @@
   <p:cSld>
     <p:spTree>
       <p:nvGrpSpPr>
-        <p:cNvPr id="1" name="">
-          <a:extLst>
-            <a:ext uri="{FF2B5EF4-FFF2-40B4-BE49-F238E27FC236}">
-              <a16:creationId xmlns:a16="http://schemas.microsoft.com/office/drawing/2014/main" id="{33983D5B-B97C-4299-6502-5431C202388A}"/>
-            </a:ext>
-          </a:extLst>
-        </p:cNvPr>
+        <p:cNvPr id="1" name=""/>
         <p:cNvGrpSpPr/>
         <p:nvPr/>
       </p:nvGrpSpPr>
@@ -14980,13 +13440,7 @@
       </p:grpSpPr>
       <p:sp>
         <p:nvSpPr>
-          <p:cNvPr id="4" name="Rounded Rectangle 17">
-            <a:extLst>
-              <a:ext uri="{FF2B5EF4-FFF2-40B4-BE49-F238E27FC236}">
-                <a16:creationId xmlns:a16="http://schemas.microsoft.com/office/drawing/2014/main" id="{FD15A5EE-9588-662F-071A-4CEFBAFE2D3D}"/>
-              </a:ext>
-            </a:extLst>
-          </p:cNvPr>
+          <p:cNvPr id="4" name="Rounded Rectangle 17"/>
           <p:cNvSpPr/>
           <p:nvPr/>
         </p:nvSpPr>
@@ -15047,13 +13501,7 @@
       </p:sp>
       <p:sp>
         <p:nvSpPr>
-          <p:cNvPr id="5" name="TextBox 4">
-            <a:extLst>
-              <a:ext uri="{FF2B5EF4-FFF2-40B4-BE49-F238E27FC236}">
-                <a16:creationId xmlns:a16="http://schemas.microsoft.com/office/drawing/2014/main" id="{CBF3177B-9044-6340-4AF8-75CA48430D0F}"/>
-              </a:ext>
-            </a:extLst>
-          </p:cNvPr>
+          <p:cNvPr id="5" name="TextBox 4"/>
           <p:cNvSpPr txBox="1"/>
           <p:nvPr/>
         </p:nvSpPr>
@@ -15178,13 +13626,7 @@
       </p:sp>
       <p:pic>
         <p:nvPicPr>
-          <p:cNvPr id="3" name="Picture 2">
-            <a:extLst>
-              <a:ext uri="{FF2B5EF4-FFF2-40B4-BE49-F238E27FC236}">
-                <a16:creationId xmlns:a16="http://schemas.microsoft.com/office/drawing/2014/main" id="{7F4EAC22-CC8E-C19E-3351-FC2A7307A98C}"/>
-              </a:ext>
-            </a:extLst>
-          </p:cNvPr>
+          <p:cNvPr id="3" name="Picture 2"/>
           <p:cNvPicPr>
             <a:picLocks noChangeAspect="1"/>
           </p:cNvPicPr>
@@ -15198,7 +13640,7 @@
         </p:blipFill>
         <p:spPr>
           <a:xfrm>
-            <a:off x="5852160" y="1930923"/>
+            <a:off x="5852160" y="1941083"/>
             <a:ext cx="6175247" cy="3472570"/>
           </a:xfrm>
           <a:prstGeom prst="rect">
@@ -15207,11 +13649,6 @@
         </p:spPr>
       </p:pic>
     </p:spTree>
-    <p:extLst>
-      <p:ext uri="{BB962C8B-B14F-4D97-AF65-F5344CB8AC3E}">
-        <p14:creationId xmlns:p14="http://schemas.microsoft.com/office/powerpoint/2010/main" val="1745728302"/>
-      </p:ext>
-    </p:extLst>
   </p:cSld>
   <p:clrMapOvr>
     <a:masterClrMapping/>
@@ -15224,13 +13661,7 @@
   <p:cSld>
     <p:spTree>
       <p:nvGrpSpPr>
-        <p:cNvPr id="1" name="">
-          <a:extLst>
-            <a:ext uri="{FF2B5EF4-FFF2-40B4-BE49-F238E27FC236}">
-              <a16:creationId xmlns:a16="http://schemas.microsoft.com/office/drawing/2014/main" id="{115FF3DB-20F9-CD68-54D4-53B72DB2BEC4}"/>
-            </a:ext>
-          </a:extLst>
-        </p:cNvPr>
+        <p:cNvPr id="1" name=""/>
         <p:cNvGrpSpPr/>
         <p:nvPr/>
       </p:nvGrpSpPr>
@@ -15244,13 +13675,7 @@
       </p:grpSpPr>
       <p:sp>
         <p:nvSpPr>
-          <p:cNvPr id="4" name="Rounded Rectangle 17">
-            <a:extLst>
-              <a:ext uri="{FF2B5EF4-FFF2-40B4-BE49-F238E27FC236}">
-                <a16:creationId xmlns:a16="http://schemas.microsoft.com/office/drawing/2014/main" id="{E188F321-AB74-81B8-ABF8-6819652325D3}"/>
-              </a:ext>
-            </a:extLst>
-          </p:cNvPr>
+          <p:cNvPr id="4" name="Rounded Rectangle 17"/>
           <p:cNvSpPr/>
           <p:nvPr/>
         </p:nvSpPr>
@@ -15311,13 +13736,7 @@
       </p:sp>
       <p:sp>
         <p:nvSpPr>
-          <p:cNvPr id="5" name="TextBox 4">
-            <a:extLst>
-              <a:ext uri="{FF2B5EF4-FFF2-40B4-BE49-F238E27FC236}">
-                <a16:creationId xmlns:a16="http://schemas.microsoft.com/office/drawing/2014/main" id="{8CA117FD-12A9-7ED7-9C95-C1A11F198020}"/>
-              </a:ext>
-            </a:extLst>
-          </p:cNvPr>
+          <p:cNvPr id="5" name="TextBox 4"/>
           <p:cNvSpPr txBox="1"/>
           <p:nvPr/>
         </p:nvSpPr>
@@ -15388,13 +13807,7 @@
       </p:sp>
       <p:pic>
         <p:nvPicPr>
-          <p:cNvPr id="3" name="Picture 2">
-            <a:extLst>
-              <a:ext uri="{FF2B5EF4-FFF2-40B4-BE49-F238E27FC236}">
-                <a16:creationId xmlns:a16="http://schemas.microsoft.com/office/drawing/2014/main" id="{641A0921-8EF9-948C-7B15-E54C28CE2892}"/>
-              </a:ext>
-            </a:extLst>
-          </p:cNvPr>
+          <p:cNvPr id="3" name="Picture 2"/>
           <p:cNvPicPr>
             <a:picLocks noChangeAspect="1"/>
           </p:cNvPicPr>
@@ -15417,11 +13830,6 @@
         </p:spPr>
       </p:pic>
     </p:spTree>
-    <p:extLst>
-      <p:ext uri="{BB962C8B-B14F-4D97-AF65-F5344CB8AC3E}">
-        <p14:creationId xmlns:p14="http://schemas.microsoft.com/office/powerpoint/2010/main" val="932361737"/>
-      </p:ext>
-    </p:extLst>
   </p:cSld>
   <p:clrMapOvr>
     <a:masterClrMapping/>
@@ -15434,13 +13842,7 @@
   <p:cSld>
     <p:spTree>
       <p:nvGrpSpPr>
-        <p:cNvPr id="1" name="">
-          <a:extLst>
-            <a:ext uri="{FF2B5EF4-FFF2-40B4-BE49-F238E27FC236}">
-              <a16:creationId xmlns:a16="http://schemas.microsoft.com/office/drawing/2014/main" id="{B61311AD-EB71-1E9E-4C7C-790E658FC726}"/>
-            </a:ext>
-          </a:extLst>
-        </p:cNvPr>
+        <p:cNvPr id="1" name=""/>
         <p:cNvGrpSpPr/>
         <p:nvPr/>
       </p:nvGrpSpPr>
@@ -15454,13 +13856,7 @@
       </p:grpSpPr>
       <p:sp>
         <p:nvSpPr>
-          <p:cNvPr id="4" name="Rounded Rectangle 17">
-            <a:extLst>
-              <a:ext uri="{FF2B5EF4-FFF2-40B4-BE49-F238E27FC236}">
-                <a16:creationId xmlns:a16="http://schemas.microsoft.com/office/drawing/2014/main" id="{5BF537BA-0866-0D4C-5DAA-88F5CC98A203}"/>
-              </a:ext>
-            </a:extLst>
-          </p:cNvPr>
+          <p:cNvPr id="4" name="Rounded Rectangle 17"/>
           <p:cNvSpPr/>
           <p:nvPr/>
         </p:nvSpPr>
@@ -15533,23 +13929,11 @@
       </p:sp>
       <p:graphicFrame>
         <p:nvGraphicFramePr>
-          <p:cNvPr id="2" name="Table 1">
-            <a:extLst>
-              <a:ext uri="{FF2B5EF4-FFF2-40B4-BE49-F238E27FC236}">
-                <a16:creationId xmlns:a16="http://schemas.microsoft.com/office/drawing/2014/main" id="{81E36EC3-75AD-ABE1-290B-ADDCA3EDE3B6}"/>
-              </a:ext>
-            </a:extLst>
-          </p:cNvPr>
+          <p:cNvPr id="2" name="Table 1"/>
           <p:cNvGraphicFramePr>
             <a:graphicFrameLocks noGrp="1"/>
           </p:cNvGraphicFramePr>
-          <p:nvPr>
-            <p:extLst>
-              <p:ext uri="{D42A27DB-BD31-4B8C-83A1-F6EECF244321}">
-                <p14:modId xmlns:p14="http://schemas.microsoft.com/office/powerpoint/2010/main" val="2809228996"/>
-              </p:ext>
-            </p:extLst>
-          </p:nvPr>
+          <p:nvPr/>
         </p:nvGraphicFramePr>
         <p:xfrm>
           <a:off x="450088" y="1124188"/>
@@ -15565,14 +13949,14 @@
                 <a:gridCol w="2911348">
                   <a:extLst>
                     <a:ext uri="{9D8B030D-6E8A-4147-A177-3AD203B41FA5}">
-                      <a16:colId xmlns:a16="http://schemas.microsoft.com/office/drawing/2014/main" val="3922529168"/>
+                      <a16:colId xmlns:a16="http://schemas.microsoft.com/office/drawing/2014/main" val="20000"/>
                     </a:ext>
                   </a:extLst>
                 </a:gridCol>
                 <a:gridCol w="2911348">
                   <a:extLst>
                     <a:ext uri="{9D8B030D-6E8A-4147-A177-3AD203B41FA5}">
-                      <a16:colId xmlns:a16="http://schemas.microsoft.com/office/drawing/2014/main" val="759814099"/>
+                      <a16:colId xmlns:a16="http://schemas.microsoft.com/office/drawing/2014/main" val="20001"/>
                     </a:ext>
                   </a:extLst>
                 </a:gridCol>
@@ -15612,7 +13996,7 @@
                 </a:tc>
                 <a:extLst>
                   <a:ext uri="{0D108BD9-81ED-4DB2-BD59-A6C34878D82A}">
-                    <a16:rowId xmlns:a16="http://schemas.microsoft.com/office/drawing/2014/main" val="1744721984"/>
+                    <a16:rowId xmlns:a16="http://schemas.microsoft.com/office/drawing/2014/main" val="10000"/>
                   </a:ext>
                 </a:extLst>
               </a:tr>
@@ -15652,7 +14036,7 @@
                 </a:tc>
                 <a:extLst>
                   <a:ext uri="{0D108BD9-81ED-4DB2-BD59-A6C34878D82A}">
-                    <a16:rowId xmlns:a16="http://schemas.microsoft.com/office/drawing/2014/main" val="2909978713"/>
+                    <a16:rowId xmlns:a16="http://schemas.microsoft.com/office/drawing/2014/main" val="10001"/>
                   </a:ext>
                 </a:extLst>
               </a:tr>
@@ -15692,7 +14076,7 @@
                 </a:tc>
                 <a:extLst>
                   <a:ext uri="{0D108BD9-81ED-4DB2-BD59-A6C34878D82A}">
-                    <a16:rowId xmlns:a16="http://schemas.microsoft.com/office/drawing/2014/main" val="1350634770"/>
+                    <a16:rowId xmlns:a16="http://schemas.microsoft.com/office/drawing/2014/main" val="10002"/>
                   </a:ext>
                 </a:extLst>
               </a:tr>
@@ -15732,7 +14116,7 @@
                 </a:tc>
                 <a:extLst>
                   <a:ext uri="{0D108BD9-81ED-4DB2-BD59-A6C34878D82A}">
-                    <a16:rowId xmlns:a16="http://schemas.microsoft.com/office/drawing/2014/main" val="1443516025"/>
+                    <a16:rowId xmlns:a16="http://schemas.microsoft.com/office/drawing/2014/main" val="10003"/>
                   </a:ext>
                 </a:extLst>
               </a:tr>
@@ -15772,7 +14156,7 @@
                 </a:tc>
                 <a:extLst>
                   <a:ext uri="{0D108BD9-81ED-4DB2-BD59-A6C34878D82A}">
-                    <a16:rowId xmlns:a16="http://schemas.microsoft.com/office/drawing/2014/main" val="966527367"/>
+                    <a16:rowId xmlns:a16="http://schemas.microsoft.com/office/drawing/2014/main" val="10004"/>
                   </a:ext>
                 </a:extLst>
               </a:tr>
@@ -15812,7 +14196,7 @@
                 </a:tc>
                 <a:extLst>
                   <a:ext uri="{0D108BD9-81ED-4DB2-BD59-A6C34878D82A}">
-                    <a16:rowId xmlns:a16="http://schemas.microsoft.com/office/drawing/2014/main" val="1409796036"/>
+                    <a16:rowId xmlns:a16="http://schemas.microsoft.com/office/drawing/2014/main" val="10005"/>
                   </a:ext>
                 </a:extLst>
               </a:tr>
@@ -15822,13 +14206,7 @@
       </p:graphicFrame>
       <p:sp>
         <p:nvSpPr>
-          <p:cNvPr id="6" name="TextBox 5">
-            <a:extLst>
-              <a:ext uri="{FF2B5EF4-FFF2-40B4-BE49-F238E27FC236}">
-                <a16:creationId xmlns:a16="http://schemas.microsoft.com/office/drawing/2014/main" id="{19C310D0-6E36-901E-800B-C89AF61639B9}"/>
-              </a:ext>
-            </a:extLst>
-          </p:cNvPr>
+          <p:cNvPr id="6" name="TextBox 5"/>
           <p:cNvSpPr txBox="1"/>
           <p:nvPr/>
         </p:nvSpPr>
@@ -15862,23 +14240,11 @@
       </p:sp>
       <p:graphicFrame>
         <p:nvGraphicFramePr>
-          <p:cNvPr id="10" name="Table 9">
-            <a:extLst>
-              <a:ext uri="{FF2B5EF4-FFF2-40B4-BE49-F238E27FC236}">
-                <a16:creationId xmlns:a16="http://schemas.microsoft.com/office/drawing/2014/main" id="{427646D2-8A40-FF69-18B3-5590055676C5}"/>
-              </a:ext>
-            </a:extLst>
-          </p:cNvPr>
+          <p:cNvPr id="10" name="Table 9"/>
           <p:cNvGraphicFramePr>
             <a:graphicFrameLocks noGrp="1"/>
           </p:cNvGraphicFramePr>
-          <p:nvPr>
-            <p:extLst>
-              <p:ext uri="{D42A27DB-BD31-4B8C-83A1-F6EECF244321}">
-                <p14:modId xmlns:p14="http://schemas.microsoft.com/office/powerpoint/2010/main" val="3752778191"/>
-              </p:ext>
-            </p:extLst>
-          </p:nvPr>
+          <p:nvPr/>
         </p:nvGraphicFramePr>
         <p:xfrm>
           <a:off x="450088" y="4250452"/>
@@ -15894,28 +14260,28 @@
                 <a:gridCol w="1552448">
                   <a:extLst>
                     <a:ext uri="{9D8B030D-6E8A-4147-A177-3AD203B41FA5}">
-                      <a16:colId xmlns:a16="http://schemas.microsoft.com/office/drawing/2014/main" val="3440975205"/>
+                      <a16:colId xmlns:a16="http://schemas.microsoft.com/office/drawing/2014/main" val="20000"/>
                     </a:ext>
                   </a:extLst>
                 </a:gridCol>
                 <a:gridCol w="1417320">
                   <a:extLst>
                     <a:ext uri="{9D8B030D-6E8A-4147-A177-3AD203B41FA5}">
-                      <a16:colId xmlns:a16="http://schemas.microsoft.com/office/drawing/2014/main" val="819485521"/>
+                      <a16:colId xmlns:a16="http://schemas.microsoft.com/office/drawing/2014/main" val="20001"/>
                     </a:ext>
                   </a:extLst>
                 </a:gridCol>
                 <a:gridCol w="1078992">
                   <a:extLst>
                     <a:ext uri="{9D8B030D-6E8A-4147-A177-3AD203B41FA5}">
-                      <a16:colId xmlns:a16="http://schemas.microsoft.com/office/drawing/2014/main" val="3223335249"/>
+                      <a16:colId xmlns:a16="http://schemas.microsoft.com/office/drawing/2014/main" val="20002"/>
                     </a:ext>
                   </a:extLst>
                 </a:gridCol>
                 <a:gridCol w="1682496">
                   <a:extLst>
                     <a:ext uri="{9D8B030D-6E8A-4147-A177-3AD203B41FA5}">
-                      <a16:colId xmlns:a16="http://schemas.microsoft.com/office/drawing/2014/main" val="2140256935"/>
+                      <a16:colId xmlns:a16="http://schemas.microsoft.com/office/drawing/2014/main" val="20003"/>
                     </a:ext>
                   </a:extLst>
                 </a:gridCol>
@@ -15951,7 +14317,7 @@
                     <a:bodyPr/>
                     <a:lstStyle/>
                     <a:p>
-                      <a:endParaRPr lang="en-IN" dirty="0"/>
+                      <a:endParaRPr lang="en-US"/>
                     </a:p>
                   </a:txBody>
                   <a:tcPr/>
@@ -15961,14 +14327,14 @@
                     <a:bodyPr/>
                     <a:lstStyle/>
                     <a:p>
-                      <a:endParaRPr lang="en-IN" dirty="0"/>
+                      <a:endParaRPr lang="en-US"/>
                     </a:p>
                   </a:txBody>
                   <a:tcPr/>
                 </a:tc>
                 <a:extLst>
                   <a:ext uri="{0D108BD9-81ED-4DB2-BD59-A6C34878D82A}">
-                    <a16:rowId xmlns:a16="http://schemas.microsoft.com/office/drawing/2014/main" val="933961823"/>
+                    <a16:rowId xmlns:a16="http://schemas.microsoft.com/office/drawing/2014/main" val="10000"/>
                   </a:ext>
                 </a:extLst>
               </a:tr>
@@ -16031,7 +14397,7 @@
                 </a:tc>
                 <a:extLst>
                   <a:ext uri="{0D108BD9-81ED-4DB2-BD59-A6C34878D82A}">
-                    <a16:rowId xmlns:a16="http://schemas.microsoft.com/office/drawing/2014/main" val="1698388666"/>
+                    <a16:rowId xmlns:a16="http://schemas.microsoft.com/office/drawing/2014/main" val="10001"/>
                   </a:ext>
                 </a:extLst>
               </a:tr>
@@ -16041,7 +14407,7 @@
                     <a:bodyPr/>
                     <a:lstStyle/>
                     <a:p>
-                      <a:endParaRPr lang="en-IN" dirty="0"/>
+                      <a:endParaRPr lang="en-US"/>
                     </a:p>
                   </a:txBody>
                   <a:tcPr/>
@@ -16090,7 +14456,7 @@
                 </a:tc>
                 <a:extLst>
                   <a:ext uri="{0D108BD9-81ED-4DB2-BD59-A6C34878D82A}">
-                    <a16:rowId xmlns:a16="http://schemas.microsoft.com/office/drawing/2014/main" val="2252902314"/>
+                    <a16:rowId xmlns:a16="http://schemas.microsoft.com/office/drawing/2014/main" val="10002"/>
                   </a:ext>
                 </a:extLst>
               </a:tr>
@@ -16100,7 +14466,7 @@
                     <a:bodyPr/>
                     <a:lstStyle/>
                     <a:p>
-                      <a:endParaRPr lang="en-IN" dirty="0"/>
+                      <a:endParaRPr lang="en-US"/>
                     </a:p>
                   </a:txBody>
                   <a:tcPr/>
@@ -16148,7 +14514,7 @@
                 </a:tc>
                 <a:extLst>
                   <a:ext uri="{0D108BD9-81ED-4DB2-BD59-A6C34878D82A}">
-                    <a16:rowId xmlns:a16="http://schemas.microsoft.com/office/drawing/2014/main" val="157406914"/>
+                    <a16:rowId xmlns:a16="http://schemas.microsoft.com/office/drawing/2014/main" val="10003"/>
                   </a:ext>
                 </a:extLst>
               </a:tr>
@@ -16158,13 +14524,7 @@
       </p:graphicFrame>
       <p:pic>
         <p:nvPicPr>
-          <p:cNvPr id="5" name="Picture 4">
-            <a:extLst>
-              <a:ext uri="{FF2B5EF4-FFF2-40B4-BE49-F238E27FC236}">
-                <a16:creationId xmlns:a16="http://schemas.microsoft.com/office/drawing/2014/main" id="{40D29035-ECDD-C2CA-4480-4F6ABFD2EA20}"/>
-              </a:ext>
-            </a:extLst>
-          </p:cNvPr>
+          <p:cNvPr id="5" name="Picture 4"/>
           <p:cNvPicPr>
             <a:picLocks noChangeAspect="1"/>
           </p:cNvPicPr>
@@ -16188,13 +14548,7 @@
       </p:pic>
       <p:pic>
         <p:nvPicPr>
-          <p:cNvPr id="8" name="Picture 7">
-            <a:extLst>
-              <a:ext uri="{FF2B5EF4-FFF2-40B4-BE49-F238E27FC236}">
-                <a16:creationId xmlns:a16="http://schemas.microsoft.com/office/drawing/2014/main" id="{6DD294B7-DF49-43FF-3065-98D99A73C0AE}"/>
-              </a:ext>
-            </a:extLst>
-          </p:cNvPr>
+          <p:cNvPr id="8" name="Picture 7"/>
           <p:cNvPicPr>
             <a:picLocks noChangeAspect="1"/>
           </p:cNvPicPr>
@@ -16217,11 +14571,6 @@
         </p:spPr>
       </p:pic>
     </p:spTree>
-    <p:extLst>
-      <p:ext uri="{BB962C8B-B14F-4D97-AF65-F5344CB8AC3E}">
-        <p14:creationId xmlns:p14="http://schemas.microsoft.com/office/powerpoint/2010/main" val="2214995693"/>
-      </p:ext>
-    </p:extLst>
   </p:cSld>
   <p:clrMapOvr>
     <a:masterClrMapping/>
@@ -16234,13 +14583,7 @@
   <p:cSld>
     <p:spTree>
       <p:nvGrpSpPr>
-        <p:cNvPr id="1" name="">
-          <a:extLst>
-            <a:ext uri="{FF2B5EF4-FFF2-40B4-BE49-F238E27FC236}">
-              <a16:creationId xmlns:a16="http://schemas.microsoft.com/office/drawing/2014/main" id="{2DCAB578-A0B1-30C5-B18C-46C4EA274454}"/>
-            </a:ext>
-          </a:extLst>
-        </p:cNvPr>
+        <p:cNvPr id="1" name=""/>
         <p:cNvGrpSpPr/>
         <p:nvPr/>
       </p:nvGrpSpPr>
@@ -16254,13 +14597,7 @@
       </p:grpSpPr>
       <p:sp>
         <p:nvSpPr>
-          <p:cNvPr id="4" name="Rounded Rectangle 17">
-            <a:extLst>
-              <a:ext uri="{FF2B5EF4-FFF2-40B4-BE49-F238E27FC236}">
-                <a16:creationId xmlns:a16="http://schemas.microsoft.com/office/drawing/2014/main" id="{932D0539-6692-F91C-0303-20C58402F9D0}"/>
-              </a:ext>
-            </a:extLst>
-          </p:cNvPr>
+          <p:cNvPr id="4" name="Rounded Rectangle 17"/>
           <p:cNvSpPr/>
           <p:nvPr/>
         </p:nvSpPr>
@@ -16321,13 +14658,7 @@
       </p:sp>
       <p:sp>
         <p:nvSpPr>
-          <p:cNvPr id="5" name="TextBox 4">
-            <a:extLst>
-              <a:ext uri="{FF2B5EF4-FFF2-40B4-BE49-F238E27FC236}">
-                <a16:creationId xmlns:a16="http://schemas.microsoft.com/office/drawing/2014/main" id="{DCF47996-ECB9-2189-9DE5-EBB8A11B12C8}"/>
-              </a:ext>
-            </a:extLst>
-          </p:cNvPr>
+          <p:cNvPr id="5" name="TextBox 4"/>
           <p:cNvSpPr txBox="1"/>
           <p:nvPr/>
         </p:nvSpPr>
@@ -16353,13 +14684,7 @@
       </p:sp>
       <p:pic>
         <p:nvPicPr>
-          <p:cNvPr id="3" name="Picture 2">
-            <a:extLst>
-              <a:ext uri="{FF2B5EF4-FFF2-40B4-BE49-F238E27FC236}">
-                <a16:creationId xmlns:a16="http://schemas.microsoft.com/office/drawing/2014/main" id="{8F4701E2-524E-CD0C-9D1C-4102DBCCA2BB}"/>
-              </a:ext>
-            </a:extLst>
-          </p:cNvPr>
+          <p:cNvPr id="3" name="Picture 2"/>
           <p:cNvPicPr>
             <a:picLocks noChangeAspect="1"/>
           </p:cNvPicPr>
@@ -16373,7 +14698,7 @@
         </p:blipFill>
         <p:spPr>
           <a:xfrm>
-            <a:off x="2432304" y="1302500"/>
+            <a:off x="2432304" y="1312660"/>
             <a:ext cx="7510741" cy="4961139"/>
           </a:xfrm>
           <a:prstGeom prst="rect">
@@ -16382,11 +14707,6 @@
         </p:spPr>
       </p:pic>
     </p:spTree>
-    <p:extLst>
-      <p:ext uri="{BB962C8B-B14F-4D97-AF65-F5344CB8AC3E}">
-        <p14:creationId xmlns:p14="http://schemas.microsoft.com/office/powerpoint/2010/main" val="1918609342"/>
-      </p:ext>
-    </p:extLst>
   </p:cSld>
   <p:clrMapOvr>
     <a:masterClrMapping/>
@@ -16399,13 +14719,7 @@
   <p:cSld>
     <p:spTree>
       <p:nvGrpSpPr>
-        <p:cNvPr id="1" name="">
-          <a:extLst>
-            <a:ext uri="{FF2B5EF4-FFF2-40B4-BE49-F238E27FC236}">
-              <a16:creationId xmlns:a16="http://schemas.microsoft.com/office/drawing/2014/main" id="{136B3108-B481-4AB8-DC0A-81D322004F51}"/>
-            </a:ext>
-          </a:extLst>
-        </p:cNvPr>
+        <p:cNvPr id="1" name=""/>
         <p:cNvGrpSpPr/>
         <p:nvPr/>
       </p:nvGrpSpPr>
@@ -16419,13 +14733,7 @@
       </p:grpSpPr>
       <p:sp>
         <p:nvSpPr>
-          <p:cNvPr id="4" name="Rounded Rectangle 17">
-            <a:extLst>
-              <a:ext uri="{FF2B5EF4-FFF2-40B4-BE49-F238E27FC236}">
-                <a16:creationId xmlns:a16="http://schemas.microsoft.com/office/drawing/2014/main" id="{0792CE1B-5EA7-3D17-4780-43DF1B12907C}"/>
-              </a:ext>
-            </a:extLst>
-          </p:cNvPr>
+          <p:cNvPr id="4" name="Rounded Rectangle 17"/>
           <p:cNvSpPr/>
           <p:nvPr/>
         </p:nvSpPr>
@@ -16490,13 +14798,7 @@
       </p:sp>
       <p:sp>
         <p:nvSpPr>
-          <p:cNvPr id="5" name="TextBox 4">
-            <a:extLst>
-              <a:ext uri="{FF2B5EF4-FFF2-40B4-BE49-F238E27FC236}">
-                <a16:creationId xmlns:a16="http://schemas.microsoft.com/office/drawing/2014/main" id="{B13E5C40-0A7D-CF36-DB0F-7A1AE77F1644}"/>
-              </a:ext>
-            </a:extLst>
-          </p:cNvPr>
+          <p:cNvPr id="5" name="TextBox 4"/>
           <p:cNvSpPr txBox="1"/>
           <p:nvPr/>
         </p:nvSpPr>
@@ -16522,10 +14824,10 @@
       </p:sp>
       <p:pic>
         <p:nvPicPr>
-          <p:cNvPr id="3" name="Picture 2">
+          <p:cNvPr id="6" name="Picture 5">
             <a:extLst>
               <a:ext uri="{FF2B5EF4-FFF2-40B4-BE49-F238E27FC236}">
-                <a16:creationId xmlns:a16="http://schemas.microsoft.com/office/drawing/2014/main" id="{C65013D4-D5C6-085E-FF03-848A66C0E357}"/>
+                <a16:creationId xmlns:a16="http://schemas.microsoft.com/office/drawing/2014/main" id="{FE7B2CE9-8528-A6D1-EB56-6DA76FB428C4}"/>
               </a:ext>
             </a:extLst>
           </p:cNvPr>
@@ -16535,21 +14837,15 @@
           <p:nvPr/>
         </p:nvPicPr>
         <p:blipFill>
-          <a:blip r:embed="rId2">
-            <a:extLst>
-              <a:ext uri="{28A0092B-C50C-407E-A947-70E740481C1C}">
-                <a14:useLocalDpi xmlns:a14="http://schemas.microsoft.com/office/drawing/2010/main" val="0"/>
-              </a:ext>
-            </a:extLst>
-          </a:blip>
+          <a:blip r:embed="rId2"/>
           <a:stretch>
             <a:fillRect/>
           </a:stretch>
         </p:blipFill>
         <p:spPr>
           <a:xfrm>
-            <a:off x="5797296" y="1554927"/>
-            <a:ext cx="6312407" cy="4108212"/>
+            <a:off x="0" y="1774383"/>
+            <a:ext cx="6356309" cy="3748593"/>
           </a:xfrm>
           <a:prstGeom prst="rect">
             <a:avLst/>
@@ -16558,10 +14854,10 @@
       </p:pic>
       <p:pic>
         <p:nvPicPr>
-          <p:cNvPr id="7" name="Picture 6">
+          <p:cNvPr id="9" name="Picture 8">
             <a:extLst>
               <a:ext uri="{FF2B5EF4-FFF2-40B4-BE49-F238E27FC236}">
-                <a16:creationId xmlns:a16="http://schemas.microsoft.com/office/drawing/2014/main" id="{4DF21498-02D1-D990-E707-2A9CD33C5221}"/>
+                <a16:creationId xmlns:a16="http://schemas.microsoft.com/office/drawing/2014/main" id="{2FA0155A-92BF-5250-C0E9-B9B505954AA1}"/>
               </a:ext>
             </a:extLst>
           </p:cNvPr>
@@ -16571,21 +14867,15 @@
           <p:nvPr/>
         </p:nvPicPr>
         <p:blipFill>
-          <a:blip r:embed="rId3">
-            <a:extLst>
-              <a:ext uri="{28A0092B-C50C-407E-A947-70E740481C1C}">
-                <a14:useLocalDpi xmlns:a14="http://schemas.microsoft.com/office/drawing/2010/main" val="0"/>
-              </a:ext>
-            </a:extLst>
-          </a:blip>
+          <a:blip r:embed="rId3"/>
           <a:stretch>
             <a:fillRect/>
           </a:stretch>
         </p:blipFill>
         <p:spPr>
           <a:xfrm>
-            <a:off x="182881" y="1554927"/>
-            <a:ext cx="5458968" cy="4108212"/>
+            <a:off x="6481173" y="1695450"/>
+            <a:ext cx="5590032" cy="3827526"/>
           </a:xfrm>
           <a:prstGeom prst="rect">
             <a:avLst/>
@@ -16593,11 +14883,6 @@
         </p:spPr>
       </p:pic>
     </p:spTree>
-    <p:extLst>
-      <p:ext uri="{BB962C8B-B14F-4D97-AF65-F5344CB8AC3E}">
-        <p14:creationId xmlns:p14="http://schemas.microsoft.com/office/powerpoint/2010/main" val="3194813754"/>
-      </p:ext>
-    </p:extLst>
   </p:cSld>
   <p:clrMapOvr>
     <a:masterClrMapping/>
@@ -16610,13 +14895,7 @@
   <p:cSld>
     <p:spTree>
       <p:nvGrpSpPr>
-        <p:cNvPr id="1" name="">
-          <a:extLst>
-            <a:ext uri="{FF2B5EF4-FFF2-40B4-BE49-F238E27FC236}">
-              <a16:creationId xmlns:a16="http://schemas.microsoft.com/office/drawing/2014/main" id="{86A9F737-E53D-4602-D3C8-4B9EEF7078C1}"/>
-            </a:ext>
-          </a:extLst>
-        </p:cNvPr>
+        <p:cNvPr id="1" name=""/>
         <p:cNvGrpSpPr/>
         <p:nvPr/>
       </p:nvGrpSpPr>
@@ -16630,13 +14909,7 @@
       </p:grpSpPr>
       <p:sp>
         <p:nvSpPr>
-          <p:cNvPr id="4" name="Rounded Rectangle 17">
-            <a:extLst>
-              <a:ext uri="{FF2B5EF4-FFF2-40B4-BE49-F238E27FC236}">
-                <a16:creationId xmlns:a16="http://schemas.microsoft.com/office/drawing/2014/main" id="{39C2A3D0-1684-CDCA-3F45-525C019B0F6E}"/>
-              </a:ext>
-            </a:extLst>
-          </p:cNvPr>
+          <p:cNvPr id="4" name="Rounded Rectangle 17"/>
           <p:cNvSpPr/>
           <p:nvPr/>
         </p:nvSpPr>
@@ -16697,13 +14970,7 @@
       </p:sp>
       <p:sp>
         <p:nvSpPr>
-          <p:cNvPr id="5" name="TextBox 4">
-            <a:extLst>
-              <a:ext uri="{FF2B5EF4-FFF2-40B4-BE49-F238E27FC236}">
-                <a16:creationId xmlns:a16="http://schemas.microsoft.com/office/drawing/2014/main" id="{F307F9C1-5C09-6CA9-832B-E75859A6EB47}"/>
-              </a:ext>
-            </a:extLst>
-          </p:cNvPr>
+          <p:cNvPr id="5" name="TextBox 4"/>
           <p:cNvSpPr txBox="1"/>
           <p:nvPr/>
         </p:nvSpPr>
@@ -16729,13 +14996,7 @@
       </p:sp>
       <p:sp>
         <p:nvSpPr>
-          <p:cNvPr id="6" name="TextBox 5">
-            <a:extLst>
-              <a:ext uri="{FF2B5EF4-FFF2-40B4-BE49-F238E27FC236}">
-                <a16:creationId xmlns:a16="http://schemas.microsoft.com/office/drawing/2014/main" id="{9BBE0B37-72AD-4F7D-E4C8-B12A3C8882F4}"/>
-              </a:ext>
-            </a:extLst>
-          </p:cNvPr>
+          <p:cNvPr id="6" name="TextBox 5"/>
           <p:cNvSpPr txBox="1"/>
           <p:nvPr/>
         </p:nvSpPr>
@@ -16788,13 +15049,7 @@
       </p:sp>
       <p:pic>
         <p:nvPicPr>
-          <p:cNvPr id="8" name="Picture 7">
-            <a:extLst>
-              <a:ext uri="{FF2B5EF4-FFF2-40B4-BE49-F238E27FC236}">
-                <a16:creationId xmlns:a16="http://schemas.microsoft.com/office/drawing/2014/main" id="{47E6B52D-49B6-4EEA-13E4-129F6D1DF9B3}"/>
-              </a:ext>
-            </a:extLst>
-          </p:cNvPr>
+          <p:cNvPr id="8" name="Picture 7"/>
           <p:cNvPicPr>
             <a:picLocks noChangeAspect="1"/>
           </p:cNvPicPr>
@@ -16817,11 +15072,6 @@
         </p:spPr>
       </p:pic>
     </p:spTree>
-    <p:extLst>
-      <p:ext uri="{BB962C8B-B14F-4D97-AF65-F5344CB8AC3E}">
-        <p14:creationId xmlns:p14="http://schemas.microsoft.com/office/powerpoint/2010/main" val="2277851726"/>
-      </p:ext>
-    </p:extLst>
   </p:cSld>
   <p:clrMapOvr>
     <a:masterClrMapping/>
@@ -16834,13 +15084,7 @@
   <p:cSld>
     <p:spTree>
       <p:nvGrpSpPr>
-        <p:cNvPr id="1" name="">
-          <a:extLst>
-            <a:ext uri="{FF2B5EF4-FFF2-40B4-BE49-F238E27FC236}">
-              <a16:creationId xmlns:a16="http://schemas.microsoft.com/office/drawing/2014/main" id="{AE4E256D-C2DC-A7DB-C327-098A63C431E6}"/>
-            </a:ext>
-          </a:extLst>
-        </p:cNvPr>
+        <p:cNvPr id="1" name=""/>
         <p:cNvGrpSpPr/>
         <p:nvPr/>
       </p:nvGrpSpPr>
@@ -16854,13 +15098,7 @@
       </p:grpSpPr>
       <p:sp>
         <p:nvSpPr>
-          <p:cNvPr id="4" name="Rounded Rectangle 17">
-            <a:extLst>
-              <a:ext uri="{FF2B5EF4-FFF2-40B4-BE49-F238E27FC236}">
-                <a16:creationId xmlns:a16="http://schemas.microsoft.com/office/drawing/2014/main" id="{94F347D4-54FD-E594-5DCC-59205566D95A}"/>
-              </a:ext>
-            </a:extLst>
-          </p:cNvPr>
+          <p:cNvPr id="4" name="Rounded Rectangle 17"/>
           <p:cNvSpPr/>
           <p:nvPr/>
         </p:nvSpPr>
@@ -16921,13 +15159,7 @@
       </p:sp>
       <p:sp>
         <p:nvSpPr>
-          <p:cNvPr id="5" name="TextBox 4">
-            <a:extLst>
-              <a:ext uri="{FF2B5EF4-FFF2-40B4-BE49-F238E27FC236}">
-                <a16:creationId xmlns:a16="http://schemas.microsoft.com/office/drawing/2014/main" id="{0C549235-4B38-C9A5-8D30-1AD956EDA30C}"/>
-              </a:ext>
-            </a:extLst>
-          </p:cNvPr>
+          <p:cNvPr id="5" name="TextBox 4"/>
           <p:cNvSpPr txBox="1"/>
           <p:nvPr/>
         </p:nvSpPr>
@@ -16953,27 +15185,15 @@
       </p:sp>
       <p:graphicFrame>
         <p:nvGraphicFramePr>
-          <p:cNvPr id="2" name="Table 1">
-            <a:extLst>
-              <a:ext uri="{FF2B5EF4-FFF2-40B4-BE49-F238E27FC236}">
-                <a16:creationId xmlns:a16="http://schemas.microsoft.com/office/drawing/2014/main" id="{C1E12563-B935-A6C5-78F6-CB55F97093D6}"/>
-              </a:ext>
-            </a:extLst>
-          </p:cNvPr>
+          <p:cNvPr id="2" name="Table 1"/>
           <p:cNvGraphicFramePr>
             <a:graphicFrameLocks noGrp="1"/>
           </p:cNvGraphicFramePr>
-          <p:nvPr>
-            <p:extLst>
-              <p:ext uri="{D42A27DB-BD31-4B8C-83A1-F6EECF244321}">
-                <p14:modId xmlns:p14="http://schemas.microsoft.com/office/powerpoint/2010/main" val="888454614"/>
-              </p:ext>
-            </p:extLst>
-          </p:nvPr>
+          <p:nvPr/>
         </p:nvGraphicFramePr>
         <p:xfrm>
-          <a:off x="2032000" y="1140290"/>
-          <a:ext cx="8128000" cy="4820920"/>
+          <a:off x="2032000" y="1140460"/>
+          <a:ext cx="7467600" cy="4820920"/>
         </p:xfrm>
         <a:graphic>
           <a:graphicData uri="http://schemas.openxmlformats.org/drawingml/2006/table">
@@ -16982,17 +15202,17 @@
                 <a:tableStyleId>{5C22544A-7EE6-4342-B048-85BDC9FD1C3A}</a:tableStyleId>
               </a:tblPr>
               <a:tblGrid>
-                <a:gridCol w="4064000">
+                <a:gridCol w="3733800">
                   <a:extLst>
                     <a:ext uri="{9D8B030D-6E8A-4147-A177-3AD203B41FA5}">
-                      <a16:colId xmlns:a16="http://schemas.microsoft.com/office/drawing/2014/main" val="1710871496"/>
+                      <a16:colId xmlns:a16="http://schemas.microsoft.com/office/drawing/2014/main" val="20000"/>
                     </a:ext>
                   </a:extLst>
                 </a:gridCol>
-                <a:gridCol w="4064000">
+                <a:gridCol w="3733800">
                   <a:extLst>
                     <a:ext uri="{9D8B030D-6E8A-4147-A177-3AD203B41FA5}">
-                      <a16:colId xmlns:a16="http://schemas.microsoft.com/office/drawing/2014/main" val="2700541616"/>
+                      <a16:colId xmlns:a16="http://schemas.microsoft.com/office/drawing/2014/main" val="20001"/>
                     </a:ext>
                   </a:extLst>
                 </a:gridCol>
@@ -17032,7 +15252,7 @@
                 </a:tc>
                 <a:extLst>
                   <a:ext uri="{0D108BD9-81ED-4DB2-BD59-A6C34878D82A}">
-                    <a16:rowId xmlns:a16="http://schemas.microsoft.com/office/drawing/2014/main" val="2145155687"/>
+                    <a16:rowId xmlns:a16="http://schemas.microsoft.com/office/drawing/2014/main" val="10000"/>
                   </a:ext>
                 </a:extLst>
               </a:tr>
@@ -17071,7 +15291,7 @@
                 </a:tc>
                 <a:extLst>
                   <a:ext uri="{0D108BD9-81ED-4DB2-BD59-A6C34878D82A}">
-                    <a16:rowId xmlns:a16="http://schemas.microsoft.com/office/drawing/2014/main" val="409415285"/>
+                    <a16:rowId xmlns:a16="http://schemas.microsoft.com/office/drawing/2014/main" val="10001"/>
                   </a:ext>
                 </a:extLst>
               </a:tr>
@@ -17110,7 +15330,7 @@
                 </a:tc>
                 <a:extLst>
                   <a:ext uri="{0D108BD9-81ED-4DB2-BD59-A6C34878D82A}">
-                    <a16:rowId xmlns:a16="http://schemas.microsoft.com/office/drawing/2014/main" val="2481480352"/>
+                    <a16:rowId xmlns:a16="http://schemas.microsoft.com/office/drawing/2014/main" val="10002"/>
                   </a:ext>
                 </a:extLst>
               </a:tr>
@@ -17149,7 +15369,7 @@
                 </a:tc>
                 <a:extLst>
                   <a:ext uri="{0D108BD9-81ED-4DB2-BD59-A6C34878D82A}">
-                    <a16:rowId xmlns:a16="http://schemas.microsoft.com/office/drawing/2014/main" val="4042492231"/>
+                    <a16:rowId xmlns:a16="http://schemas.microsoft.com/office/drawing/2014/main" val="10003"/>
                   </a:ext>
                 </a:extLst>
               </a:tr>
@@ -17188,7 +15408,7 @@
                 </a:tc>
                 <a:extLst>
                   <a:ext uri="{0D108BD9-81ED-4DB2-BD59-A6C34878D82A}">
-                    <a16:rowId xmlns:a16="http://schemas.microsoft.com/office/drawing/2014/main" val="2754329628"/>
+                    <a16:rowId xmlns:a16="http://schemas.microsoft.com/office/drawing/2014/main" val="10004"/>
                   </a:ext>
                 </a:extLst>
               </a:tr>
@@ -17227,7 +15447,7 @@
                 </a:tc>
                 <a:extLst>
                   <a:ext uri="{0D108BD9-81ED-4DB2-BD59-A6C34878D82A}">
-                    <a16:rowId xmlns:a16="http://schemas.microsoft.com/office/drawing/2014/main" val="2256247316"/>
+                    <a16:rowId xmlns:a16="http://schemas.microsoft.com/office/drawing/2014/main" val="10005"/>
                   </a:ext>
                 </a:extLst>
               </a:tr>
@@ -17266,7 +15486,7 @@
                 </a:tc>
                 <a:extLst>
                   <a:ext uri="{0D108BD9-81ED-4DB2-BD59-A6C34878D82A}">
-                    <a16:rowId xmlns:a16="http://schemas.microsoft.com/office/drawing/2014/main" val="876654899"/>
+                    <a16:rowId xmlns:a16="http://schemas.microsoft.com/office/drawing/2014/main" val="10006"/>
                   </a:ext>
                 </a:extLst>
               </a:tr>
@@ -17305,7 +15525,7 @@
                 </a:tc>
                 <a:extLst>
                   <a:ext uri="{0D108BD9-81ED-4DB2-BD59-A6C34878D82A}">
-                    <a16:rowId xmlns:a16="http://schemas.microsoft.com/office/drawing/2014/main" val="503689767"/>
+                    <a16:rowId xmlns:a16="http://schemas.microsoft.com/office/drawing/2014/main" val="10007"/>
                   </a:ext>
                 </a:extLst>
               </a:tr>
@@ -17344,7 +15564,7 @@
                 </a:tc>
                 <a:extLst>
                   <a:ext uri="{0D108BD9-81ED-4DB2-BD59-A6C34878D82A}">
-                    <a16:rowId xmlns:a16="http://schemas.microsoft.com/office/drawing/2014/main" val="4036820642"/>
+                    <a16:rowId xmlns:a16="http://schemas.microsoft.com/office/drawing/2014/main" val="10008"/>
                   </a:ext>
                 </a:extLst>
               </a:tr>
@@ -17383,7 +15603,7 @@
                 </a:tc>
                 <a:extLst>
                   <a:ext uri="{0D108BD9-81ED-4DB2-BD59-A6C34878D82A}">
-                    <a16:rowId xmlns:a16="http://schemas.microsoft.com/office/drawing/2014/main" val="2777316242"/>
+                    <a16:rowId xmlns:a16="http://schemas.microsoft.com/office/drawing/2014/main" val="10009"/>
                   </a:ext>
                 </a:extLst>
               </a:tr>
@@ -17422,7 +15642,7 @@
                 </a:tc>
                 <a:extLst>
                   <a:ext uri="{0D108BD9-81ED-4DB2-BD59-A6C34878D82A}">
-                    <a16:rowId xmlns:a16="http://schemas.microsoft.com/office/drawing/2014/main" val="869095380"/>
+                    <a16:rowId xmlns:a16="http://schemas.microsoft.com/office/drawing/2014/main" val="10010"/>
                   </a:ext>
                 </a:extLst>
               </a:tr>
@@ -17461,7 +15681,7 @@
                 </a:tc>
                 <a:extLst>
                   <a:ext uri="{0D108BD9-81ED-4DB2-BD59-A6C34878D82A}">
-                    <a16:rowId xmlns:a16="http://schemas.microsoft.com/office/drawing/2014/main" val="2565607683"/>
+                    <a16:rowId xmlns:a16="http://schemas.microsoft.com/office/drawing/2014/main" val="10011"/>
                   </a:ext>
                 </a:extLst>
               </a:tr>
@@ -17500,7 +15720,7 @@
                 </a:tc>
                 <a:extLst>
                   <a:ext uri="{0D108BD9-81ED-4DB2-BD59-A6C34878D82A}">
-                    <a16:rowId xmlns:a16="http://schemas.microsoft.com/office/drawing/2014/main" val="2248322887"/>
+                    <a16:rowId xmlns:a16="http://schemas.microsoft.com/office/drawing/2014/main" val="10012"/>
                   </a:ext>
                 </a:extLst>
               </a:tr>
@@ -17509,11 +15729,6 @@
         </a:graphic>
       </p:graphicFrame>
     </p:spTree>
-    <p:extLst>
-      <p:ext uri="{BB962C8B-B14F-4D97-AF65-F5344CB8AC3E}">
-        <p14:creationId xmlns:p14="http://schemas.microsoft.com/office/powerpoint/2010/main" val="3107834802"/>
-      </p:ext>
-    </p:extLst>
   </p:cSld>
   <p:clrMapOvr>
     <a:masterClrMapping/>
@@ -17553,13 +15768,7 @@
       </p:grpSpPr>
       <p:sp>
         <p:nvSpPr>
-          <p:cNvPr id="2" name="Rounded Rectangle 17">
-            <a:extLst>
-              <a:ext uri="{FF2B5EF4-FFF2-40B4-BE49-F238E27FC236}">
-                <a16:creationId xmlns:a16="http://schemas.microsoft.com/office/drawing/2014/main" id="{042E44EE-FDDE-6E91-88DD-E9CB42F51300}"/>
-              </a:ext>
-            </a:extLst>
-          </p:cNvPr>
+          <p:cNvPr id="2" name="Rounded Rectangle 17"/>
           <p:cNvSpPr/>
           <p:nvPr/>
         </p:nvSpPr>
@@ -17619,13 +15828,7 @@
       </p:sp>
       <p:pic>
         <p:nvPicPr>
-          <p:cNvPr id="5" name="Picture 4">
-            <a:extLst>
-              <a:ext uri="{FF2B5EF4-FFF2-40B4-BE49-F238E27FC236}">
-                <a16:creationId xmlns:a16="http://schemas.microsoft.com/office/drawing/2014/main" id="{6E91B5C2-4C0B-E2C4-1889-F1184977CF64}"/>
-              </a:ext>
-            </a:extLst>
-          </p:cNvPr>
+          <p:cNvPr id="5" name="Picture 4"/>
           <p:cNvPicPr/>
           <p:nvPr/>
         </p:nvPicPr>
@@ -17651,13 +15854,7 @@
       </p:pic>
       <p:sp>
         <p:nvSpPr>
-          <p:cNvPr id="11" name="TextBox 10">
-            <a:extLst>
-              <a:ext uri="{FF2B5EF4-FFF2-40B4-BE49-F238E27FC236}">
-                <a16:creationId xmlns:a16="http://schemas.microsoft.com/office/drawing/2014/main" id="{8409BCE6-5464-40BA-CCD8-3513BD9E2256}"/>
-              </a:ext>
-            </a:extLst>
-          </p:cNvPr>
+          <p:cNvPr id="11" name="TextBox 10"/>
           <p:cNvSpPr txBox="1"/>
           <p:nvPr/>
         </p:nvSpPr>
@@ -17704,11 +15901,6 @@
         </p:txBody>
       </p:sp>
     </p:spTree>
-    <p:extLst>
-      <p:ext uri="{BB962C8B-B14F-4D97-AF65-F5344CB8AC3E}">
-        <p14:creationId xmlns:p14="http://schemas.microsoft.com/office/powerpoint/2010/main" val="724031933"/>
-      </p:ext>
-    </p:extLst>
   </p:cSld>
   <p:clrMapOvr>
     <a:masterClrMapping/>
@@ -17721,13 +15913,7 @@
   <p:cSld>
     <p:spTree>
       <p:nvGrpSpPr>
-        <p:cNvPr id="1" name="">
-          <a:extLst>
-            <a:ext uri="{FF2B5EF4-FFF2-40B4-BE49-F238E27FC236}">
-              <a16:creationId xmlns:a16="http://schemas.microsoft.com/office/drawing/2014/main" id="{C0329DDE-AACA-8C98-C29F-DFD63E3221EB}"/>
-            </a:ext>
-          </a:extLst>
-        </p:cNvPr>
+        <p:cNvPr id="1" name=""/>
         <p:cNvGrpSpPr/>
         <p:nvPr/>
       </p:nvGrpSpPr>
@@ -17741,13 +15927,7 @@
       </p:grpSpPr>
       <p:sp>
         <p:nvSpPr>
-          <p:cNvPr id="4" name="Rounded Rectangle 17">
-            <a:extLst>
-              <a:ext uri="{FF2B5EF4-FFF2-40B4-BE49-F238E27FC236}">
-                <a16:creationId xmlns:a16="http://schemas.microsoft.com/office/drawing/2014/main" id="{3789CC3E-77A2-29BF-78C9-BDC95EA13054}"/>
-              </a:ext>
-            </a:extLst>
-          </p:cNvPr>
+          <p:cNvPr id="4" name="Rounded Rectangle 17"/>
           <p:cNvSpPr/>
           <p:nvPr/>
         </p:nvSpPr>
@@ -17808,13 +15988,7 @@
       </p:sp>
       <p:sp>
         <p:nvSpPr>
-          <p:cNvPr id="5" name="TextBox 4">
-            <a:extLst>
-              <a:ext uri="{FF2B5EF4-FFF2-40B4-BE49-F238E27FC236}">
-                <a16:creationId xmlns:a16="http://schemas.microsoft.com/office/drawing/2014/main" id="{5D4AE181-6373-44C4-5074-6818FA99ECC6}"/>
-              </a:ext>
-            </a:extLst>
-          </p:cNvPr>
+          <p:cNvPr id="5" name="TextBox 4"/>
           <p:cNvSpPr txBox="1"/>
           <p:nvPr/>
         </p:nvSpPr>
@@ -17840,13 +16014,7 @@
       </p:sp>
       <p:sp>
         <p:nvSpPr>
-          <p:cNvPr id="6" name="TextBox 5">
-            <a:extLst>
-              <a:ext uri="{FF2B5EF4-FFF2-40B4-BE49-F238E27FC236}">
-                <a16:creationId xmlns:a16="http://schemas.microsoft.com/office/drawing/2014/main" id="{149B9401-28DD-6B24-D242-DCAA49F5F806}"/>
-              </a:ext>
-            </a:extLst>
-          </p:cNvPr>
+          <p:cNvPr id="6" name="TextBox 5"/>
           <p:cNvSpPr txBox="1"/>
           <p:nvPr/>
         </p:nvSpPr>
@@ -17921,11 +16089,6 @@
         </p:txBody>
       </p:sp>
     </p:spTree>
-    <p:extLst>
-      <p:ext uri="{BB962C8B-B14F-4D97-AF65-F5344CB8AC3E}">
-        <p14:creationId xmlns:p14="http://schemas.microsoft.com/office/powerpoint/2010/main" val="1470752644"/>
-      </p:ext>
-    </p:extLst>
   </p:cSld>
   <p:clrMapOvr>
     <a:masterClrMapping/>
@@ -17960,13 +16123,7 @@
       </p:grpSpPr>
       <p:pic>
         <p:nvPicPr>
-          <p:cNvPr id="4" name="Picture 3" descr="11,400+ Thank You On Red Stock Photos, Pictures &amp; Royalty-Free Images -  iStock">
-            <a:extLst>
-              <a:ext uri="{FF2B5EF4-FFF2-40B4-BE49-F238E27FC236}">
-                <a16:creationId xmlns:a16="http://schemas.microsoft.com/office/drawing/2014/main" id="{078798B7-AD48-485A-9438-5C9181D990E8}"/>
-              </a:ext>
-            </a:extLst>
-          </p:cNvPr>
+          <p:cNvPr id="4" name="Picture 3" descr="11,400+ Thank You On Red Stock Photos, Pictures &amp; Royalty-Free Images -  iStock"/>
           <p:cNvPicPr>
             <a:picLocks noChangeAspect="1"/>
           </p:cNvPicPr>
@@ -17989,11 +16146,6 @@
         </p:spPr>
       </p:pic>
     </p:spTree>
-    <p:extLst>
-      <p:ext uri="{BB962C8B-B14F-4D97-AF65-F5344CB8AC3E}">
-        <p14:creationId xmlns:p14="http://schemas.microsoft.com/office/powerpoint/2010/main" val="3488524852"/>
-      </p:ext>
-    </p:extLst>
   </p:cSld>
   <p:clrMapOvr>
     <a:masterClrMapping/>
@@ -18020,16 +16172,8 @@
       </p:grpSpPr>
       <p:sp>
         <p:nvSpPr>
-          <p:cNvPr id="8" name="Text Placeholder 6">
-            <a:extLst>
-              <a:ext uri="{FF2B5EF4-FFF2-40B4-BE49-F238E27FC236}">
-                <a16:creationId xmlns:a16="http://schemas.microsoft.com/office/drawing/2014/main" id="{32823A3D-2D05-3E2C-A45E-040FADD03327}"/>
-              </a:ext>
-            </a:extLst>
-          </p:cNvPr>
-          <p:cNvSpPr txBox="1">
-            <a:spLocks/>
-          </p:cNvSpPr>
+          <p:cNvPr id="8" name="Text Placeholder 6"/>
+          <p:cNvSpPr txBox="1"/>
           <p:nvPr/>
         </p:nvSpPr>
         <p:spPr>
@@ -18234,13 +16378,7 @@
       </p:sp>
       <p:pic>
         <p:nvPicPr>
-          <p:cNvPr id="9" name="Picture 8">
-            <a:extLst>
-              <a:ext uri="{FF2B5EF4-FFF2-40B4-BE49-F238E27FC236}">
-                <a16:creationId xmlns:a16="http://schemas.microsoft.com/office/drawing/2014/main" id="{C85D3F57-9DD8-0643-78E4-5591C60CE0CC}"/>
-              </a:ext>
-            </a:extLst>
-          </p:cNvPr>
+          <p:cNvPr id="9" name="Picture 8"/>
           <p:cNvPicPr/>
           <p:nvPr/>
         </p:nvPicPr>
@@ -18266,13 +16404,7 @@
       </p:pic>
       <p:sp>
         <p:nvSpPr>
-          <p:cNvPr id="4" name="Rounded Rectangle 17">
-            <a:extLst>
-              <a:ext uri="{FF2B5EF4-FFF2-40B4-BE49-F238E27FC236}">
-                <a16:creationId xmlns:a16="http://schemas.microsoft.com/office/drawing/2014/main" id="{773E3FD2-C926-E7CE-5EE1-0583BBB29208}"/>
-              </a:ext>
-            </a:extLst>
-          </p:cNvPr>
+          <p:cNvPr id="4" name="Rounded Rectangle 17"/>
           <p:cNvSpPr/>
           <p:nvPr/>
         </p:nvSpPr>
@@ -18332,13 +16464,7 @@
       </p:sp>
       <p:sp>
         <p:nvSpPr>
-          <p:cNvPr id="12" name="TextBox 11">
-            <a:extLst>
-              <a:ext uri="{FF2B5EF4-FFF2-40B4-BE49-F238E27FC236}">
-                <a16:creationId xmlns:a16="http://schemas.microsoft.com/office/drawing/2014/main" id="{30308CF7-D6DF-7984-33EB-6587E6FC1E6E}"/>
-              </a:ext>
-            </a:extLst>
-          </p:cNvPr>
+          <p:cNvPr id="12" name="TextBox 11"/>
           <p:cNvSpPr txBox="1"/>
           <p:nvPr/>
         </p:nvSpPr>
@@ -18438,11 +16564,6 @@
         </p:txBody>
       </p:sp>
     </p:spTree>
-    <p:extLst>
-      <p:ext uri="{BB962C8B-B14F-4D97-AF65-F5344CB8AC3E}">
-        <p14:creationId xmlns:p14="http://schemas.microsoft.com/office/powerpoint/2010/main" val="1704114546"/>
-      </p:ext>
-    </p:extLst>
   </p:cSld>
   <p:clrMapOvr>
     <a:masterClrMapping/>
@@ -18469,13 +16590,7 @@
       </p:grpSpPr>
       <p:pic>
         <p:nvPicPr>
-          <p:cNvPr id="4" name="Picture 3">
-            <a:extLst>
-              <a:ext uri="{FF2B5EF4-FFF2-40B4-BE49-F238E27FC236}">
-                <a16:creationId xmlns:a16="http://schemas.microsoft.com/office/drawing/2014/main" id="{6E91B5C2-4C0B-E2C4-1889-F1184977CF64}"/>
-              </a:ext>
-            </a:extLst>
-          </p:cNvPr>
+          <p:cNvPr id="4" name="Picture 3"/>
           <p:cNvPicPr/>
           <p:nvPr/>
         </p:nvPicPr>
@@ -18501,16 +16616,8 @@
       </p:pic>
       <p:sp>
         <p:nvSpPr>
-          <p:cNvPr id="8" name="Text Placeholder 6">
-            <a:extLst>
-              <a:ext uri="{FF2B5EF4-FFF2-40B4-BE49-F238E27FC236}">
-                <a16:creationId xmlns:a16="http://schemas.microsoft.com/office/drawing/2014/main" id="{32823A3D-2D05-3E2C-A45E-040FADD03327}"/>
-              </a:ext>
-            </a:extLst>
-          </p:cNvPr>
-          <p:cNvSpPr txBox="1">
-            <a:spLocks/>
-          </p:cNvSpPr>
+          <p:cNvPr id="8" name="Text Placeholder 6"/>
+          <p:cNvSpPr txBox="1"/>
           <p:nvPr/>
         </p:nvSpPr>
         <p:spPr>
@@ -18715,13 +16822,7 @@
       </p:sp>
       <p:sp>
         <p:nvSpPr>
-          <p:cNvPr id="5" name="Rounded Rectangle 17">
-            <a:extLst>
-              <a:ext uri="{FF2B5EF4-FFF2-40B4-BE49-F238E27FC236}">
-                <a16:creationId xmlns:a16="http://schemas.microsoft.com/office/drawing/2014/main" id="{524C8388-FBE8-586D-8161-64455497AFD3}"/>
-              </a:ext>
-            </a:extLst>
-          </p:cNvPr>
+          <p:cNvPr id="5" name="Rounded Rectangle 17"/>
           <p:cNvSpPr/>
           <p:nvPr/>
         </p:nvSpPr>
@@ -18781,13 +16882,7 @@
       </p:sp>
       <p:sp>
         <p:nvSpPr>
-          <p:cNvPr id="9" name="TextBox 8">
-            <a:extLst>
-              <a:ext uri="{FF2B5EF4-FFF2-40B4-BE49-F238E27FC236}">
-                <a16:creationId xmlns:a16="http://schemas.microsoft.com/office/drawing/2014/main" id="{9C9838F2-D200-DE07-B729-4480354C9FCD}"/>
-              </a:ext>
-            </a:extLst>
-          </p:cNvPr>
+          <p:cNvPr id="9" name="TextBox 8"/>
           <p:cNvSpPr txBox="1"/>
           <p:nvPr/>
         </p:nvSpPr>
@@ -18820,23 +16915,11 @@
       </p:sp>
       <p:graphicFrame>
         <p:nvGraphicFramePr>
-          <p:cNvPr id="11" name="Table 10">
-            <a:extLst>
-              <a:ext uri="{FF2B5EF4-FFF2-40B4-BE49-F238E27FC236}">
-                <a16:creationId xmlns:a16="http://schemas.microsoft.com/office/drawing/2014/main" id="{11192A95-8D9F-1D9B-B922-DFAB96EAB342}"/>
-              </a:ext>
-            </a:extLst>
-          </p:cNvPr>
+          <p:cNvPr id="11" name="Table 10"/>
           <p:cNvGraphicFramePr>
             <a:graphicFrameLocks noGrp="1"/>
           </p:cNvGraphicFramePr>
-          <p:nvPr>
-            <p:extLst>
-              <p:ext uri="{D42A27DB-BD31-4B8C-83A1-F6EECF244321}">
-                <p14:modId xmlns:p14="http://schemas.microsoft.com/office/powerpoint/2010/main" val="2320360492"/>
-              </p:ext>
-            </p:extLst>
-          </p:nvPr>
+          <p:nvPr/>
         </p:nvGraphicFramePr>
         <p:xfrm>
           <a:off x="345898" y="947360"/>
@@ -18852,35 +16935,35 @@
                 <a:gridCol w="648735">
                   <a:extLst>
                     <a:ext uri="{9D8B030D-6E8A-4147-A177-3AD203B41FA5}">
-                      <a16:colId xmlns:a16="http://schemas.microsoft.com/office/drawing/2014/main" val="81232920"/>
+                      <a16:colId xmlns:a16="http://schemas.microsoft.com/office/drawing/2014/main" val="20000"/>
                     </a:ext>
                   </a:extLst>
                 </a:gridCol>
                 <a:gridCol w="2940932">
                   <a:extLst>
                     <a:ext uri="{9D8B030D-6E8A-4147-A177-3AD203B41FA5}">
-                      <a16:colId xmlns:a16="http://schemas.microsoft.com/office/drawing/2014/main" val="126936909"/>
+                      <a16:colId xmlns:a16="http://schemas.microsoft.com/office/drawing/2014/main" val="20001"/>
                     </a:ext>
                   </a:extLst>
                 </a:gridCol>
                 <a:gridCol w="2421944">
                   <a:extLst>
                     <a:ext uri="{9D8B030D-6E8A-4147-A177-3AD203B41FA5}">
-                      <a16:colId xmlns:a16="http://schemas.microsoft.com/office/drawing/2014/main" val="1335324797"/>
+                      <a16:colId xmlns:a16="http://schemas.microsoft.com/office/drawing/2014/main" val="20002"/>
                     </a:ext>
                   </a:extLst>
                 </a:gridCol>
                 <a:gridCol w="2530066">
                   <a:extLst>
                     <a:ext uri="{9D8B030D-6E8A-4147-A177-3AD203B41FA5}">
-                      <a16:colId xmlns:a16="http://schemas.microsoft.com/office/drawing/2014/main" val="2106700366"/>
+                      <a16:colId xmlns:a16="http://schemas.microsoft.com/office/drawing/2014/main" val="20003"/>
                     </a:ext>
                   </a:extLst>
                 </a:gridCol>
                 <a:gridCol w="2847226">
                   <a:extLst>
                     <a:ext uri="{9D8B030D-6E8A-4147-A177-3AD203B41FA5}">
-                      <a16:colId xmlns:a16="http://schemas.microsoft.com/office/drawing/2014/main" val="1029312533"/>
+                      <a16:colId xmlns:a16="http://schemas.microsoft.com/office/drawing/2014/main" val="20004"/>
                     </a:ext>
                   </a:extLst>
                 </a:gridCol>
@@ -18958,7 +17041,7 @@
                 </a:tc>
                 <a:extLst>
                   <a:ext uri="{0D108BD9-81ED-4DB2-BD59-A6C34878D82A}">
-                    <a16:rowId xmlns:a16="http://schemas.microsoft.com/office/drawing/2014/main" val="1880736945"/>
+                    <a16:rowId xmlns:a16="http://schemas.microsoft.com/office/drawing/2014/main" val="10000"/>
                   </a:ext>
                 </a:extLst>
               </a:tr>
@@ -19042,7 +17125,7 @@
                 </a:tc>
                 <a:extLst>
                   <a:ext uri="{0D108BD9-81ED-4DB2-BD59-A6C34878D82A}">
-                    <a16:rowId xmlns:a16="http://schemas.microsoft.com/office/drawing/2014/main" val="3222859081"/>
+                    <a16:rowId xmlns:a16="http://schemas.microsoft.com/office/drawing/2014/main" val="10001"/>
                   </a:ext>
                 </a:extLst>
               </a:tr>
@@ -19122,7 +17205,7 @@
                 </a:tc>
                 <a:extLst>
                   <a:ext uri="{0D108BD9-81ED-4DB2-BD59-A6C34878D82A}">
-                    <a16:rowId xmlns:a16="http://schemas.microsoft.com/office/drawing/2014/main" val="1325578241"/>
+                    <a16:rowId xmlns:a16="http://schemas.microsoft.com/office/drawing/2014/main" val="10002"/>
                   </a:ext>
                 </a:extLst>
               </a:tr>
@@ -19198,7 +17281,7 @@
                 </a:tc>
                 <a:extLst>
                   <a:ext uri="{0D108BD9-81ED-4DB2-BD59-A6C34878D82A}">
-                    <a16:rowId xmlns:a16="http://schemas.microsoft.com/office/drawing/2014/main" val="1106385391"/>
+                    <a16:rowId xmlns:a16="http://schemas.microsoft.com/office/drawing/2014/main" val="10003"/>
                   </a:ext>
                 </a:extLst>
               </a:tr>
@@ -19331,7 +17414,7 @@
                 </a:tc>
                 <a:extLst>
                   <a:ext uri="{0D108BD9-81ED-4DB2-BD59-A6C34878D82A}">
-                    <a16:rowId xmlns:a16="http://schemas.microsoft.com/office/drawing/2014/main" val="2214868754"/>
+                    <a16:rowId xmlns:a16="http://schemas.microsoft.com/office/drawing/2014/main" val="10004"/>
                   </a:ext>
                 </a:extLst>
               </a:tr>
@@ -19419,7 +17502,7 @@
                 </a:tc>
                 <a:extLst>
                   <a:ext uri="{0D108BD9-81ED-4DB2-BD59-A6C34878D82A}">
-                    <a16:rowId xmlns:a16="http://schemas.microsoft.com/office/drawing/2014/main" val="1162433939"/>
+                    <a16:rowId xmlns:a16="http://schemas.microsoft.com/office/drawing/2014/main" val="10005"/>
                   </a:ext>
                 </a:extLst>
               </a:tr>
@@ -19507,7 +17590,7 @@
                 </a:tc>
                 <a:extLst>
                   <a:ext uri="{0D108BD9-81ED-4DB2-BD59-A6C34878D82A}">
-                    <a16:rowId xmlns:a16="http://schemas.microsoft.com/office/drawing/2014/main" val="969661857"/>
+                    <a16:rowId xmlns:a16="http://schemas.microsoft.com/office/drawing/2014/main" val="10006"/>
                   </a:ext>
                 </a:extLst>
               </a:tr>
@@ -19516,11 +17599,6 @@
         </a:graphic>
       </p:graphicFrame>
     </p:spTree>
-    <p:extLst>
-      <p:ext uri="{BB962C8B-B14F-4D97-AF65-F5344CB8AC3E}">
-        <p14:creationId xmlns:p14="http://schemas.microsoft.com/office/powerpoint/2010/main" val="3711155246"/>
-      </p:ext>
-    </p:extLst>
   </p:cSld>
   <p:clrMapOvr>
     <a:masterClrMapping/>
@@ -19547,16 +17625,8 @@
       </p:grpSpPr>
       <p:sp>
         <p:nvSpPr>
-          <p:cNvPr id="8" name="Text Placeholder 6">
-            <a:extLst>
-              <a:ext uri="{FF2B5EF4-FFF2-40B4-BE49-F238E27FC236}">
-                <a16:creationId xmlns:a16="http://schemas.microsoft.com/office/drawing/2014/main" id="{32823A3D-2D05-3E2C-A45E-040FADD03327}"/>
-              </a:ext>
-            </a:extLst>
-          </p:cNvPr>
-          <p:cNvSpPr txBox="1">
-            <a:spLocks/>
-          </p:cNvSpPr>
+          <p:cNvPr id="8" name="Text Placeholder 6"/>
+          <p:cNvSpPr txBox="1"/>
           <p:nvPr/>
         </p:nvSpPr>
         <p:spPr>
@@ -19761,13 +17831,7 @@
       </p:sp>
       <p:pic>
         <p:nvPicPr>
-          <p:cNvPr id="3" name="Picture 2">
-            <a:extLst>
-              <a:ext uri="{FF2B5EF4-FFF2-40B4-BE49-F238E27FC236}">
-                <a16:creationId xmlns:a16="http://schemas.microsoft.com/office/drawing/2014/main" id="{C0F44D8B-63D6-5106-35C9-0484FD7D3A3B}"/>
-              </a:ext>
-            </a:extLst>
-          </p:cNvPr>
+          <p:cNvPr id="3" name="Picture 2"/>
           <p:cNvPicPr/>
           <p:nvPr/>
         </p:nvPicPr>
@@ -19793,13 +17857,7 @@
       </p:pic>
       <p:sp>
         <p:nvSpPr>
-          <p:cNvPr id="4" name="Rounded Rectangle 17">
-            <a:extLst>
-              <a:ext uri="{FF2B5EF4-FFF2-40B4-BE49-F238E27FC236}">
-                <a16:creationId xmlns:a16="http://schemas.microsoft.com/office/drawing/2014/main" id="{9EF10894-373F-FF00-44A1-44EC82918A22}"/>
-              </a:ext>
-            </a:extLst>
-          </p:cNvPr>
+          <p:cNvPr id="4" name="Rounded Rectangle 17"/>
           <p:cNvSpPr/>
           <p:nvPr/>
         </p:nvSpPr>
@@ -19859,23 +17917,11 @@
       </p:sp>
       <p:graphicFrame>
         <p:nvGraphicFramePr>
-          <p:cNvPr id="5" name="Table 4">
-            <a:extLst>
-              <a:ext uri="{FF2B5EF4-FFF2-40B4-BE49-F238E27FC236}">
-                <a16:creationId xmlns:a16="http://schemas.microsoft.com/office/drawing/2014/main" id="{A7DB2A79-9622-BCD9-83B4-483F2E172C75}"/>
-              </a:ext>
-            </a:extLst>
-          </p:cNvPr>
+          <p:cNvPr id="5" name="Table 4"/>
           <p:cNvGraphicFramePr>
             <a:graphicFrameLocks noGrp="1"/>
           </p:cNvGraphicFramePr>
-          <p:nvPr>
-            <p:extLst>
-              <p:ext uri="{D42A27DB-BD31-4B8C-83A1-F6EECF244321}">
-                <p14:modId xmlns:p14="http://schemas.microsoft.com/office/powerpoint/2010/main" val="2028114898"/>
-              </p:ext>
-            </p:extLst>
-          </p:nvPr>
+          <p:nvPr/>
         </p:nvGraphicFramePr>
         <p:xfrm>
           <a:off x="268711" y="912150"/>
@@ -19891,21 +17937,21 @@
                 <a:gridCol w="2693678">
                   <a:extLst>
                     <a:ext uri="{9D8B030D-6E8A-4147-A177-3AD203B41FA5}">
-                      <a16:colId xmlns:a16="http://schemas.microsoft.com/office/drawing/2014/main" val="2886634603"/>
+                      <a16:colId xmlns:a16="http://schemas.microsoft.com/office/drawing/2014/main" val="20000"/>
                     </a:ext>
                   </a:extLst>
                 </a:gridCol>
                 <a:gridCol w="4314079">
                   <a:extLst>
                     <a:ext uri="{9D8B030D-6E8A-4147-A177-3AD203B41FA5}">
-                      <a16:colId xmlns:a16="http://schemas.microsoft.com/office/drawing/2014/main" val="1965526379"/>
+                      <a16:colId xmlns:a16="http://schemas.microsoft.com/office/drawing/2014/main" val="20001"/>
                     </a:ext>
                   </a:extLst>
                 </a:gridCol>
                 <a:gridCol w="4659523">
                   <a:extLst>
                     <a:ext uri="{9D8B030D-6E8A-4147-A177-3AD203B41FA5}">
-                      <a16:colId xmlns:a16="http://schemas.microsoft.com/office/drawing/2014/main" val="2869546241"/>
+                      <a16:colId xmlns:a16="http://schemas.microsoft.com/office/drawing/2014/main" val="20002"/>
                     </a:ext>
                   </a:extLst>
                 </a:gridCol>
@@ -19961,7 +18007,7 @@
                 </a:tc>
                 <a:extLst>
                   <a:ext uri="{0D108BD9-81ED-4DB2-BD59-A6C34878D82A}">
-                    <a16:rowId xmlns:a16="http://schemas.microsoft.com/office/drawing/2014/main" val="627140537"/>
+                    <a16:rowId xmlns:a16="http://schemas.microsoft.com/office/drawing/2014/main" val="10000"/>
                   </a:ext>
                 </a:extLst>
               </a:tr>
@@ -20016,7 +18062,7 @@
                 </a:tc>
                 <a:extLst>
                   <a:ext uri="{0D108BD9-81ED-4DB2-BD59-A6C34878D82A}">
-                    <a16:rowId xmlns:a16="http://schemas.microsoft.com/office/drawing/2014/main" val="1907690138"/>
+                    <a16:rowId xmlns:a16="http://schemas.microsoft.com/office/drawing/2014/main" val="10001"/>
                   </a:ext>
                 </a:extLst>
               </a:tr>
@@ -20071,7 +18117,7 @@
                 </a:tc>
                 <a:extLst>
                   <a:ext uri="{0D108BD9-81ED-4DB2-BD59-A6C34878D82A}">
-                    <a16:rowId xmlns:a16="http://schemas.microsoft.com/office/drawing/2014/main" val="2879319615"/>
+                    <a16:rowId xmlns:a16="http://schemas.microsoft.com/office/drawing/2014/main" val="10002"/>
                   </a:ext>
                 </a:extLst>
               </a:tr>
@@ -20129,7 +18175,7 @@
                 </a:tc>
                 <a:extLst>
                   <a:ext uri="{0D108BD9-81ED-4DB2-BD59-A6C34878D82A}">
-                    <a16:rowId xmlns:a16="http://schemas.microsoft.com/office/drawing/2014/main" val="965428344"/>
+                    <a16:rowId xmlns:a16="http://schemas.microsoft.com/office/drawing/2014/main" val="10003"/>
                   </a:ext>
                 </a:extLst>
               </a:tr>
@@ -20184,7 +18230,7 @@
                 </a:tc>
                 <a:extLst>
                   <a:ext uri="{0D108BD9-81ED-4DB2-BD59-A6C34878D82A}">
-                    <a16:rowId xmlns:a16="http://schemas.microsoft.com/office/drawing/2014/main" val="469641153"/>
+                    <a16:rowId xmlns:a16="http://schemas.microsoft.com/office/drawing/2014/main" val="10004"/>
                   </a:ext>
                 </a:extLst>
               </a:tr>
@@ -20240,7 +18286,7 @@
                 </a:tc>
                 <a:extLst>
                   <a:ext uri="{0D108BD9-81ED-4DB2-BD59-A6C34878D82A}">
-                    <a16:rowId xmlns:a16="http://schemas.microsoft.com/office/drawing/2014/main" val="2953350241"/>
+                    <a16:rowId xmlns:a16="http://schemas.microsoft.com/office/drawing/2014/main" val="10005"/>
                   </a:ext>
                 </a:extLst>
               </a:tr>
@@ -20296,7 +18342,7 @@
                 </a:tc>
                 <a:extLst>
                   <a:ext uri="{0D108BD9-81ED-4DB2-BD59-A6C34878D82A}">
-                    <a16:rowId xmlns:a16="http://schemas.microsoft.com/office/drawing/2014/main" val="161960273"/>
+                    <a16:rowId xmlns:a16="http://schemas.microsoft.com/office/drawing/2014/main" val="10006"/>
                   </a:ext>
                 </a:extLst>
               </a:tr>
@@ -20306,13 +18352,7 @@
       </p:graphicFrame>
       <p:sp>
         <p:nvSpPr>
-          <p:cNvPr id="7" name="TextBox 6">
-            <a:extLst>
-              <a:ext uri="{FF2B5EF4-FFF2-40B4-BE49-F238E27FC236}">
-                <a16:creationId xmlns:a16="http://schemas.microsoft.com/office/drawing/2014/main" id="{E03BC5D8-EC04-F89E-33F0-54F5FFF6C67B}"/>
-              </a:ext>
-            </a:extLst>
-          </p:cNvPr>
+          <p:cNvPr id="7" name="TextBox 6"/>
           <p:cNvSpPr txBox="1"/>
           <p:nvPr/>
         </p:nvSpPr>
@@ -20340,11 +18380,6 @@
         </p:txBody>
       </p:sp>
     </p:spTree>
-    <p:extLst>
-      <p:ext uri="{BB962C8B-B14F-4D97-AF65-F5344CB8AC3E}">
-        <p14:creationId xmlns:p14="http://schemas.microsoft.com/office/powerpoint/2010/main" val="2689925836"/>
-      </p:ext>
-    </p:extLst>
   </p:cSld>
   <p:clrMapOvr>
     <a:masterClrMapping/>
@@ -20371,13 +18406,7 @@
       </p:grpSpPr>
       <p:sp>
         <p:nvSpPr>
-          <p:cNvPr id="3" name="Text Placeholder 2">
-            <a:extLst>
-              <a:ext uri="{FF2B5EF4-FFF2-40B4-BE49-F238E27FC236}">
-                <a16:creationId xmlns:a16="http://schemas.microsoft.com/office/drawing/2014/main" id="{ABA39312-8A41-C7D3-47A5-50A867BE42DD}"/>
-              </a:ext>
-            </a:extLst>
-          </p:cNvPr>
+          <p:cNvPr id="3" name="Text Placeholder 2"/>
           <p:cNvSpPr>
             <a:spLocks noGrp="1"/>
           </p:cNvSpPr>
@@ -20492,13 +18521,7 @@
       </p:sp>
       <p:sp>
         <p:nvSpPr>
-          <p:cNvPr id="6" name="Rounded Rectangle 17">
-            <a:extLst>
-              <a:ext uri="{FF2B5EF4-FFF2-40B4-BE49-F238E27FC236}">
-                <a16:creationId xmlns:a16="http://schemas.microsoft.com/office/drawing/2014/main" id="{6473780F-FDD5-15C6-EB41-2195676E5332}"/>
-              </a:ext>
-            </a:extLst>
-          </p:cNvPr>
+          <p:cNvPr id="6" name="Rounded Rectangle 17"/>
           <p:cNvSpPr/>
           <p:nvPr/>
         </p:nvSpPr>
@@ -20558,11 +18581,6 @@
         </p:txBody>
       </p:sp>
     </p:spTree>
-    <p:extLst>
-      <p:ext uri="{BB962C8B-B14F-4D97-AF65-F5344CB8AC3E}">
-        <p14:creationId xmlns:p14="http://schemas.microsoft.com/office/powerpoint/2010/main" val="3295904504"/>
-      </p:ext>
-    </p:extLst>
   </p:cSld>
   <p:clrMapOvr>
     <a:masterClrMapping/>
@@ -20589,13 +18607,7 @@
       </p:grpSpPr>
       <p:sp>
         <p:nvSpPr>
-          <p:cNvPr id="3" name="Text Placeholder 2">
-            <a:extLst>
-              <a:ext uri="{FF2B5EF4-FFF2-40B4-BE49-F238E27FC236}">
-                <a16:creationId xmlns:a16="http://schemas.microsoft.com/office/drawing/2014/main" id="{FDCCC40E-8536-60F1-BC34-723332428BFB}"/>
-              </a:ext>
-            </a:extLst>
-          </p:cNvPr>
+          <p:cNvPr id="3" name="Text Placeholder 2"/>
           <p:cNvSpPr>
             <a:spLocks noGrp="1"/>
           </p:cNvSpPr>
@@ -20688,13 +18700,7 @@
       </p:sp>
       <p:sp>
         <p:nvSpPr>
-          <p:cNvPr id="4" name="Rounded Rectangle 17">
-            <a:extLst>
-              <a:ext uri="{FF2B5EF4-FFF2-40B4-BE49-F238E27FC236}">
-                <a16:creationId xmlns:a16="http://schemas.microsoft.com/office/drawing/2014/main" id="{29365DB9-FA38-7CFE-AFE7-71BB60CD2387}"/>
-              </a:ext>
-            </a:extLst>
-          </p:cNvPr>
+          <p:cNvPr id="4" name="Rounded Rectangle 17"/>
           <p:cNvSpPr/>
           <p:nvPr/>
         </p:nvSpPr>
@@ -20754,11 +18760,6 @@
         </p:txBody>
       </p:sp>
     </p:spTree>
-    <p:extLst>
-      <p:ext uri="{BB962C8B-B14F-4D97-AF65-F5344CB8AC3E}">
-        <p14:creationId xmlns:p14="http://schemas.microsoft.com/office/powerpoint/2010/main" val="3764794009"/>
-      </p:ext>
-    </p:extLst>
   </p:cSld>
   <p:clrMapOvr>
     <a:masterClrMapping/>
@@ -20785,13 +18786,7 @@
       </p:grpSpPr>
       <p:sp>
         <p:nvSpPr>
-          <p:cNvPr id="3" name="Text Placeholder 2">
-            <a:extLst>
-              <a:ext uri="{FF2B5EF4-FFF2-40B4-BE49-F238E27FC236}">
-                <a16:creationId xmlns:a16="http://schemas.microsoft.com/office/drawing/2014/main" id="{15C04390-AA17-2F00-A029-FDA67782619A}"/>
-              </a:ext>
-            </a:extLst>
-          </p:cNvPr>
+          <p:cNvPr id="3" name="Text Placeholder 2"/>
           <p:cNvSpPr>
             <a:spLocks noGrp="1"/>
           </p:cNvSpPr>
@@ -20827,13 +18822,7 @@
       </p:sp>
       <p:sp>
         <p:nvSpPr>
-          <p:cNvPr id="4" name="Rounded Rectangle 17">
-            <a:extLst>
-              <a:ext uri="{FF2B5EF4-FFF2-40B4-BE49-F238E27FC236}">
-                <a16:creationId xmlns:a16="http://schemas.microsoft.com/office/drawing/2014/main" id="{FB10FB67-2697-DD20-452D-E17DBBD36602}"/>
-              </a:ext>
-            </a:extLst>
-          </p:cNvPr>
+          <p:cNvPr id="4" name="Rounded Rectangle 17"/>
           <p:cNvSpPr/>
           <p:nvPr/>
         </p:nvSpPr>
@@ -20906,23 +18895,11 @@
       </p:sp>
       <p:graphicFrame>
         <p:nvGraphicFramePr>
-          <p:cNvPr id="6" name="Table 5">
-            <a:extLst>
-              <a:ext uri="{FF2B5EF4-FFF2-40B4-BE49-F238E27FC236}">
-                <a16:creationId xmlns:a16="http://schemas.microsoft.com/office/drawing/2014/main" id="{223AB4FC-3BF7-5CDC-DD1C-7681A1490532}"/>
-              </a:ext>
-            </a:extLst>
-          </p:cNvPr>
+          <p:cNvPr id="6" name="Table 5"/>
           <p:cNvGraphicFramePr>
             <a:graphicFrameLocks noGrp="1"/>
           </p:cNvGraphicFramePr>
-          <p:nvPr>
-            <p:extLst>
-              <p:ext uri="{D42A27DB-BD31-4B8C-83A1-F6EECF244321}">
-                <p14:modId xmlns:p14="http://schemas.microsoft.com/office/powerpoint/2010/main" val="212340894"/>
-              </p:ext>
-            </p:extLst>
-          </p:nvPr>
+          <p:nvPr/>
         </p:nvGraphicFramePr>
         <p:xfrm>
           <a:off x="2615238" y="1956543"/>
@@ -20938,14 +18915,14 @@
                 <a:gridCol w="3320097">
                   <a:extLst>
                     <a:ext uri="{9D8B030D-6E8A-4147-A177-3AD203B41FA5}">
-                      <a16:colId xmlns:a16="http://schemas.microsoft.com/office/drawing/2014/main" val="2507637304"/>
+                      <a16:colId xmlns:a16="http://schemas.microsoft.com/office/drawing/2014/main" val="20000"/>
                     </a:ext>
                   </a:extLst>
                 </a:gridCol>
                 <a:gridCol w="3730752">
                   <a:extLst>
                     <a:ext uri="{9D8B030D-6E8A-4147-A177-3AD203B41FA5}">
-                      <a16:colId xmlns:a16="http://schemas.microsoft.com/office/drawing/2014/main" val="1513952708"/>
+                      <a16:colId xmlns:a16="http://schemas.microsoft.com/office/drawing/2014/main" val="20001"/>
                     </a:ext>
                   </a:extLst>
                 </a:gridCol>
@@ -20985,7 +18962,7 @@
                 </a:tc>
                 <a:extLst>
                   <a:ext uri="{0D108BD9-81ED-4DB2-BD59-A6C34878D82A}">
-                    <a16:rowId xmlns:a16="http://schemas.microsoft.com/office/drawing/2014/main" val="845258452"/>
+                    <a16:rowId xmlns:a16="http://schemas.microsoft.com/office/drawing/2014/main" val="10000"/>
                   </a:ext>
                 </a:extLst>
               </a:tr>
@@ -21024,7 +19001,7 @@
                 </a:tc>
                 <a:extLst>
                   <a:ext uri="{0D108BD9-81ED-4DB2-BD59-A6C34878D82A}">
-                    <a16:rowId xmlns:a16="http://schemas.microsoft.com/office/drawing/2014/main" val="3734955910"/>
+                    <a16:rowId xmlns:a16="http://schemas.microsoft.com/office/drawing/2014/main" val="10001"/>
                   </a:ext>
                 </a:extLst>
               </a:tr>
@@ -21063,7 +19040,7 @@
                 </a:tc>
                 <a:extLst>
                   <a:ext uri="{0D108BD9-81ED-4DB2-BD59-A6C34878D82A}">
-                    <a16:rowId xmlns:a16="http://schemas.microsoft.com/office/drawing/2014/main" val="2280027821"/>
+                    <a16:rowId xmlns:a16="http://schemas.microsoft.com/office/drawing/2014/main" val="10002"/>
                   </a:ext>
                 </a:extLst>
               </a:tr>
@@ -21102,7 +19079,7 @@
                 </a:tc>
                 <a:extLst>
                   <a:ext uri="{0D108BD9-81ED-4DB2-BD59-A6C34878D82A}">
-                    <a16:rowId xmlns:a16="http://schemas.microsoft.com/office/drawing/2014/main" val="881480654"/>
+                    <a16:rowId xmlns:a16="http://schemas.microsoft.com/office/drawing/2014/main" val="10003"/>
                   </a:ext>
                 </a:extLst>
               </a:tr>
@@ -21141,7 +19118,7 @@
                 </a:tc>
                 <a:extLst>
                   <a:ext uri="{0D108BD9-81ED-4DB2-BD59-A6C34878D82A}">
-                    <a16:rowId xmlns:a16="http://schemas.microsoft.com/office/drawing/2014/main" val="3987725248"/>
+                    <a16:rowId xmlns:a16="http://schemas.microsoft.com/office/drawing/2014/main" val="10004"/>
                   </a:ext>
                 </a:extLst>
               </a:tr>
@@ -21180,7 +19157,7 @@
                 </a:tc>
                 <a:extLst>
                   <a:ext uri="{0D108BD9-81ED-4DB2-BD59-A6C34878D82A}">
-                    <a16:rowId xmlns:a16="http://schemas.microsoft.com/office/drawing/2014/main" val="847018357"/>
+                    <a16:rowId xmlns:a16="http://schemas.microsoft.com/office/drawing/2014/main" val="10005"/>
                   </a:ext>
                 </a:extLst>
               </a:tr>
@@ -21219,7 +19196,7 @@
                 </a:tc>
                 <a:extLst>
                   <a:ext uri="{0D108BD9-81ED-4DB2-BD59-A6C34878D82A}">
-                    <a16:rowId xmlns:a16="http://schemas.microsoft.com/office/drawing/2014/main" val="3093951865"/>
+                    <a16:rowId xmlns:a16="http://schemas.microsoft.com/office/drawing/2014/main" val="10006"/>
                   </a:ext>
                 </a:extLst>
               </a:tr>
@@ -21258,7 +19235,7 @@
                 </a:tc>
                 <a:extLst>
                   <a:ext uri="{0D108BD9-81ED-4DB2-BD59-A6C34878D82A}">
-                    <a16:rowId xmlns:a16="http://schemas.microsoft.com/office/drawing/2014/main" val="4238587637"/>
+                    <a16:rowId xmlns:a16="http://schemas.microsoft.com/office/drawing/2014/main" val="10007"/>
                   </a:ext>
                 </a:extLst>
               </a:tr>
@@ -21297,7 +19274,7 @@
                 </a:tc>
                 <a:extLst>
                   <a:ext uri="{0D108BD9-81ED-4DB2-BD59-A6C34878D82A}">
-                    <a16:rowId xmlns:a16="http://schemas.microsoft.com/office/drawing/2014/main" val="3422019471"/>
+                    <a16:rowId xmlns:a16="http://schemas.microsoft.com/office/drawing/2014/main" val="10008"/>
                   </a:ext>
                 </a:extLst>
               </a:tr>
@@ -21336,7 +19313,7 @@
                 </a:tc>
                 <a:extLst>
                   <a:ext uri="{0D108BD9-81ED-4DB2-BD59-A6C34878D82A}">
-                    <a16:rowId xmlns:a16="http://schemas.microsoft.com/office/drawing/2014/main" val="1282255708"/>
+                    <a16:rowId xmlns:a16="http://schemas.microsoft.com/office/drawing/2014/main" val="10009"/>
                   </a:ext>
                 </a:extLst>
               </a:tr>
@@ -21375,7 +19352,7 @@
                 </a:tc>
                 <a:extLst>
                   <a:ext uri="{0D108BD9-81ED-4DB2-BD59-A6C34878D82A}">
-                    <a16:rowId xmlns:a16="http://schemas.microsoft.com/office/drawing/2014/main" val="3849683416"/>
+                    <a16:rowId xmlns:a16="http://schemas.microsoft.com/office/drawing/2014/main" val="10010"/>
                   </a:ext>
                 </a:extLst>
               </a:tr>
@@ -21385,13 +19362,7 @@
       </p:graphicFrame>
       <p:sp>
         <p:nvSpPr>
-          <p:cNvPr id="2" name="TextBox 1">
-            <a:extLst>
-              <a:ext uri="{FF2B5EF4-FFF2-40B4-BE49-F238E27FC236}">
-                <a16:creationId xmlns:a16="http://schemas.microsoft.com/office/drawing/2014/main" id="{0F1ED3C8-0435-7856-D9AD-2B2ADFCD3DDE}"/>
-              </a:ext>
-            </a:extLst>
-          </p:cNvPr>
+          <p:cNvPr id="2" name="TextBox 1"/>
           <p:cNvSpPr txBox="1"/>
           <p:nvPr/>
         </p:nvSpPr>
@@ -21431,11 +19402,6 @@
         </p:txBody>
       </p:sp>
     </p:spTree>
-    <p:extLst>
-      <p:ext uri="{BB962C8B-B14F-4D97-AF65-F5344CB8AC3E}">
-        <p14:creationId xmlns:p14="http://schemas.microsoft.com/office/powerpoint/2010/main" val="683929565"/>
-      </p:ext>
-    </p:extLst>
   </p:cSld>
   <p:clrMapOvr>
     <a:masterClrMapping/>
@@ -21448,13 +19414,7 @@
   <p:cSld>
     <p:spTree>
       <p:nvGrpSpPr>
-        <p:cNvPr id="1" name="">
-          <a:extLst>
-            <a:ext uri="{FF2B5EF4-FFF2-40B4-BE49-F238E27FC236}">
-              <a16:creationId xmlns:a16="http://schemas.microsoft.com/office/drawing/2014/main" id="{4603224D-FFFF-58A7-7841-8E740B310CA9}"/>
-            </a:ext>
-          </a:extLst>
-        </p:cNvPr>
+        <p:cNvPr id="1" name=""/>
         <p:cNvGrpSpPr/>
         <p:nvPr/>
       </p:nvGrpSpPr>
@@ -21468,13 +19428,7 @@
       </p:grpSpPr>
       <p:sp>
         <p:nvSpPr>
-          <p:cNvPr id="3" name="Text Placeholder 2">
-            <a:extLst>
-              <a:ext uri="{FF2B5EF4-FFF2-40B4-BE49-F238E27FC236}">
-                <a16:creationId xmlns:a16="http://schemas.microsoft.com/office/drawing/2014/main" id="{1ED8AE9C-865A-0844-B727-5DC6BA230AA4}"/>
-              </a:ext>
-            </a:extLst>
-          </p:cNvPr>
+          <p:cNvPr id="3" name="Text Placeholder 2"/>
           <p:cNvSpPr>
             <a:spLocks noGrp="1"/>
           </p:cNvSpPr>
@@ -21665,13 +19619,7 @@
       </p:sp>
       <p:sp>
         <p:nvSpPr>
-          <p:cNvPr id="4" name="Rounded Rectangle 17">
-            <a:extLst>
-              <a:ext uri="{FF2B5EF4-FFF2-40B4-BE49-F238E27FC236}">
-                <a16:creationId xmlns:a16="http://schemas.microsoft.com/office/drawing/2014/main" id="{B0E2BF81-4DAE-A908-9199-29B71B54E8F4}"/>
-              </a:ext>
-            </a:extLst>
-          </p:cNvPr>
+          <p:cNvPr id="4" name="Rounded Rectangle 17"/>
           <p:cNvSpPr/>
           <p:nvPr/>
         </p:nvSpPr>
@@ -21732,13 +19680,7 @@
       </p:sp>
       <p:sp>
         <p:nvSpPr>
-          <p:cNvPr id="2" name="TextBox 1">
-            <a:extLst>
-              <a:ext uri="{FF2B5EF4-FFF2-40B4-BE49-F238E27FC236}">
-                <a16:creationId xmlns:a16="http://schemas.microsoft.com/office/drawing/2014/main" id="{FF892FB3-0B71-604E-85BB-3A84C7742FC3}"/>
-              </a:ext>
-            </a:extLst>
-          </p:cNvPr>
+          <p:cNvPr id="2" name="TextBox 1"/>
           <p:cNvSpPr txBox="1"/>
           <p:nvPr/>
         </p:nvSpPr>
@@ -21787,11 +19729,6 @@
         </p:txBody>
       </p:sp>
     </p:spTree>
-    <p:extLst>
-      <p:ext uri="{BB962C8B-B14F-4D97-AF65-F5344CB8AC3E}">
-        <p14:creationId xmlns:p14="http://schemas.microsoft.com/office/powerpoint/2010/main" val="2054725488"/>
-      </p:ext>
-    </p:extLst>
   </p:cSld>
   <p:clrMapOvr>
     <a:masterClrMapping/>
@@ -21842,7 +19779,7 @@
     </a:clrScheme>
     <a:fontScheme name="Office">
       <a:majorFont>
-        <a:latin typeface="Calibri Light" panose="020F0302020204030204"/>
+        <a:latin typeface="Calibri Light"/>
         <a:ea typeface=""/>
         <a:cs typeface=""/>
         <a:font script="Jpan" typeface="游ゴシック Light"/>
@@ -21875,26 +19812,9 @@
         <a:font script="Viet" typeface="Times New Roman"/>
         <a:font script="Uigh" typeface="Microsoft Uighur"/>
         <a:font script="Geor" typeface="Sylfaen"/>
-        <a:font script="Armn" typeface="Arial"/>
-        <a:font script="Bugi" typeface="Leelawadee UI"/>
-        <a:font script="Bopo" typeface="Microsoft JhengHei"/>
-        <a:font script="Java" typeface="Javanese Text"/>
-        <a:font script="Lisu" typeface="Segoe UI"/>
-        <a:font script="Mymr" typeface="Myanmar Text"/>
-        <a:font script="Nkoo" typeface="Ebrima"/>
-        <a:font script="Olck" typeface="Nirmala UI"/>
-        <a:font script="Osma" typeface="Ebrima"/>
-        <a:font script="Phag" typeface="Phagspa"/>
-        <a:font script="Syrn" typeface="Estrangelo Edessa"/>
-        <a:font script="Syrj" typeface="Estrangelo Edessa"/>
-        <a:font script="Syre" typeface="Estrangelo Edessa"/>
-        <a:font script="Sora" typeface="Nirmala UI"/>
-        <a:font script="Tale" typeface="Microsoft Tai Le"/>
-        <a:font script="Talu" typeface="Microsoft New Tai Lue"/>
-        <a:font script="Tfng" typeface="Ebrima"/>
       </a:majorFont>
       <a:minorFont>
-        <a:latin typeface="Calibri" panose="020F0502020204030204"/>
+        <a:latin typeface="Calibri"/>
         <a:ea typeface=""/>
         <a:cs typeface=""/>
         <a:font script="Jpan" typeface="游ゴシック"/>
@@ -21927,23 +19847,6 @@
         <a:font script="Viet" typeface="Arial"/>
         <a:font script="Uigh" typeface="Microsoft Uighur"/>
         <a:font script="Geor" typeface="Sylfaen"/>
-        <a:font script="Armn" typeface="Arial"/>
-        <a:font script="Bugi" typeface="Leelawadee UI"/>
-        <a:font script="Bopo" typeface="Microsoft JhengHei"/>
-        <a:font script="Java" typeface="Javanese Text"/>
-        <a:font script="Lisu" typeface="Segoe UI"/>
-        <a:font script="Mymr" typeface="Myanmar Text"/>
-        <a:font script="Nkoo" typeface="Ebrima"/>
-        <a:font script="Olck" typeface="Nirmala UI"/>
-        <a:font script="Osma" typeface="Ebrima"/>
-        <a:font script="Phag" typeface="Phagspa"/>
-        <a:font script="Syrn" typeface="Estrangelo Edessa"/>
-        <a:font script="Syrj" typeface="Estrangelo Edessa"/>
-        <a:font script="Syre" typeface="Estrangelo Edessa"/>
-        <a:font script="Sora" typeface="Nirmala UI"/>
-        <a:font script="Tale" typeface="Microsoft Tai Le"/>
-        <a:font script="Talu" typeface="Microsoft New Tai Lue"/>
-        <a:font script="Tfng" typeface="Ebrima"/>
       </a:minorFont>
     </a:fontScheme>
     <a:fmtScheme name="Office">
@@ -22137,7 +20040,7 @@
     </a:clrScheme>
     <a:fontScheme name="Office">
       <a:majorFont>
-        <a:latin typeface="Calibri Light" panose="020F0302020204030204"/>
+        <a:latin typeface="Calibri Light"/>
         <a:ea typeface=""/>
         <a:cs typeface=""/>
         <a:font script="Jpan" typeface="游ゴシック Light"/>
@@ -22170,26 +20073,9 @@
         <a:font script="Viet" typeface="Times New Roman"/>
         <a:font script="Uigh" typeface="Microsoft Uighur"/>
         <a:font script="Geor" typeface="Sylfaen"/>
-        <a:font script="Armn" typeface="Arial"/>
-        <a:font script="Bugi" typeface="Leelawadee UI"/>
-        <a:font script="Bopo" typeface="Microsoft JhengHei"/>
-        <a:font script="Java" typeface="Javanese Text"/>
-        <a:font script="Lisu" typeface="Segoe UI"/>
-        <a:font script="Mymr" typeface="Myanmar Text"/>
-        <a:font script="Nkoo" typeface="Ebrima"/>
-        <a:font script="Olck" typeface="Nirmala UI"/>
-        <a:font script="Osma" typeface="Ebrima"/>
-        <a:font script="Phag" typeface="Phagspa"/>
-        <a:font script="Syrn" typeface="Estrangelo Edessa"/>
-        <a:font script="Syrj" typeface="Estrangelo Edessa"/>
-        <a:font script="Syre" typeface="Estrangelo Edessa"/>
-        <a:font script="Sora" typeface="Nirmala UI"/>
-        <a:font script="Tale" typeface="Microsoft Tai Le"/>
-        <a:font script="Talu" typeface="Microsoft New Tai Lue"/>
-        <a:font script="Tfng" typeface="Ebrima"/>
       </a:majorFont>
       <a:minorFont>
-        <a:latin typeface="Calibri" panose="020F0502020204030204"/>
+        <a:latin typeface="Calibri"/>
         <a:ea typeface=""/>
         <a:cs typeface=""/>
         <a:font script="Jpan" typeface="游ゴシック"/>
@@ -22222,23 +20108,6 @@
         <a:font script="Viet" typeface="Arial"/>
         <a:font script="Uigh" typeface="Microsoft Uighur"/>
         <a:font script="Geor" typeface="Sylfaen"/>
-        <a:font script="Armn" typeface="Arial"/>
-        <a:font script="Bugi" typeface="Leelawadee UI"/>
-        <a:font script="Bopo" typeface="Microsoft JhengHei"/>
-        <a:font script="Java" typeface="Javanese Text"/>
-        <a:font script="Lisu" typeface="Segoe UI"/>
-        <a:font script="Mymr" typeface="Myanmar Text"/>
-        <a:font script="Nkoo" typeface="Ebrima"/>
-        <a:font script="Olck" typeface="Nirmala UI"/>
-        <a:font script="Osma" typeface="Ebrima"/>
-        <a:font script="Phag" typeface="Phagspa"/>
-        <a:font script="Syrn" typeface="Estrangelo Edessa"/>
-        <a:font script="Syrj" typeface="Estrangelo Edessa"/>
-        <a:font script="Syre" typeface="Estrangelo Edessa"/>
-        <a:font script="Sora" typeface="Nirmala UI"/>
-        <a:font script="Tale" typeface="Microsoft Tai Le"/>
-        <a:font script="Talu" typeface="Microsoft New Tai Lue"/>
-        <a:font script="Tfng" typeface="Ebrima"/>
       </a:minorFont>
     </a:fontScheme>
     <a:fmtScheme name="Office">
@@ -22432,7 +20301,7 @@
     </a:clrScheme>
     <a:fontScheme name="Office">
       <a:majorFont>
-        <a:latin typeface="Calibri Light" panose="020F0302020204030204"/>
+        <a:latin typeface="Calibri Light"/>
         <a:ea typeface=""/>
         <a:cs typeface=""/>
         <a:font script="Jpan" typeface="游ゴシック Light"/>
@@ -22465,26 +20334,9 @@
         <a:font script="Viet" typeface="Times New Roman"/>
         <a:font script="Uigh" typeface="Microsoft Uighur"/>
         <a:font script="Geor" typeface="Sylfaen"/>
-        <a:font script="Armn" typeface="Arial"/>
-        <a:font script="Bugi" typeface="Leelawadee UI"/>
-        <a:font script="Bopo" typeface="Microsoft JhengHei"/>
-        <a:font script="Java" typeface="Javanese Text"/>
-        <a:font script="Lisu" typeface="Segoe UI"/>
-        <a:font script="Mymr" typeface="Myanmar Text"/>
-        <a:font script="Nkoo" typeface="Ebrima"/>
-        <a:font script="Olck" typeface="Nirmala UI"/>
-        <a:font script="Osma" typeface="Ebrima"/>
-        <a:font script="Phag" typeface="Phagspa"/>
-        <a:font script="Syrn" typeface="Estrangelo Edessa"/>
-        <a:font script="Syrj" typeface="Estrangelo Edessa"/>
-        <a:font script="Syre" typeface="Estrangelo Edessa"/>
-        <a:font script="Sora" typeface="Nirmala UI"/>
-        <a:font script="Tale" typeface="Microsoft Tai Le"/>
-        <a:font script="Talu" typeface="Microsoft New Tai Lue"/>
-        <a:font script="Tfng" typeface="Ebrima"/>
       </a:majorFont>
       <a:minorFont>
-        <a:latin typeface="Calibri" panose="020F0502020204030204"/>
+        <a:latin typeface="Calibri"/>
         <a:ea typeface=""/>
         <a:cs typeface=""/>
         <a:font script="Jpan" typeface="游ゴシック"/>
@@ -22517,23 +20369,6 @@
         <a:font script="Viet" typeface="Arial"/>
         <a:font script="Uigh" typeface="Microsoft Uighur"/>
         <a:font script="Geor" typeface="Sylfaen"/>
-        <a:font script="Armn" typeface="Arial"/>
-        <a:font script="Bugi" typeface="Leelawadee UI"/>
-        <a:font script="Bopo" typeface="Microsoft JhengHei"/>
-        <a:font script="Java" typeface="Javanese Text"/>
-        <a:font script="Lisu" typeface="Segoe UI"/>
-        <a:font script="Mymr" typeface="Myanmar Text"/>
-        <a:font script="Nkoo" typeface="Ebrima"/>
-        <a:font script="Olck" typeface="Nirmala UI"/>
-        <a:font script="Osma" typeface="Ebrima"/>
-        <a:font script="Phag" typeface="Phagspa"/>
-        <a:font script="Syrn" typeface="Estrangelo Edessa"/>
-        <a:font script="Syrj" typeface="Estrangelo Edessa"/>
-        <a:font script="Syre" typeface="Estrangelo Edessa"/>
-        <a:font script="Sora" typeface="Nirmala UI"/>
-        <a:font script="Tale" typeface="Microsoft Tai Le"/>
-        <a:font script="Talu" typeface="Microsoft New Tai Lue"/>
-        <a:font script="Tfng" typeface="Ebrima"/>
       </a:minorFont>
     </a:fontScheme>
     <a:fmtScheme name="Office">
@@ -22727,7 +20562,7 @@
     </a:clrScheme>
     <a:fontScheme name="Office Theme">
       <a:majorFont>
-        <a:latin typeface="Calibri Light" panose="020F0302020204030204"/>
+        <a:latin typeface="Calibri Light"/>
         <a:ea typeface=""/>
         <a:cs typeface=""/>
         <a:font script="Jpan" typeface="游ゴシック Light"/>
@@ -22762,7 +20597,7 @@
         <a:font script="Geor" typeface="Sylfaen"/>
       </a:majorFont>
       <a:minorFont>
-        <a:latin typeface="Calibri" panose="020F0502020204030204"/>
+        <a:latin typeface="Calibri"/>
         <a:ea typeface=""/>
         <a:cs typeface=""/>
         <a:font script="Jpan" typeface="游ゴシック"/>
@@ -22939,7 +20774,7 @@
   <a:extraClrSchemeLst/>
   <a:extLst>
     <a:ext uri="{05A4C25C-085E-4340-85A3-A5531E510DB2}">
-      <thm15:themeFamily xmlns:thm15="http://schemas.microsoft.com/office/thememl/2012/main" name="Office 2013 - 2022 Theme" id="{62F939B6-93AF-4DB8-9C6B-D6C7DFDC589F}" vid="{AE6F2518-B084-4896-AF52-66CC2144AA26}"/>
+      <thm15:themeFamily xmlns:thm15="http://schemas.microsoft.com/office/thememl/2012/main" name="Office Theme" id="{62F939B6-93AF-4DB8-9C6B-D6C7DFDC589F}" vid="{4A3C46E8-61CC-4603-A589-7422A47A8E4A}"/>
     </a:ext>
   </a:extLst>
 </a:theme>
@@ -22988,7 +20823,7 @@
     </a:clrScheme>
     <a:fontScheme name="Office">
       <a:majorFont>
-        <a:latin typeface="Calibri Light" panose="020F0302020204030204"/>
+        <a:latin typeface="Calibri Light"/>
         <a:ea typeface=""/>
         <a:cs typeface=""/>
         <a:font script="Jpan" typeface="游ゴシック Light"/>
@@ -23021,26 +20856,9 @@
         <a:font script="Viet" typeface="Times New Roman"/>
         <a:font script="Uigh" typeface="Microsoft Uighur"/>
         <a:font script="Geor" typeface="Sylfaen"/>
-        <a:font script="Armn" typeface="Arial"/>
-        <a:font script="Bugi" typeface="Leelawadee UI"/>
-        <a:font script="Bopo" typeface="Microsoft JhengHei"/>
-        <a:font script="Java" typeface="Javanese Text"/>
-        <a:font script="Lisu" typeface="Segoe UI"/>
-        <a:font script="Mymr" typeface="Myanmar Text"/>
-        <a:font script="Nkoo" typeface="Ebrima"/>
-        <a:font script="Olck" typeface="Nirmala UI"/>
-        <a:font script="Osma" typeface="Ebrima"/>
-        <a:font script="Phag" typeface="Phagspa"/>
-        <a:font script="Syrn" typeface="Estrangelo Edessa"/>
-        <a:font script="Syrj" typeface="Estrangelo Edessa"/>
-        <a:font script="Syre" typeface="Estrangelo Edessa"/>
-        <a:font script="Sora" typeface="Nirmala UI"/>
-        <a:font script="Tale" typeface="Microsoft Tai Le"/>
-        <a:font script="Talu" typeface="Microsoft New Tai Lue"/>
-        <a:font script="Tfng" typeface="Ebrima"/>
       </a:majorFont>
       <a:minorFont>
-        <a:latin typeface="Calibri" panose="020F0502020204030204"/>
+        <a:latin typeface="Calibri"/>
         <a:ea typeface=""/>
         <a:cs typeface=""/>
         <a:font script="Jpan" typeface="游ゴシック"/>
@@ -23073,23 +20891,6 @@
         <a:font script="Viet" typeface="Arial"/>
         <a:font script="Uigh" typeface="Microsoft Uighur"/>
         <a:font script="Geor" typeface="Sylfaen"/>
-        <a:font script="Armn" typeface="Arial"/>
-        <a:font script="Bugi" typeface="Leelawadee UI"/>
-        <a:font script="Bopo" typeface="Microsoft JhengHei"/>
-        <a:font script="Java" typeface="Javanese Text"/>
-        <a:font script="Lisu" typeface="Segoe UI"/>
-        <a:font script="Mymr" typeface="Myanmar Text"/>
-        <a:font script="Nkoo" typeface="Ebrima"/>
-        <a:font script="Olck" typeface="Nirmala UI"/>
-        <a:font script="Osma" typeface="Ebrima"/>
-        <a:font script="Phag" typeface="Phagspa"/>
-        <a:font script="Syrn" typeface="Estrangelo Edessa"/>
-        <a:font script="Syrj" typeface="Estrangelo Edessa"/>
-        <a:font script="Syre" typeface="Estrangelo Edessa"/>
-        <a:font script="Sora" typeface="Nirmala UI"/>
-        <a:font script="Tale" typeface="Microsoft Tai Le"/>
-        <a:font script="Talu" typeface="Microsoft New Tai Lue"/>
-        <a:font script="Tfng" typeface="Ebrima"/>
       </a:minorFont>
     </a:fontScheme>
     <a:fmtScheme name="Office">
@@ -23283,7 +21084,7 @@
     </a:clrScheme>
     <a:fontScheme name="Office">
       <a:majorFont>
-        <a:latin typeface="Calibri Light" panose="020F0302020204030204"/>
+        <a:latin typeface="Calibri Light"/>
         <a:ea typeface=""/>
         <a:cs typeface=""/>
         <a:font script="Jpan" typeface="游ゴシック Light"/>
@@ -23316,26 +21117,9 @@
         <a:font script="Viet" typeface="Times New Roman"/>
         <a:font script="Uigh" typeface="Microsoft Uighur"/>
         <a:font script="Geor" typeface="Sylfaen"/>
-        <a:font script="Armn" typeface="Arial"/>
-        <a:font script="Bugi" typeface="Leelawadee UI"/>
-        <a:font script="Bopo" typeface="Microsoft JhengHei"/>
-        <a:font script="Java" typeface="Javanese Text"/>
-        <a:font script="Lisu" typeface="Segoe UI"/>
-        <a:font script="Mymr" typeface="Myanmar Text"/>
-        <a:font script="Nkoo" typeface="Ebrima"/>
-        <a:font script="Olck" typeface="Nirmala UI"/>
-        <a:font script="Osma" typeface="Ebrima"/>
-        <a:font script="Phag" typeface="Phagspa"/>
-        <a:font script="Syrn" typeface="Estrangelo Edessa"/>
-        <a:font script="Syrj" typeface="Estrangelo Edessa"/>
-        <a:font script="Syre" typeface="Estrangelo Edessa"/>
-        <a:font script="Sora" typeface="Nirmala UI"/>
-        <a:font script="Tale" typeface="Microsoft Tai Le"/>
-        <a:font script="Talu" typeface="Microsoft New Tai Lue"/>
-        <a:font script="Tfng" typeface="Ebrima"/>
       </a:majorFont>
       <a:minorFont>
-        <a:latin typeface="Calibri" panose="020F0502020204030204"/>
+        <a:latin typeface="Calibri"/>
         <a:ea typeface=""/>
         <a:cs typeface=""/>
         <a:font script="Jpan" typeface="游ゴシック"/>
@@ -23368,23 +21152,6 @@
         <a:font script="Viet" typeface="Arial"/>
         <a:font script="Uigh" typeface="Microsoft Uighur"/>
         <a:font script="Geor" typeface="Sylfaen"/>
-        <a:font script="Armn" typeface="Arial"/>
-        <a:font script="Bugi" typeface="Leelawadee UI"/>
-        <a:font script="Bopo" typeface="Microsoft JhengHei"/>
-        <a:font script="Java" typeface="Javanese Text"/>
-        <a:font script="Lisu" typeface="Segoe UI"/>
-        <a:font script="Mymr" typeface="Myanmar Text"/>
-        <a:font script="Nkoo" typeface="Ebrima"/>
-        <a:font script="Olck" typeface="Nirmala UI"/>
-        <a:font script="Osma" typeface="Ebrima"/>
-        <a:font script="Phag" typeface="Phagspa"/>
-        <a:font script="Syrn" typeface="Estrangelo Edessa"/>
-        <a:font script="Syrj" typeface="Estrangelo Edessa"/>
-        <a:font script="Syre" typeface="Estrangelo Edessa"/>
-        <a:font script="Sora" typeface="Nirmala UI"/>
-        <a:font script="Tale" typeface="Microsoft Tai Le"/>
-        <a:font script="Talu" typeface="Microsoft New Tai Lue"/>
-        <a:font script="Tfng" typeface="Ebrima"/>
       </a:minorFont>
     </a:fontScheme>
     <a:fmtScheme name="Office">
